--- a/applications/oyw/documents/oyw_ppt.pptx
+++ b/applications/oyw/documents/oyw_ppt.pptx
@@ -14,7 +14,6 @@
     <p:sldId id="262" r:id="rId13"/>
     <p:sldId id="263" r:id="rId14"/>
     <p:sldId id="264" r:id="rId15"/>
-    <p:sldId id="265" r:id="rId16"/>
   </p:sldIdLst>
   <p:sldSz cx="12191695" cy="6858000" type="screen4x3"/>
   <p:notesSz cx="6858000" cy="9144000"/>
@@ -3099,7 +3098,7 @@
       <p:grpSpPr/>
       <p:pic>
         <p:nvPicPr>
-          <p:cNvPr id="2" name="Picture 1" descr="cover_hero_cinematic_opt.jpg"/>
+          <p:cNvPr id="2" name="Picture 1" descr="hero_chw_mobile_opt.jpg"/>
           <p:cNvPicPr>
             <a:picLocks noChangeAspect="1"/>
           </p:cNvPicPr>
@@ -3107,15 +3106,14 @@
         </p:nvPicPr>
         <p:blipFill>
           <a:blip r:embed="rId2"/>
-          <a:srcRect l="33" r="33"/>
           <a:stretch>
             <a:fillRect/>
           </a:stretch>
         </p:blipFill>
         <p:spPr>
           <a:xfrm>
-            <a:off x="0" y="0"/>
-            <a:ext cx="12191695" cy="6858000"/>
+            <a:off x="952347" y="0"/>
+            <a:ext cx="10287000" cy="6858000"/>
           </a:xfrm>
           <a:prstGeom prst="rect">
             <a:avLst/>
@@ -3130,8 +3128,8 @@
         </p:nvSpPr>
         <p:spPr>
           <a:xfrm>
-            <a:off x="0" y="3474720"/>
-            <a:ext cx="12191695" cy="3383280"/>
+            <a:off x="0" y="3840480"/>
+            <a:ext cx="12191695" cy="3017520"/>
           </a:xfrm>
           <a:prstGeom prst="rect">
             <a:avLst/>
@@ -3142,7 +3140,6 @@
           <a:ln>
             <a:noFill/>
           </a:ln>
-          <a:effectLst/>
         </p:spPr>
         <p:style>
           <a:lnRef idx="1">
@@ -3174,7 +3171,7 @@
         </p:nvSpPr>
         <p:spPr>
           <a:xfrm>
-            <a:off x="594360" y="3749040"/>
+            <a:off x="502920" y="4069080"/>
             <a:ext cx="10972800" cy="320040"/>
           </a:xfrm>
           <a:prstGeom prst="rect">
@@ -3183,24 +3180,20 @@
           <a:noFill/>
         </p:spPr>
         <p:txBody>
-          <a:bodyPr wrap="square" anchor="t">
+          <a:bodyPr wrap="square">
             <a:spAutoFit/>
           </a:bodyPr>
           <a:lstStyle/>
           <a:p>
-            <a:pPr algn="l">
-              <a:spcAft>
-                <a:spcPts val="0"/>
-              </a:spcAft>
-            </a:pPr>
-            <a:r>
-              <a:rPr sz="1300" b="1" i="0">
-                <a:solidFill>
-                  <a:srgbClr val="14A3A3"/>
+            <a:pPr algn="l"/>
+            <a:r>
+              <a:rPr sz="1200" b="1" i="0">
+                <a:solidFill>
+                  <a:srgbClr val="0D6E6E"/>
                 </a:solidFill>
                 <a:latin typeface="Calibri"/>
               </a:rPr>
-              <a:t>Brandtech Group AI for Good Scholarship 2026 (One Young World)</a:t>
+              <a:t>Brandtech Group AI for Good Scholarship 2026 — One Young World</a:t>
             </a:r>
           </a:p>
         </p:txBody>
@@ -3213,8 +3206,8 @@
         </p:nvSpPr>
         <p:spPr>
           <a:xfrm>
-            <a:off x="594360" y="4206240"/>
-            <a:ext cx="10972800" cy="640080"/>
+            <a:off x="502920" y="4572000"/>
+            <a:ext cx="10972800" cy="685800"/>
           </a:xfrm>
           <a:prstGeom prst="rect">
             <a:avLst/>
@@ -3222,24 +3215,20 @@
           <a:noFill/>
         </p:spPr>
         <p:txBody>
-          <a:bodyPr wrap="square" anchor="t">
+          <a:bodyPr wrap="square">
             <a:spAutoFit/>
           </a:bodyPr>
           <a:lstStyle/>
           <a:p>
-            <a:pPr algn="l">
-              <a:spcAft>
-                <a:spcPts val="0"/>
-              </a:spcAft>
-            </a:pPr>
-            <a:r>
-              <a:rPr sz="2600" b="1" i="0">
+            <a:pPr algn="l"/>
+            <a:r>
+              <a:rPr sz="2400" b="1" i="0">
                 <a:solidFill>
                   <a:srgbClr val="FFFFFF"/>
                 </a:solidFill>
                 <a:latin typeface="Calibri"/>
               </a:rPr>
-              <a:t>AI for Community Health — Cape Town Summit</a:t>
+              <a:t>Nominee Profile — Responsible AI for Community Health</a:t>
             </a:r>
           </a:p>
         </p:txBody>
@@ -3252,8 +3241,8 @@
         </p:nvSpPr>
         <p:spPr>
           <a:xfrm>
-            <a:off x="594360" y="4983481"/>
-            <a:ext cx="10972800" cy="365760"/>
+            <a:off x="502920" y="5440680"/>
+            <a:ext cx="10972800" cy="411480"/>
           </a:xfrm>
           <a:prstGeom prst="rect">
             <a:avLst/>
@@ -3261,24 +3250,20 @@
           <a:noFill/>
         </p:spPr>
         <p:txBody>
-          <a:bodyPr wrap="square" anchor="t">
+          <a:bodyPr wrap="square">
             <a:spAutoFit/>
           </a:bodyPr>
           <a:lstStyle/>
           <a:p>
-            <a:pPr algn="l">
-              <a:spcAft>
-                <a:spcPts val="0"/>
-              </a:spcAft>
-            </a:pPr>
-            <a:r>
-              <a:rPr sz="1500" b="0" i="1">
+            <a:pPr algn="l"/>
+            <a:r>
+              <a:rPr sz="1400" b="0" i="1">
                 <a:solidFill>
                   <a:srgbClr val="F2C79B"/>
                 </a:solidFill>
                 <a:latin typeface="Calibri"/>
               </a:rPr>
-              <a:t>Fully funded seat for a young African leader using AI for health impact</a:t>
+              <a:t>From Kampala outreach to Cape Town — AI that serves communities first</a:t>
             </a:r>
           </a:p>
         </p:txBody>
@@ -3291,8 +3276,8 @@
         </p:nvSpPr>
         <p:spPr>
           <a:xfrm>
-            <a:off x="594360" y="5532120"/>
-            <a:ext cx="10972800" cy="274320"/>
+            <a:off x="502920" y="5989320"/>
+            <a:ext cx="10972800" cy="320040"/>
           </a:xfrm>
           <a:prstGeom prst="rect">
             <a:avLst/>
@@ -3300,300 +3285,14 @@
           <a:noFill/>
         </p:spPr>
         <p:txBody>
-          <a:bodyPr wrap="square" anchor="t">
+          <a:bodyPr wrap="square">
             <a:spAutoFit/>
           </a:bodyPr>
           <a:lstStyle/>
           <a:p>
-            <a:pPr algn="l">
-              <a:spcAft>
-                <a:spcPts val="0"/>
-              </a:spcAft>
-            </a:pPr>
+            <a:pPr algn="l"/>
             <a:r>
               <a:rPr sz="1300" b="1" i="0">
-                <a:solidFill>
-                  <a:srgbClr val="FFFFFF"/>
-                </a:solidFill>
-                <a:latin typeface="Calibri"/>
-              </a:rPr>
-              <a:t>Your health, our mission.</a:t>
-            </a:r>
-          </a:p>
-        </p:txBody>
-      </p:sp>
-      <p:sp>
-        <p:nvSpPr>
-          <p:cNvPr id="8" name="TextBox 7"/>
-          <p:cNvSpPr txBox="1"/>
-          <p:nvPr/>
-        </p:nvSpPr>
-        <p:spPr>
-          <a:xfrm>
-            <a:off x="594360" y="5989320"/>
-            <a:ext cx="10972800" cy="365760"/>
-          </a:xfrm>
-          <a:prstGeom prst="rect">
-            <a:avLst/>
-          </a:prstGeom>
-          <a:noFill/>
-        </p:spPr>
-        <p:txBody>
-          <a:bodyPr wrap="square" anchor="t">
-            <a:spAutoFit/>
-          </a:bodyPr>
-          <a:lstStyle/>
-          <a:p>
-            <a:pPr algn="l">
-              <a:spcAft>
-                <a:spcPts val="0"/>
-              </a:spcAft>
-            </a:pPr>
-            <a:r>
-              <a:rPr sz="1200" b="0" i="0">
-                <a:solidFill>
-                  <a:srgbClr val="D0E8E8"/>
-                </a:solidFill>
-                <a:latin typeface="Calibri"/>
-              </a:rPr>
-              <a:t>Award one of five AI for Good scholarships to a FairBanks young leader.</a:t>
-            </a:r>
-          </a:p>
-        </p:txBody>
-      </p:sp>
-    </p:spTree>
-  </p:cSld>
-  <p:clrMapOvr>
-    <a:masterClrMapping/>
-  </p:clrMapOvr>
-</p:sld>
-</file>
-
-<file path=ppt/slides/slide10.xml><?xml version="1.0" encoding="utf-8"?>
-<p:sld xmlns:a="http://schemas.openxmlformats.org/drawingml/2006/main" xmlns:p="http://schemas.openxmlformats.org/presentationml/2006/main" xmlns:r="http://schemas.openxmlformats.org/officeDocument/2006/relationships">
-  <p:cSld>
-    <p:spTree>
-      <p:nvGrpSpPr>
-        <p:cNvPr id="1" name=""/>
-        <p:cNvGrpSpPr/>
-        <p:nvPr/>
-      </p:nvGrpSpPr>
-      <p:grpSpPr/>
-      <p:pic>
-        <p:nvPicPr>
-          <p:cNvPr id="2" name="Picture 1" descr="outreach_audience_full_group_01_opt.jpg"/>
-          <p:cNvPicPr>
-            <a:picLocks noChangeAspect="1"/>
-          </p:cNvPicPr>
-          <p:nvPr/>
-        </p:nvPicPr>
-        <p:blipFill>
-          <a:blip r:embed="rId2"/>
-          <a:srcRect t="7796" b="7796"/>
-          <a:stretch>
-            <a:fillRect/>
-          </a:stretch>
-        </p:blipFill>
-        <p:spPr>
-          <a:xfrm>
-            <a:off x="0" y="0"/>
-            <a:ext cx="12191695" cy="6858000"/>
-          </a:xfrm>
-          <a:prstGeom prst="rect">
-            <a:avLst/>
-          </a:prstGeom>
-        </p:spPr>
-      </p:pic>
-      <p:sp>
-        <p:nvSpPr>
-          <p:cNvPr id="3" name="Rectangle 2"/>
-          <p:cNvSpPr/>
-          <p:nvPr/>
-        </p:nvSpPr>
-        <p:spPr>
-          <a:xfrm>
-            <a:off x="0" y="3657600"/>
-            <a:ext cx="12191695" cy="3200400"/>
-          </a:xfrm>
-          <a:prstGeom prst="rect">
-            <a:avLst/>
-          </a:prstGeom>
-          <a:solidFill>
-            <a:srgbClr val="0A1F2E"/>
-          </a:solidFill>
-          <a:ln>
-            <a:noFill/>
-          </a:ln>
-          <a:effectLst/>
-        </p:spPr>
-        <p:style>
-          <a:lnRef idx="1">
-            <a:schemeClr val="accent1"/>
-          </a:lnRef>
-          <a:fillRef idx="3">
-            <a:schemeClr val="accent1"/>
-          </a:fillRef>
-          <a:effectRef idx="2">
-            <a:schemeClr val="accent1"/>
-          </a:effectRef>
-          <a:fontRef idx="minor">
-            <a:schemeClr val="lt1"/>
-          </a:fontRef>
-        </p:style>
-        <p:txBody>
-          <a:bodyPr rtlCol="0" anchor="ctr"/>
-          <a:lstStyle/>
-          <a:p>
-            <a:pPr algn="ctr"/>
-          </a:p>
-        </p:txBody>
-      </p:sp>
-      <p:sp>
-        <p:nvSpPr>
-          <p:cNvPr id="4" name="TextBox 3"/>
-          <p:cNvSpPr txBox="1"/>
-          <p:nvPr/>
-        </p:nvSpPr>
-        <p:spPr>
-          <a:xfrm>
-            <a:off x="594360" y="3931920"/>
-            <a:ext cx="10972800" cy="274320"/>
-          </a:xfrm>
-          <a:prstGeom prst="rect">
-            <a:avLst/>
-          </a:prstGeom>
-          <a:noFill/>
-        </p:spPr>
-        <p:txBody>
-          <a:bodyPr wrap="square" anchor="t">
-            <a:spAutoFit/>
-          </a:bodyPr>
-          <a:lstStyle/>
-          <a:p>
-            <a:pPr algn="l">
-              <a:spcAft>
-                <a:spcPts val="0"/>
-              </a:spcAft>
-            </a:pPr>
-            <a:r>
-              <a:rPr sz="1300" b="1" i="0">
-                <a:solidFill>
-                  <a:srgbClr val="14A3A3"/>
-                </a:solidFill>
-                <a:latin typeface="Calibri"/>
-              </a:rPr>
-              <a:t>The ask</a:t>
-            </a:r>
-          </a:p>
-        </p:txBody>
-      </p:sp>
-      <p:sp>
-        <p:nvSpPr>
-          <p:cNvPr id="5" name="TextBox 4"/>
-          <p:cNvSpPr txBox="1"/>
-          <p:nvPr/>
-        </p:nvSpPr>
-        <p:spPr>
-          <a:xfrm>
-            <a:off x="594360" y="4389120"/>
-            <a:ext cx="10972800" cy="822960"/>
-          </a:xfrm>
-          <a:prstGeom prst="rect">
-            <a:avLst/>
-          </a:prstGeom>
-          <a:noFill/>
-        </p:spPr>
-        <p:txBody>
-          <a:bodyPr wrap="square" anchor="t">
-            <a:spAutoFit/>
-          </a:bodyPr>
-          <a:lstStyle/>
-          <a:p>
-            <a:pPr algn="l">
-              <a:spcAft>
-                <a:spcPts val="0"/>
-              </a:spcAft>
-            </a:pPr>
-            <a:r>
-              <a:rPr sz="2200" b="1" i="0">
-                <a:solidFill>
-                  <a:srgbClr val="FFFFFF"/>
-                </a:solidFill>
-                <a:latin typeface="Calibri"/>
-              </a:rPr>
-              <a:t>Award one of five AI for Good scholarships to a FairBanks young leader.</a:t>
-            </a:r>
-          </a:p>
-        </p:txBody>
-      </p:sp>
-      <p:sp>
-        <p:nvSpPr>
-          <p:cNvPr id="6" name="TextBox 5"/>
-          <p:cNvSpPr txBox="1"/>
-          <p:nvPr/>
-        </p:nvSpPr>
-        <p:spPr>
-          <a:xfrm>
-            <a:off x="594360" y="5394960"/>
-            <a:ext cx="10972800" cy="365760"/>
-          </a:xfrm>
-          <a:prstGeom prst="rect">
-            <a:avLst/>
-          </a:prstGeom>
-          <a:noFill/>
-        </p:spPr>
-        <p:txBody>
-          <a:bodyPr wrap="square" anchor="t">
-            <a:spAutoFit/>
-          </a:bodyPr>
-          <a:lstStyle/>
-          <a:p>
-            <a:pPr algn="l">
-              <a:spcAft>
-                <a:spcPts val="0"/>
-              </a:spcAft>
-            </a:pPr>
-            <a:r>
-              <a:rPr sz="1400" b="0" i="1">
-                <a:solidFill>
-                  <a:srgbClr val="F2C79B"/>
-                </a:solidFill>
-                <a:latin typeface="Calibri"/>
-              </a:rPr>
-              <a:t>Fully funded seat for a young African leader using AI for health impact</a:t>
-            </a:r>
-          </a:p>
-        </p:txBody>
-      </p:sp>
-      <p:sp>
-        <p:nvSpPr>
-          <p:cNvPr id="7" name="TextBox 6"/>
-          <p:cNvSpPr txBox="1"/>
-          <p:nvPr/>
-        </p:nvSpPr>
-        <p:spPr>
-          <a:xfrm>
-            <a:off x="594360" y="5943600"/>
-            <a:ext cx="10972800" cy="320040"/>
-          </a:xfrm>
-          <a:prstGeom prst="rect">
-            <a:avLst/>
-          </a:prstGeom>
-          <a:noFill/>
-        </p:spPr>
-        <p:txBody>
-          <a:bodyPr wrap="square" anchor="t">
-            <a:spAutoFit/>
-          </a:bodyPr>
-          <a:lstStyle/>
-          <a:p>
-            <a:pPr algn="l">
-              <a:spcAft>
-                <a:spcPts val="0"/>
-              </a:spcAft>
-            </a:pPr>
-            <a:r>
-              <a:rPr sz="1400" b="1" i="0">
                 <a:solidFill>
                   <a:srgbClr val="FFFFFF"/>
                 </a:solidFill>
@@ -3642,7 +3341,6 @@
           <a:ln>
             <a:noFill/>
           </a:ln>
-          <a:effectLst/>
         </p:spPr>
         <p:style>
           <a:lnRef idx="1">
@@ -3674,19 +3372,18 @@
         </p:nvSpPr>
         <p:spPr>
           <a:xfrm>
-            <a:off x="0" y="0"/>
-            <a:ext cx="164592" cy="960120"/>
+            <a:off x="457200" y="164592"/>
+            <a:ext cx="73152" cy="640080"/>
           </a:xfrm>
           <a:prstGeom prst="rect">
             <a:avLst/>
           </a:prstGeom>
           <a:solidFill>
-            <a:srgbClr val="0D6E6E"/>
+            <a:srgbClr val="C45C26"/>
           </a:solidFill>
           <a:ln>
             <a:noFill/>
           </a:ln>
-          <a:effectLst/>
         </p:spPr>
         <p:style>
           <a:lnRef idx="1">
@@ -3718,125 +3415,8 @@
         </p:nvSpPr>
         <p:spPr>
           <a:xfrm>
-            <a:off x="457200" y="109728"/>
-            <a:ext cx="10972800" cy="256032"/>
-          </a:xfrm>
-          <a:prstGeom prst="rect">
-            <a:avLst/>
-          </a:prstGeom>
-          <a:noFill/>
-        </p:spPr>
-        <p:txBody>
-          <a:bodyPr wrap="square" anchor="t">
-            <a:spAutoFit/>
-          </a:bodyPr>
-          <a:lstStyle/>
-          <a:p>
-            <a:pPr algn="l">
-              <a:spcAft>
-                <a:spcPts val="0"/>
-              </a:spcAft>
-            </a:pPr>
-            <a:r>
-              <a:rPr sz="1100" b="1" i="0">
-                <a:solidFill>
-                  <a:srgbClr val="C45C26"/>
-                </a:solidFill>
-                <a:latin typeface="Calibri"/>
-              </a:rPr>
-              <a:t>WIN-WIN</a:t>
-            </a:r>
-          </a:p>
-        </p:txBody>
-      </p:sp>
-      <p:sp>
-        <p:nvSpPr>
-          <p:cNvPr id="5" name="TextBox 4"/>
-          <p:cNvSpPr txBox="1"/>
-          <p:nvPr/>
-        </p:nvSpPr>
-        <p:spPr>
-          <a:xfrm>
-            <a:off x="457200" y="384048"/>
-            <a:ext cx="11247120" cy="475488"/>
-          </a:xfrm>
-          <a:prstGeom prst="rect">
-            <a:avLst/>
-          </a:prstGeom>
-          <a:noFill/>
-        </p:spPr>
-        <p:txBody>
-          <a:bodyPr wrap="square" anchor="t">
-            <a:spAutoFit/>
-          </a:bodyPr>
-          <a:lstStyle/>
-          <a:p>
-            <a:pPr algn="l">
-              <a:spcAft>
-                <a:spcPts val="0"/>
-              </a:spcAft>
-            </a:pPr>
-            <a:r>
-              <a:rPr sz="2200" b="1" i="0">
-                <a:solidFill>
-                  <a:srgbClr val="0A1F2E"/>
-                </a:solidFill>
-                <a:latin typeface="Calibri"/>
-              </a:rPr>
-              <a:t>Mutual value for FairBanks and the programme</a:t>
-            </a:r>
-          </a:p>
-        </p:txBody>
-      </p:sp>
-      <p:sp>
-        <p:nvSpPr>
-          <p:cNvPr id="6" name="TextBox 5"/>
-          <p:cNvSpPr txBox="1"/>
-          <p:nvPr/>
-        </p:nvSpPr>
-        <p:spPr>
-          <a:xfrm>
-            <a:off x="457200" y="1143000"/>
-            <a:ext cx="5486400" cy="320040"/>
-          </a:xfrm>
-          <a:prstGeom prst="rect">
-            <a:avLst/>
-          </a:prstGeom>
-          <a:noFill/>
-        </p:spPr>
-        <p:txBody>
-          <a:bodyPr wrap="square" anchor="t">
-            <a:spAutoFit/>
-          </a:bodyPr>
-          <a:lstStyle/>
-          <a:p>
-            <a:pPr algn="l">
-              <a:spcAft>
-                <a:spcPts val="0"/>
-              </a:spcAft>
-            </a:pPr>
-            <a:r>
-              <a:rPr sz="1600" b="1" i="0">
-                <a:solidFill>
-                  <a:srgbClr val="0D6E6E"/>
-                </a:solidFill>
-                <a:latin typeface="Calibri"/>
-              </a:rPr>
-              <a:t>What we gain</a:t>
-            </a:r>
-          </a:p>
-        </p:txBody>
-      </p:sp>
-      <p:sp>
-        <p:nvSpPr>
-          <p:cNvPr id="7" name="TextBox 6"/>
-          <p:cNvSpPr txBox="1"/>
-          <p:nvPr/>
-        </p:nvSpPr>
-        <p:spPr>
-          <a:xfrm>
-            <a:off x="457200" y="1508760"/>
-            <a:ext cx="5486400" cy="4800600"/>
+            <a:off x="685800" y="201168"/>
+            <a:ext cx="10972800" cy="594360"/>
           </a:xfrm>
           <a:prstGeom prst="rect">
             <a:avLst/>
@@ -3849,120 +3429,53 @@
           </a:bodyPr>
           <a:lstStyle/>
           <a:p>
-            <a:pPr>
-              <a:spcAft>
-                <a:spcPts val="800"/>
-              </a:spcAft>
-            </a:pPr>
-            <a:r>
-              <a:rPr sz="1300">
-                <a:solidFill>
-                  <a:srgbClr val="1E2F38"/>
+            <a:pPr algn="l"/>
+            <a:r>
+              <a:rPr sz="2600" b="1" i="0">
+                <a:solidFill>
+                  <a:srgbClr val="0A1F2E"/>
                 </a:solidFill>
                 <a:latin typeface="Calibri"/>
               </a:rPr>
-              <a:t>•  Fully funded summit access for a young AI-for-health leader</a:t>
-            </a:r>
-          </a:p>
-          <a:p>
-            <a:pPr>
-              <a:spcAft>
-                <a:spcPts val="800"/>
-              </a:spcAft>
-            </a:pPr>
-            <a:r>
-              <a:rPr sz="1300">
-                <a:solidFill>
-                  <a:srgbClr val="1E2F38"/>
-                </a:solidFill>
-                <a:latin typeface="Calibri"/>
-              </a:rPr>
-              <a:t>•  Global network across One Young World delegates</a:t>
-            </a:r>
-          </a:p>
-          <a:p>
-            <a:pPr>
-              <a:spcAft>
-                <a:spcPts val="800"/>
-              </a:spcAft>
-            </a:pPr>
-            <a:r>
-              <a:rPr sz="1300">
-                <a:solidFill>
-                  <a:srgbClr val="1E2F38"/>
-                </a:solidFill>
-                <a:latin typeface="Calibri"/>
-              </a:rPr>
-              <a:t>•  Platform to share FCHIP's responsible AI story</a:t>
-            </a:r>
-          </a:p>
-          <a:p>
-            <a:pPr>
-              <a:spcAft>
-                <a:spcPts val="800"/>
-              </a:spcAft>
-            </a:pPr>
-            <a:r>
-              <a:rPr sz="1300">
-                <a:solidFill>
-                  <a:srgbClr val="1E2F38"/>
-                </a:solidFill>
-                <a:latin typeface="Calibri"/>
-              </a:rPr>
-              <a:t>•  Inspiration and partnerships for product and policy pathways</a:t>
-            </a:r>
-          </a:p>
-        </p:txBody>
-      </p:sp>
-      <p:sp>
-        <p:nvSpPr>
-          <p:cNvPr id="8" name="TextBox 7"/>
+              <a:t>The journey</a:t>
+            </a:r>
+          </a:p>
+        </p:txBody>
+      </p:sp>
+      <p:pic>
+        <p:nvPicPr>
+          <p:cNvPr id="5" name="Picture 4" descr="outreach_facilitator_canopy_01_opt.jpg"/>
+          <p:cNvPicPr>
+            <a:picLocks noChangeAspect="1"/>
+          </p:cNvPicPr>
+          <p:nvPr/>
+        </p:nvPicPr>
+        <p:blipFill>
+          <a:blip r:embed="rId2"/>
+          <a:stretch>
+            <a:fillRect/>
+          </a:stretch>
+        </p:blipFill>
+        <p:spPr>
+          <a:xfrm>
+            <a:off x="365760" y="1958971"/>
+            <a:ext cx="5303520" cy="3534417"/>
+          </a:xfrm>
+          <a:prstGeom prst="rect">
+            <a:avLst/>
+          </a:prstGeom>
+        </p:spPr>
+      </p:pic>
+      <p:sp>
+        <p:nvSpPr>
+          <p:cNvPr id="6" name="TextBox 5"/>
           <p:cNvSpPr txBox="1"/>
           <p:nvPr/>
         </p:nvSpPr>
         <p:spPr>
           <a:xfrm>
-            <a:off x="6309360" y="1143000"/>
-            <a:ext cx="5486400" cy="320040"/>
-          </a:xfrm>
-          <a:prstGeom prst="rect">
-            <a:avLst/>
-          </a:prstGeom>
-          <a:noFill/>
-        </p:spPr>
-        <p:txBody>
-          <a:bodyPr wrap="square" anchor="t">
-            <a:spAutoFit/>
-          </a:bodyPr>
-          <a:lstStyle/>
-          <a:p>
-            <a:pPr algn="l">
-              <a:spcAft>
-                <a:spcPts val="0"/>
-              </a:spcAft>
-            </a:pPr>
-            <a:r>
-              <a:rPr sz="1600" b="1" i="0">
-                <a:solidFill>
-                  <a:srgbClr val="0D6E6E"/>
-                </a:solidFill>
-                <a:latin typeface="Calibri"/>
-              </a:rPr>
-              <a:t>What they gain</a:t>
-            </a:r>
-          </a:p>
-        </p:txBody>
-      </p:sp>
-      <p:sp>
-        <p:nvSpPr>
-          <p:cNvPr id="9" name="TextBox 8"/>
-          <p:cNvSpPr txBox="1"/>
-          <p:nvPr/>
-        </p:nvSpPr>
-        <p:spPr>
-          <a:xfrm>
-            <a:off x="6309360" y="1508760"/>
-            <a:ext cx="5394960" cy="4800600"/>
+            <a:off x="5852160" y="1097280"/>
+            <a:ext cx="6035040" cy="5212080"/>
           </a:xfrm>
           <a:prstGeom prst="rect">
             <a:avLst/>
@@ -3975,81 +3488,29 @@
           </a:bodyPr>
           <a:lstStyle/>
           <a:p>
-            <a:pPr>
-              <a:spcAft>
-                <a:spcPts val="800"/>
-              </a:spcAft>
-            </a:pPr>
-            <a:r>
-              <a:rPr sz="1300">
+            <a:pPr algn="l"/>
+            <a:r>
+              <a:rPr sz="1500" b="0" i="0">
                 <a:solidFill>
                   <a:srgbClr val="1E2F38"/>
                 </a:solidFill>
                 <a:latin typeface="Calibri"/>
               </a:rPr>
-              <a:t>•  A scholar with proven community health AI intent, not abstract interest</a:t>
-            </a:r>
-          </a:p>
-          <a:p>
-            <a:pPr>
-              <a:spcAft>
-                <a:spcPts val="800"/>
-              </a:spcAft>
-            </a:pPr>
-            <a:r>
-              <a:rPr sz="1300">
-                <a:solidFill>
-                  <a:srgbClr val="1E2F38"/>
-                </a:solidFill>
-                <a:latin typeface="Calibri"/>
-              </a:rPr>
-              <a:t>•  Healthcare priority area represented with African field credibility</a:t>
-            </a:r>
-          </a:p>
-          <a:p>
-            <a:pPr>
-              <a:spcAft>
-                <a:spcPts val="800"/>
-              </a:spcAft>
-            </a:pPr>
-            <a:r>
-              <a:rPr sz="1300">
-                <a:solidFill>
-                  <a:srgbClr val="1E2F38"/>
-                </a:solidFill>
-                <a:latin typeface="Calibri"/>
-              </a:rPr>
-              <a:t>•  Nationality and residency eligibility met (Uganda)</a:t>
-            </a:r>
-          </a:p>
-          <a:p>
-            <a:pPr>
-              <a:spcAft>
-                <a:spcPts val="800"/>
-              </a:spcAft>
-            </a:pPr>
-            <a:r>
-              <a:rPr sz="1300">
-                <a:solidFill>
-                  <a:srgbClr val="1E2F38"/>
-                </a:solidFill>
-                <a:latin typeface="Calibri"/>
-              </a:rPr>
-              <a:t>•  Alumni who will keep building after the summit lights fade</a:t>
-            </a:r>
-          </a:p>
-        </p:txBody>
-      </p:sp>
-      <p:sp>
-        <p:nvSpPr>
-          <p:cNvPr id="10" name="Rectangle 9"/>
+              <a:t>I grew up seeing neighbours wait until illness became an emergency. At FairBanks Community Reach I work where care actually starts — in streets, schools, and home visits with Community Health Workers — not only inside a clinic building. That experience shaped why I build: technol…</a:t>
+            </a:r>
+          </a:p>
+        </p:txBody>
+      </p:sp>
+      <p:sp>
+        <p:nvSpPr>
+          <p:cNvPr id="7" name="Rectangle 6"/>
           <p:cNvSpPr/>
           <p:nvPr/>
         </p:nvSpPr>
         <p:spPr>
           <a:xfrm>
-            <a:off x="0" y="6565392"/>
-            <a:ext cx="12191695" cy="292608"/>
+            <a:off x="0" y="6583680"/>
+            <a:ext cx="12191695" cy="274320"/>
           </a:xfrm>
           <a:prstGeom prst="rect">
             <a:avLst/>
@@ -4060,7 +3521,6 @@
           <a:ln>
             <a:noFill/>
           </a:ln>
-          <a:effectLst/>
         </p:spPr>
         <p:style>
           <a:lnRef idx="1">
@@ -4086,14 +3546,14 @@
       </p:sp>
       <p:sp>
         <p:nvSpPr>
-          <p:cNvPr id="11" name="TextBox 10"/>
+          <p:cNvPr id="8" name="TextBox 7"/>
           <p:cNvSpPr txBox="1"/>
           <p:nvPr/>
         </p:nvSpPr>
         <p:spPr>
           <a:xfrm>
-            <a:off x="365760" y="6574536"/>
-            <a:ext cx="9144000" cy="274320"/>
+            <a:off x="365760" y="6601968"/>
+            <a:ext cx="10058400" cy="228600"/>
           </a:xfrm>
           <a:prstGeom prst="rect">
             <a:avLst/>
@@ -4101,16 +3561,12 @@
           <a:noFill/>
         </p:spPr>
         <p:txBody>
-          <a:bodyPr wrap="square" anchor="ctr">
+          <a:bodyPr wrap="square">
             <a:spAutoFit/>
           </a:bodyPr>
           <a:lstStyle/>
           <a:p>
-            <a:pPr algn="l">
-              <a:spcAft>
-                <a:spcPts val="0"/>
-              </a:spcAft>
-            </a:pPr>
+            <a:pPr algn="l"/>
             <a:r>
               <a:rPr sz="900" b="0" i="0">
                 <a:solidFill>
@@ -4118,21 +3574,21 @@
                 </a:solidFill>
                 <a:latin typeface="Calibri"/>
               </a:rPr>
-              <a:t>FairBanks FCHIP  |  Brandtech Group AI for Good Scholarship   |  Your health, our mission.</a:t>
-            </a:r>
-          </a:p>
-        </p:txBody>
-      </p:sp>
-      <p:sp>
-        <p:nvSpPr>
-          <p:cNvPr id="12" name="TextBox 11"/>
+              <a:t>FairBanks FCHIP  |  OYW Cape Town 2026  |  Your health, our mission.</a:t>
+            </a:r>
+          </a:p>
+        </p:txBody>
+      </p:sp>
+      <p:sp>
+        <p:nvSpPr>
+          <p:cNvPr id="9" name="TextBox 8"/>
           <p:cNvSpPr txBox="1"/>
           <p:nvPr/>
         </p:nvSpPr>
         <p:spPr>
           <a:xfrm>
-            <a:off x="11094415" y="6574536"/>
-            <a:ext cx="731520" cy="274320"/>
+            <a:off x="11368735" y="6601968"/>
+            <a:ext cx="548640" cy="228600"/>
           </a:xfrm>
           <a:prstGeom prst="rect">
             <a:avLst/>
@@ -4140,16 +3596,12 @@
           <a:noFill/>
         </p:spPr>
         <p:txBody>
-          <a:bodyPr wrap="square" anchor="ctr">
+          <a:bodyPr wrap="square">
             <a:spAutoFit/>
           </a:bodyPr>
           <a:lstStyle/>
           <a:p>
-            <a:pPr algn="r">
-              <a:spcAft>
-                <a:spcPts val="0"/>
-              </a:spcAft>
-            </a:pPr>
+            <a:pPr algn="r"/>
             <a:r>
               <a:rPr sz="900" b="0" i="0">
                 <a:solidFill>
@@ -4200,7 +3652,6 @@
           <a:ln>
             <a:noFill/>
           </a:ln>
-          <a:effectLst/>
         </p:spPr>
         <p:style>
           <a:lnRef idx="1">
@@ -4232,19 +3683,18 @@
         </p:nvSpPr>
         <p:spPr>
           <a:xfrm>
-            <a:off x="0" y="0"/>
-            <a:ext cx="164592" cy="960120"/>
+            <a:off x="457200" y="164592"/>
+            <a:ext cx="73152" cy="640080"/>
           </a:xfrm>
           <a:prstGeom prst="rect">
             <a:avLst/>
           </a:prstGeom>
           <a:solidFill>
-            <a:srgbClr val="0D6E6E"/>
+            <a:srgbClr val="C45C26"/>
           </a:solidFill>
           <a:ln>
             <a:noFill/>
           </a:ln>
-          <a:effectLst/>
         </p:spPr>
         <p:style>
           <a:lnRef idx="1">
@@ -4276,8 +3726,8 @@
         </p:nvSpPr>
         <p:spPr>
           <a:xfrm>
-            <a:off x="457200" y="109728"/>
-            <a:ext cx="10972800" cy="256032"/>
+            <a:off x="685800" y="201168"/>
+            <a:ext cx="10972800" cy="594360"/>
           </a:xfrm>
           <a:prstGeom prst="rect">
             <a:avLst/>
@@ -4285,70 +3735,27 @@
           <a:noFill/>
         </p:spPr>
         <p:txBody>
-          <a:bodyPr wrap="square" anchor="t">
+          <a:bodyPr wrap="square">
             <a:spAutoFit/>
           </a:bodyPr>
           <a:lstStyle/>
           <a:p>
-            <a:pPr algn="l">
-              <a:spcAft>
-                <a:spcPts val="0"/>
-              </a:spcAft>
-            </a:pPr>
-            <a:r>
-              <a:rPr sz="1100" b="1" i="0">
-                <a:solidFill>
-                  <a:srgbClr val="C45C26"/>
+            <a:pPr algn="l"/>
+            <a:r>
+              <a:rPr sz="2600" b="1" i="0">
+                <a:solidFill>
+                  <a:srgbClr val="0A1F2E"/>
                 </a:solidFill>
                 <a:latin typeface="Calibri"/>
               </a:rPr>
-              <a:t>THE PROBLEM</a:t>
-            </a:r>
-          </a:p>
-        </p:txBody>
-      </p:sp>
-      <p:sp>
-        <p:nvSpPr>
-          <p:cNvPr id="5" name="TextBox 4"/>
-          <p:cNvSpPr txBox="1"/>
-          <p:nvPr/>
-        </p:nvSpPr>
-        <p:spPr>
-          <a:xfrm>
-            <a:off x="457200" y="384048"/>
-            <a:ext cx="11247120" cy="475488"/>
-          </a:xfrm>
-          <a:prstGeom prst="rect">
-            <a:avLst/>
-          </a:prstGeom>
-          <a:noFill/>
-        </p:spPr>
-        <p:txBody>
-          <a:bodyPr wrap="square" anchor="t">
-            <a:spAutoFit/>
-          </a:bodyPr>
-          <a:lstStyle/>
-          <a:p>
-            <a:pPr algn="l">
-              <a:spcAft>
-                <a:spcPts val="0"/>
-              </a:spcAft>
-            </a:pPr>
-            <a:r>
-              <a:rPr sz="2200" b="1" i="0">
-                <a:solidFill>
-                  <a:srgbClr val="0A1F2E"/>
-                </a:solidFill>
-                <a:latin typeface="Calibri"/>
-              </a:rPr>
-              <a:t>Health systems react too late</a:t>
+              <a:t>Problem on the ground</a:t>
             </a:r>
           </a:p>
         </p:txBody>
       </p:sp>
       <p:pic>
         <p:nvPicPr>
-          <p:cNvPr id="6" name="Picture 5" descr="reactive_clinic_opt.jpg"/>
+          <p:cNvPr id="5" name="Picture 4" descr="bloom_maternal_health_participant_01_opt.jpg"/>
           <p:cNvPicPr>
             <a:picLocks noChangeAspect="1"/>
           </p:cNvPicPr>
@@ -4362,8 +3769,8 @@
         </p:blipFill>
         <p:spPr>
           <a:xfrm>
-            <a:off x="411480" y="2004691"/>
-            <a:ext cx="5303520" cy="3534417"/>
+            <a:off x="365760" y="1958340"/>
+            <a:ext cx="5303520" cy="3535680"/>
           </a:xfrm>
           <a:prstGeom prst="rect">
             <a:avLst/>
@@ -4372,14 +3779,14 @@
       </p:pic>
       <p:sp>
         <p:nvSpPr>
-          <p:cNvPr id="7" name="TextBox 6"/>
+          <p:cNvPr id="6" name="TextBox 5"/>
           <p:cNvSpPr txBox="1"/>
           <p:nvPr/>
         </p:nvSpPr>
         <p:spPr>
           <a:xfrm>
-            <a:off x="6035040" y="1234440"/>
-            <a:ext cx="5669280" cy="5074920"/>
+            <a:off x="5852160" y="1097280"/>
+            <a:ext cx="6035040" cy="5212080"/>
           </a:xfrm>
           <a:prstGeom prst="rect">
             <a:avLst/>
@@ -4392,97 +3799,29 @@
           </a:bodyPr>
           <a:lstStyle/>
           <a:p>
-            <a:pPr>
-              <a:spcAft>
-                <a:spcPts val="800"/>
-              </a:spcAft>
-            </a:pPr>
-            <a:r>
-              <a:rPr sz="1400">
+            <a:pPr algn="l"/>
+            <a:r>
+              <a:rPr sz="1500" b="0" i="0">
                 <a:solidFill>
                   <a:srgbClr val="1E2F38"/>
                 </a:solidFill>
                 <a:latin typeface="Calibri"/>
               </a:rPr>
-              <a:t>•  Care often starts only after people fall sick</a:t>
-            </a:r>
-          </a:p>
-          <a:p>
-            <a:pPr>
-              <a:spcAft>
-                <a:spcPts val="800"/>
-              </a:spcAft>
-            </a:pPr>
-            <a:r>
-              <a:rPr sz="1400">
-                <a:solidFill>
-                  <a:srgbClr val="1E2F38"/>
-                </a:solidFill>
-                <a:latin typeface="Calibri"/>
-              </a:rPr>
-              <a:t>•  Community health data sits in paper registers and silos</a:t>
-            </a:r>
-          </a:p>
-          <a:p>
-            <a:pPr>
-              <a:spcAft>
-                <a:spcPts val="800"/>
-              </a:spcAft>
-            </a:pPr>
-            <a:r>
-              <a:rPr sz="1400">
-                <a:solidFill>
-                  <a:srgbClr val="1E2F38"/>
-                </a:solidFill>
-                <a:latin typeface="Calibri"/>
-              </a:rPr>
-              <a:t>•  High-risk pregnancies and NCDs are found too late</a:t>
-            </a:r>
-          </a:p>
-          <a:p>
-            <a:pPr>
-              <a:spcAft>
-                <a:spcPts val="800"/>
-              </a:spcAft>
-            </a:pPr>
-            <a:r>
-              <a:rPr sz="1400">
-                <a:solidFill>
-                  <a:srgbClr val="1E2F38"/>
-                </a:solidFill>
-                <a:latin typeface="Calibri"/>
-              </a:rPr>
-              <a:t>•  Medicine stock-outs hit hard during disease surges</a:t>
-            </a:r>
-          </a:p>
-          <a:p>
-            <a:pPr>
-              <a:spcAft>
-                <a:spcPts val="800"/>
-              </a:spcAft>
-            </a:pPr>
-            <a:r>
-              <a:rPr sz="1400">
-                <a:solidFill>
-                  <a:srgbClr val="1E2F38"/>
-                </a:solidFill>
-                <a:latin typeface="Calibri"/>
-              </a:rPr>
-              <a:t>•  Health shocks push poor families deeper into hardship</a:t>
-            </a:r>
-          </a:p>
-        </p:txBody>
-      </p:sp>
-      <p:sp>
-        <p:nvSpPr>
-          <p:cNvPr id="8" name="Rectangle 7"/>
+              <a:t>CHWs see warning signs weeks before emergencies. FCHIP closes that gap.</a:t>
+            </a:r>
+          </a:p>
+        </p:txBody>
+      </p:sp>
+      <p:sp>
+        <p:nvSpPr>
+          <p:cNvPr id="7" name="Rectangle 6"/>
           <p:cNvSpPr/>
           <p:nvPr/>
         </p:nvSpPr>
         <p:spPr>
           <a:xfrm>
-            <a:off x="0" y="6565392"/>
-            <a:ext cx="12191695" cy="292608"/>
+            <a:off x="0" y="6583680"/>
+            <a:ext cx="12191695" cy="274320"/>
           </a:xfrm>
           <a:prstGeom prst="rect">
             <a:avLst/>
@@ -4493,7 +3832,6 @@
           <a:ln>
             <a:noFill/>
           </a:ln>
-          <a:effectLst/>
         </p:spPr>
         <p:style>
           <a:lnRef idx="1">
@@ -4519,14 +3857,49 @@
       </p:sp>
       <p:sp>
         <p:nvSpPr>
+          <p:cNvPr id="8" name="TextBox 7"/>
+          <p:cNvSpPr txBox="1"/>
+          <p:nvPr/>
+        </p:nvSpPr>
+        <p:spPr>
+          <a:xfrm>
+            <a:off x="365760" y="6601968"/>
+            <a:ext cx="10058400" cy="228600"/>
+          </a:xfrm>
+          <a:prstGeom prst="rect">
+            <a:avLst/>
+          </a:prstGeom>
+          <a:noFill/>
+        </p:spPr>
+        <p:txBody>
+          <a:bodyPr wrap="square">
+            <a:spAutoFit/>
+          </a:bodyPr>
+          <a:lstStyle/>
+          <a:p>
+            <a:pPr algn="l"/>
+            <a:r>
+              <a:rPr sz="900" b="0" i="0">
+                <a:solidFill>
+                  <a:srgbClr val="FFFFFF"/>
+                </a:solidFill>
+                <a:latin typeface="Calibri"/>
+              </a:rPr>
+              <a:t>FairBanks FCHIP  |  OYW Cape Town 2026  |  Your health, our mission.</a:t>
+            </a:r>
+          </a:p>
+        </p:txBody>
+      </p:sp>
+      <p:sp>
+        <p:nvSpPr>
           <p:cNvPr id="9" name="TextBox 8"/>
           <p:cNvSpPr txBox="1"/>
           <p:nvPr/>
         </p:nvSpPr>
         <p:spPr>
           <a:xfrm>
-            <a:off x="365760" y="6574536"/>
-            <a:ext cx="9144000" cy="274320"/>
+            <a:off x="11368735" y="6601968"/>
+            <a:ext cx="548640" cy="228600"/>
           </a:xfrm>
           <a:prstGeom prst="rect">
             <a:avLst/>
@@ -4534,55 +3907,12 @@
           <a:noFill/>
         </p:spPr>
         <p:txBody>
-          <a:bodyPr wrap="square" anchor="ctr">
+          <a:bodyPr wrap="square">
             <a:spAutoFit/>
           </a:bodyPr>
           <a:lstStyle/>
           <a:p>
-            <a:pPr algn="l">
-              <a:spcAft>
-                <a:spcPts val="0"/>
-              </a:spcAft>
-            </a:pPr>
-            <a:r>
-              <a:rPr sz="900" b="0" i="0">
-                <a:solidFill>
-                  <a:srgbClr val="FFFFFF"/>
-                </a:solidFill>
-                <a:latin typeface="Calibri"/>
-              </a:rPr>
-              <a:t>FairBanks FCHIP  |  Brandtech Group AI for Good Scholarship   |  Your health, our mission.</a:t>
-            </a:r>
-          </a:p>
-        </p:txBody>
-      </p:sp>
-      <p:sp>
-        <p:nvSpPr>
-          <p:cNvPr id="10" name="TextBox 9"/>
-          <p:cNvSpPr txBox="1"/>
-          <p:nvPr/>
-        </p:nvSpPr>
-        <p:spPr>
-          <a:xfrm>
-            <a:off x="11094415" y="6574536"/>
-            <a:ext cx="731520" cy="274320"/>
-          </a:xfrm>
-          <a:prstGeom prst="rect">
-            <a:avLst/>
-          </a:prstGeom>
-          <a:noFill/>
-        </p:spPr>
-        <p:txBody>
-          <a:bodyPr wrap="square" anchor="ctr">
-            <a:spAutoFit/>
-          </a:bodyPr>
-          <a:lstStyle/>
-          <a:p>
-            <a:pPr algn="r">
-              <a:spcAft>
-                <a:spcPts val="0"/>
-              </a:spcAft>
-            </a:pPr>
+            <a:pPr algn="r"/>
             <a:r>
               <a:rPr sz="900" b="0" i="0">
                 <a:solidFill>
@@ -4633,7 +3963,6 @@
           <a:ln>
             <a:noFill/>
           </a:ln>
-          <a:effectLst/>
         </p:spPr>
         <p:style>
           <a:lnRef idx="1">
@@ -4665,19 +3994,18 @@
         </p:nvSpPr>
         <p:spPr>
           <a:xfrm>
-            <a:off x="0" y="0"/>
-            <a:ext cx="164592" cy="960120"/>
+            <a:off x="457200" y="164592"/>
+            <a:ext cx="73152" cy="640080"/>
           </a:xfrm>
           <a:prstGeom prst="rect">
             <a:avLst/>
           </a:prstGeom>
           <a:solidFill>
-            <a:srgbClr val="0D6E6E"/>
+            <a:srgbClr val="C45C26"/>
           </a:solidFill>
           <a:ln>
             <a:noFill/>
           </a:ln>
-          <a:effectLst/>
         </p:spPr>
         <p:style>
           <a:lnRef idx="1">
@@ -4709,8 +4037,8 @@
         </p:nvSpPr>
         <p:spPr>
           <a:xfrm>
-            <a:off x="457200" y="109728"/>
-            <a:ext cx="10972800" cy="256032"/>
+            <a:off x="685800" y="201168"/>
+            <a:ext cx="10972800" cy="594360"/>
           </a:xfrm>
           <a:prstGeom prst="rect">
             <a:avLst/>
@@ -4718,70 +4046,27 @@
           <a:noFill/>
         </p:spPr>
         <p:txBody>
-          <a:bodyPr wrap="square" anchor="t">
+          <a:bodyPr wrap="square">
             <a:spAutoFit/>
           </a:bodyPr>
           <a:lstStyle/>
           <a:p>
-            <a:pPr algn="l">
-              <a:spcAft>
-                <a:spcPts val="0"/>
-              </a:spcAft>
-            </a:pPr>
-            <a:r>
-              <a:rPr sz="1100" b="1" i="0">
-                <a:solidFill>
-                  <a:srgbClr val="C45C26"/>
+            <a:pPr algn="l"/>
+            <a:r>
+              <a:rPr sz="2600" b="1" i="0">
+                <a:solidFill>
+                  <a:srgbClr val="0A1F2E"/>
                 </a:solidFill>
                 <a:latin typeface="Calibri"/>
               </a:rPr>
-              <a:t>THE SOLUTION</a:t>
-            </a:r>
-          </a:p>
-        </p:txBody>
-      </p:sp>
-      <p:sp>
-        <p:nvSpPr>
-          <p:cNvPr id="5" name="TextBox 4"/>
-          <p:cNvSpPr txBox="1"/>
-          <p:nvPr/>
-        </p:nvSpPr>
-        <p:spPr>
-          <a:xfrm>
-            <a:off x="457200" y="384048"/>
-            <a:ext cx="11247120" cy="475488"/>
-          </a:xfrm>
-          <a:prstGeom prst="rect">
-            <a:avLst/>
-          </a:prstGeom>
-          <a:noFill/>
-        </p:spPr>
-        <p:txBody>
-          <a:bodyPr wrap="square" anchor="t">
-            <a:spAutoFit/>
-          </a:bodyPr>
-          <a:lstStyle/>
-          <a:p>
-            <a:pPr algn="l">
-              <a:spcAft>
-                <a:spcPts val="0"/>
-              </a:spcAft>
-            </a:pPr>
-            <a:r>
-              <a:rPr sz="2200" b="1" i="0">
-                <a:solidFill>
-                  <a:srgbClr val="0A1F2E"/>
-                </a:solidFill>
-                <a:latin typeface="Calibri"/>
-              </a:rPr>
-              <a:t>FCHIP — community health intelligence</a:t>
+              <a:t>Responsible AI</a:t>
             </a:r>
           </a:p>
         </p:txBody>
       </p:sp>
       <p:pic>
         <p:nvPicPr>
-          <p:cNvPr id="6" name="Picture 5" descr="data_flow_iso_labeled_opt.jpg"/>
+          <p:cNvPr id="5" name="Picture 4" descr="deep_tech_collage_opt.jpg"/>
           <p:cNvPicPr>
             <a:picLocks noChangeAspect="1"/>
           </p:cNvPicPr>
@@ -4795,8 +4080,8 @@
         </p:blipFill>
         <p:spPr>
           <a:xfrm>
-            <a:off x="365760" y="1639062"/>
-            <a:ext cx="6400800" cy="4265676"/>
+            <a:off x="365760" y="1958971"/>
+            <a:ext cx="5303520" cy="3534417"/>
           </a:xfrm>
           <a:prstGeom prst="rect">
             <a:avLst/>
@@ -4805,14 +4090,14 @@
       </p:pic>
       <p:sp>
         <p:nvSpPr>
-          <p:cNvPr id="7" name="TextBox 6"/>
+          <p:cNvPr id="6" name="TextBox 5"/>
           <p:cNvSpPr txBox="1"/>
           <p:nvPr/>
         </p:nvSpPr>
         <p:spPr>
           <a:xfrm>
-            <a:off x="7040880" y="1234440"/>
-            <a:ext cx="4754880" cy="5074920"/>
+            <a:off x="5852160" y="1097280"/>
+            <a:ext cx="6035040" cy="5212080"/>
           </a:xfrm>
           <a:prstGeom prst="rect">
             <a:avLst/>
@@ -4825,81 +4110,65 @@
           </a:bodyPr>
           <a:lstStyle/>
           <a:p>
-            <a:pPr>
-              <a:spcAft>
-                <a:spcPts val="800"/>
-              </a:spcAft>
-            </a:pPr>
-            <a:r>
-              <a:rPr sz="1400">
+            <a:pPr algn="l"/>
+            <a:r>
+              <a:rPr sz="1500" b="0" i="0">
                 <a:solidFill>
                   <a:srgbClr val="1E2F38"/>
                 </a:solidFill>
                 <a:latin typeface="Calibri"/>
               </a:rPr>
-              <a:t>•  CHWs and VHTs capture structured data at household level</a:t>
-            </a:r>
-          </a:p>
-          <a:p>
-            <a:pPr>
-              <a:spcAft>
-                <a:spcPts val="800"/>
-              </a:spcAft>
-            </a:pPr>
-            <a:r>
-              <a:rPr sz="1400">
+              <a:t>• Human-in-the-loop: CHWs and nurses validate alerts — AI supports, neve…</a:t>
+            </a:r>
+          </a:p>
+          <a:p>
+            <a:pPr algn="l"/>
+            <a:r>
+              <a:rPr sz="1500" b="0" i="0">
                 <a:solidFill>
                   <a:srgbClr val="1E2F38"/>
                 </a:solidFill>
                 <a:latin typeface="Calibri"/>
               </a:rPr>
-              <a:t>•  FCHIP applies AI, ML, and GIS to predict risk early</a:t>
-            </a:r>
-          </a:p>
-          <a:p>
-            <a:pPr>
-              <a:spcAft>
-                <a:spcPts val="800"/>
-              </a:spcAft>
-            </a:pPr>
-            <a:r>
-              <a:rPr sz="1400">
+              <a:t>• Offline-first design for low-bandwidth communities; no dependency on c…</a:t>
+            </a:r>
+          </a:p>
+          <a:p>
+            <a:pPr algn="l"/>
+            <a:r>
+              <a:rPr sz="1500" b="0" i="0">
                 <a:solidFill>
                   <a:srgbClr val="1E2F38"/>
                 </a:solidFill>
                 <a:latin typeface="Calibri"/>
               </a:rPr>
-              <a:t>•  Alerts reach clinics, districts, and partners in time to act</a:t>
-            </a:r>
-          </a:p>
-          <a:p>
-            <a:pPr>
-              <a:spcAft>
-                <a:spcPts val="800"/>
-              </a:spcAft>
-            </a:pPr>
-            <a:r>
-              <a:rPr sz="1400">
+              <a:t>• Consent and anonymisation aligned with Uganda Data Protection principl…</a:t>
+            </a:r>
+          </a:p>
+          <a:p>
+            <a:pPr algn="l"/>
+            <a:r>
+              <a:rPr sz="1500" b="0" i="0">
                 <a:solidFill>
                   <a:srgbClr val="1E2F38"/>
                 </a:solidFill>
                 <a:latin typeface="Calibri"/>
               </a:rPr>
-              <a:t>•  Built on a live medical centre and community programmes</a:t>
-            </a:r>
-          </a:p>
-        </p:txBody>
-      </p:sp>
-      <p:sp>
-        <p:nvSpPr>
-          <p:cNvPr id="8" name="Rectangle 7"/>
+              <a:t>• Local-language symptom capture where it improves trust and accuracy</a:t>
+            </a:r>
+          </a:p>
+        </p:txBody>
+      </p:sp>
+      <p:sp>
+        <p:nvSpPr>
+          <p:cNvPr id="7" name="Rectangle 6"/>
           <p:cNvSpPr/>
           <p:nvPr/>
         </p:nvSpPr>
         <p:spPr>
           <a:xfrm>
-            <a:off x="0" y="6565392"/>
-            <a:ext cx="12191695" cy="292608"/>
+            <a:off x="0" y="6583680"/>
+            <a:ext cx="12191695" cy="274320"/>
           </a:xfrm>
           <a:prstGeom prst="rect">
             <a:avLst/>
@@ -4910,7 +4179,6 @@
           <a:ln>
             <a:noFill/>
           </a:ln>
-          <a:effectLst/>
         </p:spPr>
         <p:style>
           <a:lnRef idx="1">
@@ -4936,14 +4204,49 @@
       </p:sp>
       <p:sp>
         <p:nvSpPr>
+          <p:cNvPr id="8" name="TextBox 7"/>
+          <p:cNvSpPr txBox="1"/>
+          <p:nvPr/>
+        </p:nvSpPr>
+        <p:spPr>
+          <a:xfrm>
+            <a:off x="365760" y="6601968"/>
+            <a:ext cx="10058400" cy="228600"/>
+          </a:xfrm>
+          <a:prstGeom prst="rect">
+            <a:avLst/>
+          </a:prstGeom>
+          <a:noFill/>
+        </p:spPr>
+        <p:txBody>
+          <a:bodyPr wrap="square">
+            <a:spAutoFit/>
+          </a:bodyPr>
+          <a:lstStyle/>
+          <a:p>
+            <a:pPr algn="l"/>
+            <a:r>
+              <a:rPr sz="900" b="0" i="0">
+                <a:solidFill>
+                  <a:srgbClr val="FFFFFF"/>
+                </a:solidFill>
+                <a:latin typeface="Calibri"/>
+              </a:rPr>
+              <a:t>FairBanks FCHIP  |  OYW Cape Town 2026  |  Your health, our mission.</a:t>
+            </a:r>
+          </a:p>
+        </p:txBody>
+      </p:sp>
+      <p:sp>
+        <p:nvSpPr>
           <p:cNvPr id="9" name="TextBox 8"/>
           <p:cNvSpPr txBox="1"/>
           <p:nvPr/>
         </p:nvSpPr>
         <p:spPr>
           <a:xfrm>
-            <a:off x="365760" y="6574536"/>
-            <a:ext cx="9144000" cy="274320"/>
+            <a:off x="11368735" y="6601968"/>
+            <a:ext cx="548640" cy="228600"/>
           </a:xfrm>
           <a:prstGeom prst="rect">
             <a:avLst/>
@@ -4951,55 +4254,12 @@
           <a:noFill/>
         </p:spPr>
         <p:txBody>
-          <a:bodyPr wrap="square" anchor="ctr">
+          <a:bodyPr wrap="square">
             <a:spAutoFit/>
           </a:bodyPr>
           <a:lstStyle/>
           <a:p>
-            <a:pPr algn="l">
-              <a:spcAft>
-                <a:spcPts val="0"/>
-              </a:spcAft>
-            </a:pPr>
-            <a:r>
-              <a:rPr sz="900" b="0" i="0">
-                <a:solidFill>
-                  <a:srgbClr val="FFFFFF"/>
-                </a:solidFill>
-                <a:latin typeface="Calibri"/>
-              </a:rPr>
-              <a:t>FairBanks FCHIP  |  Brandtech Group AI for Good Scholarship   |  Your health, our mission.</a:t>
-            </a:r>
-          </a:p>
-        </p:txBody>
-      </p:sp>
-      <p:sp>
-        <p:nvSpPr>
-          <p:cNvPr id="10" name="TextBox 9"/>
-          <p:cNvSpPr txBox="1"/>
-          <p:nvPr/>
-        </p:nvSpPr>
-        <p:spPr>
-          <a:xfrm>
-            <a:off x="11094415" y="6574536"/>
-            <a:ext cx="731520" cy="274320"/>
-          </a:xfrm>
-          <a:prstGeom prst="rect">
-            <a:avLst/>
-          </a:prstGeom>
-          <a:noFill/>
-        </p:spPr>
-        <p:txBody>
-          <a:bodyPr wrap="square" anchor="ctr">
-            <a:spAutoFit/>
-          </a:bodyPr>
-          <a:lstStyle/>
-          <a:p>
-            <a:pPr algn="r">
-              <a:spcAft>
-                <a:spcPts val="0"/>
-              </a:spcAft>
-            </a:pPr>
+            <a:pPr algn="r"/>
             <a:r>
               <a:rPr sz="900" b="0" i="0">
                 <a:solidFill>
@@ -5050,7 +4310,6 @@
           <a:ln>
             <a:noFill/>
           </a:ln>
-          <a:effectLst/>
         </p:spPr>
         <p:style>
           <a:lnRef idx="1">
@@ -5082,19 +4341,18 @@
         </p:nvSpPr>
         <p:spPr>
           <a:xfrm>
-            <a:off x="0" y="0"/>
-            <a:ext cx="164592" cy="960120"/>
+            <a:off x="457200" y="164592"/>
+            <a:ext cx="73152" cy="640080"/>
           </a:xfrm>
           <a:prstGeom prst="rect">
             <a:avLst/>
           </a:prstGeom>
           <a:solidFill>
-            <a:srgbClr val="0D6E6E"/>
+            <a:srgbClr val="C45C26"/>
           </a:solidFill>
           <a:ln>
             <a:noFill/>
           </a:ln>
-          <a:effectLst/>
         </p:spPr>
         <p:style>
           <a:lnRef idx="1">
@@ -5126,8 +4384,8 @@
         </p:nvSpPr>
         <p:spPr>
           <a:xfrm>
-            <a:off x="457200" y="109728"/>
-            <a:ext cx="10972800" cy="256032"/>
+            <a:off x="685800" y="201168"/>
+            <a:ext cx="10972800" cy="594360"/>
           </a:xfrm>
           <a:prstGeom prst="rect">
             <a:avLst/>
@@ -5135,38 +4393,58 @@
           <a:noFill/>
         </p:spPr>
         <p:txBody>
-          <a:bodyPr wrap="square" anchor="t">
+          <a:bodyPr wrap="square">
             <a:spAutoFit/>
           </a:bodyPr>
           <a:lstStyle/>
           <a:p>
-            <a:pPr algn="l">
-              <a:spcAft>
-                <a:spcPts val="0"/>
-              </a:spcAft>
-            </a:pPr>
-            <a:r>
-              <a:rPr sz="1100" b="1" i="0">
-                <a:solidFill>
-                  <a:srgbClr val="C45C26"/>
+            <a:pPr algn="l"/>
+            <a:r>
+              <a:rPr sz="2600" b="1" i="0">
+                <a:solidFill>
+                  <a:srgbClr val="0A1F2E"/>
                 </a:solidFill>
                 <a:latin typeface="Calibri"/>
               </a:rPr>
-              <a:t>PROGRAMME FIT</a:t>
-            </a:r>
-          </a:p>
-        </p:txBody>
-      </p:sp>
-      <p:sp>
-        <p:nvSpPr>
-          <p:cNvPr id="5" name="TextBox 4"/>
+              <a:t>Community cascade</a:t>
+            </a:r>
+          </a:p>
+        </p:txBody>
+      </p:sp>
+      <p:pic>
+        <p:nvPicPr>
+          <p:cNvPr id="5" name="Picture 4" descr="data_flow_iso_labeled_opt.jpg"/>
+          <p:cNvPicPr>
+            <a:picLocks noChangeAspect="1"/>
+          </p:cNvPicPr>
+          <p:nvPr/>
+        </p:nvPicPr>
+        <p:blipFill>
+          <a:blip r:embed="rId2"/>
+          <a:stretch>
+            <a:fillRect/>
+          </a:stretch>
+        </p:blipFill>
+        <p:spPr>
+          <a:xfrm>
+            <a:off x="365760" y="1958971"/>
+            <a:ext cx="5303520" cy="3534417"/>
+          </a:xfrm>
+          <a:prstGeom prst="rect">
+            <a:avLst/>
+          </a:prstGeom>
+        </p:spPr>
+      </p:pic>
+      <p:sp>
+        <p:nvSpPr>
+          <p:cNvPr id="6" name="TextBox 5"/>
           <p:cNvSpPr txBox="1"/>
           <p:nvPr/>
         </p:nvSpPr>
         <p:spPr>
           <a:xfrm>
-            <a:off x="457200" y="384048"/>
-            <a:ext cx="11247120" cy="475488"/>
+            <a:off x="5852160" y="1097280"/>
+            <a:ext cx="6035040" cy="5212080"/>
           </a:xfrm>
           <a:prstGeom prst="rect">
             <a:avLst/>
@@ -5174,534 +4452,34 @@
           <a:noFill/>
         </p:spPr>
         <p:txBody>
-          <a:bodyPr wrap="square" anchor="t">
+          <a:bodyPr wrap="square">
             <a:spAutoFit/>
           </a:bodyPr>
           <a:lstStyle/>
           <a:p>
-            <a:pPr algn="l">
-              <a:spcAft>
-                <a:spcPts val="0"/>
-              </a:spcAft>
-            </a:pPr>
-            <a:r>
-              <a:rPr sz="2200" b="1" i="0">
-                <a:solidFill>
-                  <a:srgbClr val="0A1F2E"/>
+            <a:pPr algn="l"/>
+            <a:r>
+              <a:rPr sz="1500" b="0" i="0">
+                <a:solidFill>
+                  <a:srgbClr val="1E2F38"/>
                 </a:solidFill>
                 <a:latin typeface="Calibri"/>
               </a:rPr>
-              <a:t>Why this call matches FCHIP</a:t>
-            </a:r>
-          </a:p>
-        </p:txBody>
-      </p:sp>
-      <p:sp>
-        <p:nvSpPr>
-          <p:cNvPr id="6" name="Rectangle 5"/>
+              <a:t>AI sits between CHW capture and clinic action — not above communities.</a:t>
+            </a:r>
+          </a:p>
+        </p:txBody>
+      </p:sp>
+      <p:sp>
+        <p:nvSpPr>
+          <p:cNvPr id="7" name="Rectangle 6"/>
           <p:cNvSpPr/>
           <p:nvPr/>
         </p:nvSpPr>
         <p:spPr>
           <a:xfrm>
-            <a:off x="411480" y="1188720"/>
-            <a:ext cx="11338560" cy="1223010"/>
-          </a:xfrm>
-          <a:prstGeom prst="rect">
-            <a:avLst/>
-          </a:prstGeom>
-          <a:solidFill>
-            <a:srgbClr val="FFFFFF"/>
-          </a:solidFill>
-          <a:ln w="9525">
-            <a:solidFill>
-              <a:srgbClr val="D0DCDC"/>
-            </a:solidFill>
-          </a:ln>
-          <a:effectLst/>
-        </p:spPr>
-        <p:style>
-          <a:lnRef idx="1">
-            <a:schemeClr val="accent1"/>
-          </a:lnRef>
-          <a:fillRef idx="3">
-            <a:schemeClr val="accent1"/>
-          </a:fillRef>
-          <a:effectRef idx="2">
-            <a:schemeClr val="accent1"/>
-          </a:effectRef>
-          <a:fontRef idx="minor">
-            <a:schemeClr val="lt1"/>
-          </a:fontRef>
-        </p:style>
-        <p:txBody>
-          <a:bodyPr rtlCol="0" anchor="ctr"/>
-          <a:lstStyle/>
-          <a:p>
-            <a:pPr algn="ctr"/>
-          </a:p>
-        </p:txBody>
-      </p:sp>
-      <p:sp>
-        <p:nvSpPr>
-          <p:cNvPr id="7" name="TextBox 6"/>
-          <p:cNvSpPr txBox="1"/>
-          <p:nvPr/>
-        </p:nvSpPr>
-        <p:spPr>
-          <a:xfrm>
-            <a:off x="594360" y="1252728"/>
-            <a:ext cx="2926080" cy="1085850"/>
-          </a:xfrm>
-          <a:prstGeom prst="rect">
-            <a:avLst/>
-          </a:prstGeom>
-          <a:noFill/>
-        </p:spPr>
-        <p:txBody>
-          <a:bodyPr wrap="square" anchor="ctr">
-            <a:spAutoFit/>
-          </a:bodyPr>
-          <a:lstStyle/>
-          <a:p>
-            <a:pPr algn="l">
-              <a:spcAft>
-                <a:spcPts val="0"/>
-              </a:spcAft>
-            </a:pPr>
-            <a:r>
-              <a:rPr sz="1300" b="1" i="0">
-                <a:solidFill>
-                  <a:srgbClr val="0D6E6E"/>
-                </a:solidFill>
-                <a:latin typeface="Calibri"/>
-              </a:rPr>
-              <a:t>Ages 18–30</a:t>
-            </a:r>
-          </a:p>
-        </p:txBody>
-      </p:sp>
-      <p:sp>
-        <p:nvSpPr>
-          <p:cNvPr id="8" name="TextBox 7"/>
-          <p:cNvSpPr txBox="1"/>
-          <p:nvPr/>
-        </p:nvSpPr>
-        <p:spPr>
-          <a:xfrm>
-            <a:off x="3657600" y="1252728"/>
-            <a:ext cx="7772400" cy="1085850"/>
-          </a:xfrm>
-          <a:prstGeom prst="rect">
-            <a:avLst/>
-          </a:prstGeom>
-          <a:noFill/>
-        </p:spPr>
-        <p:txBody>
-          <a:bodyPr wrap="square" anchor="ctr">
-            <a:spAutoFit/>
-          </a:bodyPr>
-          <a:lstStyle/>
-          <a:p>
-            <a:pPr algn="l">
-              <a:spcAft>
-                <a:spcPts val="0"/>
-              </a:spcAft>
-            </a:pPr>
-            <a:r>
-              <a:rPr sz="1200" b="0" i="0">
-                <a:solidFill>
-                  <a:srgbClr val="3A4A54"/>
-                </a:solidFill>
-                <a:latin typeface="Calibri"/>
-              </a:rPr>
-              <a:t>Nominee within range</a:t>
-            </a:r>
-          </a:p>
-        </p:txBody>
-      </p:sp>
-      <p:sp>
-        <p:nvSpPr>
-          <p:cNvPr id="9" name="Rectangle 8"/>
-          <p:cNvSpPr/>
-          <p:nvPr/>
-        </p:nvSpPr>
-        <p:spPr>
-          <a:xfrm>
-            <a:off x="411480" y="2503170"/>
-            <a:ext cx="11338560" cy="1223010"/>
-          </a:xfrm>
-          <a:prstGeom prst="rect">
-            <a:avLst/>
-          </a:prstGeom>
-          <a:solidFill>
-            <a:srgbClr val="FFFFFF"/>
-          </a:solidFill>
-          <a:ln w="9525">
-            <a:solidFill>
-              <a:srgbClr val="D0DCDC"/>
-            </a:solidFill>
-          </a:ln>
-          <a:effectLst/>
-        </p:spPr>
-        <p:style>
-          <a:lnRef idx="1">
-            <a:schemeClr val="accent1"/>
-          </a:lnRef>
-          <a:fillRef idx="3">
-            <a:schemeClr val="accent1"/>
-          </a:fillRef>
-          <a:effectRef idx="2">
-            <a:schemeClr val="accent1"/>
-          </a:effectRef>
-          <a:fontRef idx="minor">
-            <a:schemeClr val="lt1"/>
-          </a:fontRef>
-        </p:style>
-        <p:txBody>
-          <a:bodyPr rtlCol="0" anchor="ctr"/>
-          <a:lstStyle/>
-          <a:p>
-            <a:pPr algn="ctr"/>
-          </a:p>
-        </p:txBody>
-      </p:sp>
-      <p:sp>
-        <p:nvSpPr>
-          <p:cNvPr id="10" name="TextBox 9"/>
-          <p:cNvSpPr txBox="1"/>
-          <p:nvPr/>
-        </p:nvSpPr>
-        <p:spPr>
-          <a:xfrm>
-            <a:off x="594360" y="2567178"/>
-            <a:ext cx="2926080" cy="1085850"/>
-          </a:xfrm>
-          <a:prstGeom prst="rect">
-            <a:avLst/>
-          </a:prstGeom>
-          <a:noFill/>
-        </p:spPr>
-        <p:txBody>
-          <a:bodyPr wrap="square" anchor="ctr">
-            <a:spAutoFit/>
-          </a:bodyPr>
-          <a:lstStyle/>
-          <a:p>
-            <a:pPr algn="l">
-              <a:spcAft>
-                <a:spcPts val="0"/>
-              </a:spcAft>
-            </a:pPr>
-            <a:r>
-              <a:rPr sz="1300" b="1" i="0">
-                <a:solidFill>
-                  <a:srgbClr val="0D6E6E"/>
-                </a:solidFill>
-                <a:latin typeface="Calibri"/>
-              </a:rPr>
-              <a:t>African nationality &amp; residency</a:t>
-            </a:r>
-          </a:p>
-        </p:txBody>
-      </p:sp>
-      <p:sp>
-        <p:nvSpPr>
-          <p:cNvPr id="11" name="TextBox 10"/>
-          <p:cNvSpPr txBox="1"/>
-          <p:nvPr/>
-        </p:nvSpPr>
-        <p:spPr>
-          <a:xfrm>
-            <a:off x="3657600" y="2567178"/>
-            <a:ext cx="7772400" cy="1085850"/>
-          </a:xfrm>
-          <a:prstGeom prst="rect">
-            <a:avLst/>
-          </a:prstGeom>
-          <a:noFill/>
-        </p:spPr>
-        <p:txBody>
-          <a:bodyPr wrap="square" anchor="ctr">
-            <a:spAutoFit/>
-          </a:bodyPr>
-          <a:lstStyle/>
-          <a:p>
-            <a:pPr algn="l">
-              <a:spcAft>
-                <a:spcPts val="0"/>
-              </a:spcAft>
-            </a:pPr>
-            <a:r>
-              <a:rPr sz="1200" b="0" i="0">
-                <a:solidFill>
-                  <a:srgbClr val="3A4A54"/>
-                </a:solidFill>
-                <a:latin typeface="Calibri"/>
-              </a:rPr>
-              <a:t>Ugandan national living in Uganda</a:t>
-            </a:r>
-          </a:p>
-        </p:txBody>
-      </p:sp>
-      <p:sp>
-        <p:nvSpPr>
-          <p:cNvPr id="12" name="Rectangle 11"/>
-          <p:cNvSpPr/>
-          <p:nvPr/>
-        </p:nvSpPr>
-        <p:spPr>
-          <a:xfrm>
-            <a:off x="411480" y="3817620"/>
-            <a:ext cx="11338560" cy="1223010"/>
-          </a:xfrm>
-          <a:prstGeom prst="rect">
-            <a:avLst/>
-          </a:prstGeom>
-          <a:solidFill>
-            <a:srgbClr val="FFFFFF"/>
-          </a:solidFill>
-          <a:ln w="9525">
-            <a:solidFill>
-              <a:srgbClr val="D0DCDC"/>
-            </a:solidFill>
-          </a:ln>
-          <a:effectLst/>
-        </p:spPr>
-        <p:style>
-          <a:lnRef idx="1">
-            <a:schemeClr val="accent1"/>
-          </a:lnRef>
-          <a:fillRef idx="3">
-            <a:schemeClr val="accent1"/>
-          </a:fillRef>
-          <a:effectRef idx="2">
-            <a:schemeClr val="accent1"/>
-          </a:effectRef>
-          <a:fontRef idx="minor">
-            <a:schemeClr val="lt1"/>
-          </a:fontRef>
-        </p:style>
-        <p:txBody>
-          <a:bodyPr rtlCol="0" anchor="ctr"/>
-          <a:lstStyle/>
-          <a:p>
-            <a:pPr algn="ctr"/>
-          </a:p>
-        </p:txBody>
-      </p:sp>
-      <p:sp>
-        <p:nvSpPr>
-          <p:cNvPr id="13" name="TextBox 12"/>
-          <p:cNvSpPr txBox="1"/>
-          <p:nvPr/>
-        </p:nvSpPr>
-        <p:spPr>
-          <a:xfrm>
-            <a:off x="594360" y="3881628"/>
-            <a:ext cx="2926080" cy="1085850"/>
-          </a:xfrm>
-          <a:prstGeom prst="rect">
-            <a:avLst/>
-          </a:prstGeom>
-          <a:noFill/>
-        </p:spPr>
-        <p:txBody>
-          <a:bodyPr wrap="square" anchor="ctr">
-            <a:spAutoFit/>
-          </a:bodyPr>
-          <a:lstStyle/>
-          <a:p>
-            <a:pPr algn="l">
-              <a:spcAft>
-                <a:spcPts val="0"/>
-              </a:spcAft>
-            </a:pPr>
-            <a:r>
-              <a:rPr sz="1300" b="1" i="0">
-                <a:solidFill>
-                  <a:srgbClr val="0D6E6E"/>
-                </a:solidFill>
-                <a:latin typeface="Calibri"/>
-              </a:rPr>
-              <a:t>AI for social / health impact</a:t>
-            </a:r>
-          </a:p>
-        </p:txBody>
-      </p:sp>
-      <p:sp>
-        <p:nvSpPr>
-          <p:cNvPr id="14" name="TextBox 13"/>
-          <p:cNvSpPr txBox="1"/>
-          <p:nvPr/>
-        </p:nvSpPr>
-        <p:spPr>
-          <a:xfrm>
-            <a:off x="3657600" y="3881628"/>
-            <a:ext cx="7772400" cy="1085850"/>
-          </a:xfrm>
-          <a:prstGeom prst="rect">
-            <a:avLst/>
-          </a:prstGeom>
-          <a:noFill/>
-        </p:spPr>
-        <p:txBody>
-          <a:bodyPr wrap="square" anchor="ctr">
-            <a:spAutoFit/>
-          </a:bodyPr>
-          <a:lstStyle/>
-          <a:p>
-            <a:pPr algn="l">
-              <a:spcAft>
-                <a:spcPts val="0"/>
-              </a:spcAft>
-            </a:pPr>
-            <a:r>
-              <a:rPr sz="1200" b="0" i="0">
-                <a:solidFill>
-                  <a:srgbClr val="3A4A54"/>
-                </a:solidFill>
-                <a:latin typeface="Calibri"/>
-              </a:rPr>
-              <a:t>FCHIP predictive community health</a:t>
-            </a:r>
-          </a:p>
-        </p:txBody>
-      </p:sp>
-      <p:sp>
-        <p:nvSpPr>
-          <p:cNvPr id="15" name="Rectangle 14"/>
-          <p:cNvSpPr/>
-          <p:nvPr/>
-        </p:nvSpPr>
-        <p:spPr>
-          <a:xfrm>
-            <a:off x="411480" y="5132070"/>
-            <a:ext cx="11338560" cy="1223010"/>
-          </a:xfrm>
-          <a:prstGeom prst="rect">
-            <a:avLst/>
-          </a:prstGeom>
-          <a:solidFill>
-            <a:srgbClr val="FFFFFF"/>
-          </a:solidFill>
-          <a:ln w="9525">
-            <a:solidFill>
-              <a:srgbClr val="D0DCDC"/>
-            </a:solidFill>
-          </a:ln>
-          <a:effectLst/>
-        </p:spPr>
-        <p:style>
-          <a:lnRef idx="1">
-            <a:schemeClr val="accent1"/>
-          </a:lnRef>
-          <a:fillRef idx="3">
-            <a:schemeClr val="accent1"/>
-          </a:fillRef>
-          <a:effectRef idx="2">
-            <a:schemeClr val="accent1"/>
-          </a:effectRef>
-          <a:fontRef idx="minor">
-            <a:schemeClr val="lt1"/>
-          </a:fontRef>
-        </p:style>
-        <p:txBody>
-          <a:bodyPr rtlCol="0" anchor="ctr"/>
-          <a:lstStyle/>
-          <a:p>
-            <a:pPr algn="ctr"/>
-          </a:p>
-        </p:txBody>
-      </p:sp>
-      <p:sp>
-        <p:nvSpPr>
-          <p:cNvPr id="16" name="TextBox 15"/>
-          <p:cNvSpPr txBox="1"/>
-          <p:nvPr/>
-        </p:nvSpPr>
-        <p:spPr>
-          <a:xfrm>
-            <a:off x="594360" y="5196078"/>
-            <a:ext cx="2926080" cy="1085850"/>
-          </a:xfrm>
-          <a:prstGeom prst="rect">
-            <a:avLst/>
-          </a:prstGeom>
-          <a:noFill/>
-        </p:spPr>
-        <p:txBody>
-          <a:bodyPr wrap="square" anchor="ctr">
-            <a:spAutoFit/>
-          </a:bodyPr>
-          <a:lstStyle/>
-          <a:p>
-            <a:pPr algn="l">
-              <a:spcAft>
-                <a:spcPts val="0"/>
-              </a:spcAft>
-            </a:pPr>
-            <a:r>
-              <a:rPr sz="1300" b="1" i="0">
-                <a:solidFill>
-                  <a:srgbClr val="0D6E6E"/>
-                </a:solidFill>
-                <a:latin typeface="Calibri"/>
-              </a:rPr>
-              <a:t>Five scholarships</a:t>
-            </a:r>
-          </a:p>
-        </p:txBody>
-      </p:sp>
-      <p:sp>
-        <p:nvSpPr>
-          <p:cNvPr id="17" name="TextBox 16"/>
-          <p:cNvSpPr txBox="1"/>
-          <p:nvPr/>
-        </p:nvSpPr>
-        <p:spPr>
-          <a:xfrm>
-            <a:off x="3657600" y="5196078"/>
-            <a:ext cx="7772400" cy="1085850"/>
-          </a:xfrm>
-          <a:prstGeom prst="rect">
-            <a:avLst/>
-          </a:prstGeom>
-          <a:noFill/>
-        </p:spPr>
-        <p:txBody>
-          <a:bodyPr wrap="square" anchor="ctr">
-            <a:spAutoFit/>
-          </a:bodyPr>
-          <a:lstStyle/>
-          <a:p>
-            <a:pPr algn="l">
-              <a:spcAft>
-                <a:spcPts val="0"/>
-              </a:spcAft>
-            </a:pPr>
-            <a:r>
-              <a:rPr sz="1200" b="0" i="0">
-                <a:solidFill>
-                  <a:srgbClr val="3A4A54"/>
-                </a:solidFill>
-                <a:latin typeface="Calibri"/>
-              </a:rPr>
-              <a:t>Strong healthcare priority alignment</a:t>
-            </a:r>
-          </a:p>
-        </p:txBody>
-      </p:sp>
-      <p:sp>
-        <p:nvSpPr>
-          <p:cNvPr id="18" name="Rectangle 17"/>
-          <p:cNvSpPr/>
-          <p:nvPr/>
-        </p:nvSpPr>
-        <p:spPr>
-          <a:xfrm>
-            <a:off x="0" y="6565392"/>
-            <a:ext cx="12191695" cy="292608"/>
+            <a:off x="0" y="6583680"/>
+            <a:ext cx="12191695" cy="274320"/>
           </a:xfrm>
           <a:prstGeom prst="rect">
             <a:avLst/>
@@ -5712,7 +4490,6 @@
           <a:ln>
             <a:noFill/>
           </a:ln>
-          <a:effectLst/>
         </p:spPr>
         <p:style>
           <a:lnRef idx="1">
@@ -5738,14 +4515,14 @@
       </p:sp>
       <p:sp>
         <p:nvSpPr>
-          <p:cNvPr id="19" name="TextBox 18"/>
+          <p:cNvPr id="8" name="TextBox 7"/>
           <p:cNvSpPr txBox="1"/>
           <p:nvPr/>
         </p:nvSpPr>
         <p:spPr>
           <a:xfrm>
-            <a:off x="365760" y="6574536"/>
-            <a:ext cx="9144000" cy="274320"/>
+            <a:off x="365760" y="6601968"/>
+            <a:ext cx="10058400" cy="228600"/>
           </a:xfrm>
           <a:prstGeom prst="rect">
             <a:avLst/>
@@ -5753,16 +4530,12 @@
           <a:noFill/>
         </p:spPr>
         <p:txBody>
-          <a:bodyPr wrap="square" anchor="ctr">
+          <a:bodyPr wrap="square">
             <a:spAutoFit/>
           </a:bodyPr>
           <a:lstStyle/>
           <a:p>
-            <a:pPr algn="l">
-              <a:spcAft>
-                <a:spcPts val="0"/>
-              </a:spcAft>
-            </a:pPr>
+            <a:pPr algn="l"/>
             <a:r>
               <a:rPr sz="900" b="0" i="0">
                 <a:solidFill>
@@ -5770,21 +4543,21 @@
                 </a:solidFill>
                 <a:latin typeface="Calibri"/>
               </a:rPr>
-              <a:t>FairBanks FCHIP  |  Brandtech Group AI for Good Scholarship   |  Your health, our mission.</a:t>
-            </a:r>
-          </a:p>
-        </p:txBody>
-      </p:sp>
-      <p:sp>
-        <p:nvSpPr>
-          <p:cNvPr id="20" name="TextBox 19"/>
+              <a:t>FairBanks FCHIP  |  OYW Cape Town 2026  |  Your health, our mission.</a:t>
+            </a:r>
+          </a:p>
+        </p:txBody>
+      </p:sp>
+      <p:sp>
+        <p:nvSpPr>
+          <p:cNvPr id="9" name="TextBox 8"/>
           <p:cNvSpPr txBox="1"/>
           <p:nvPr/>
         </p:nvSpPr>
         <p:spPr>
           <a:xfrm>
-            <a:off x="11094415" y="6574536"/>
-            <a:ext cx="731520" cy="274320"/>
+            <a:off x="11368735" y="6601968"/>
+            <a:ext cx="548640" cy="228600"/>
           </a:xfrm>
           <a:prstGeom prst="rect">
             <a:avLst/>
@@ -5792,16 +4565,12 @@
           <a:noFill/>
         </p:spPr>
         <p:txBody>
-          <a:bodyPr wrap="square" anchor="ctr">
+          <a:bodyPr wrap="square">
             <a:spAutoFit/>
           </a:bodyPr>
           <a:lstStyle/>
           <a:p>
-            <a:pPr algn="r">
-              <a:spcAft>
-                <a:spcPts val="0"/>
-              </a:spcAft>
-            </a:pPr>
+            <a:pPr algn="r"/>
             <a:r>
               <a:rPr sz="900" b="0" i="0">
                 <a:solidFill>
@@ -5852,7 +4621,6 @@
           <a:ln>
             <a:noFill/>
           </a:ln>
-          <a:effectLst/>
         </p:spPr>
         <p:style>
           <a:lnRef idx="1">
@@ -5884,19 +4652,18 @@
         </p:nvSpPr>
         <p:spPr>
           <a:xfrm>
-            <a:off x="0" y="0"/>
-            <a:ext cx="164592" cy="960120"/>
+            <a:off x="457200" y="164592"/>
+            <a:ext cx="73152" cy="640080"/>
           </a:xfrm>
           <a:prstGeom prst="rect">
             <a:avLst/>
           </a:prstGeom>
           <a:solidFill>
-            <a:srgbClr val="0D6E6E"/>
+            <a:srgbClr val="C45C26"/>
           </a:solidFill>
           <a:ln>
             <a:noFill/>
           </a:ln>
-          <a:effectLst/>
         </p:spPr>
         <p:style>
           <a:lnRef idx="1">
@@ -5928,8 +4695,8 @@
         </p:nvSpPr>
         <p:spPr>
           <a:xfrm>
-            <a:off x="457200" y="109728"/>
-            <a:ext cx="10972800" cy="256032"/>
+            <a:off x="685800" y="201168"/>
+            <a:ext cx="10972800" cy="594360"/>
           </a:xfrm>
           <a:prstGeom prst="rect">
             <a:avLst/>
@@ -5937,70 +4704,27 @@
           <a:noFill/>
         </p:spPr>
         <p:txBody>
-          <a:bodyPr wrap="square" anchor="t">
+          <a:bodyPr wrap="square">
             <a:spAutoFit/>
           </a:bodyPr>
           <a:lstStyle/>
           <a:p>
-            <a:pPr algn="l">
-              <a:spcAft>
-                <a:spcPts val="0"/>
-              </a:spcAft>
-            </a:pPr>
-            <a:r>
-              <a:rPr sz="1100" b="1" i="0">
-                <a:solidFill>
-                  <a:srgbClr val="C45C26"/>
+            <a:pPr algn="l"/>
+            <a:r>
+              <a:rPr sz="2600" b="1" i="0">
+                <a:solidFill>
+                  <a:srgbClr val="0A1F2E"/>
                 </a:solidFill>
                 <a:latin typeface="Calibri"/>
               </a:rPr>
-              <a:t>WHY FAIRBANKS</a:t>
-            </a:r>
-          </a:p>
-        </p:txBody>
-      </p:sp>
-      <p:sp>
-        <p:nvSpPr>
-          <p:cNvPr id="5" name="TextBox 4"/>
-          <p:cNvSpPr txBox="1"/>
-          <p:nvPr/>
-        </p:nvSpPr>
-        <p:spPr>
-          <a:xfrm>
-            <a:off x="457200" y="384048"/>
-            <a:ext cx="11247120" cy="475488"/>
-          </a:xfrm>
-          <a:prstGeom prst="rect">
-            <a:avLst/>
-          </a:prstGeom>
-          <a:noFill/>
-        </p:spPr>
-        <p:txBody>
-          <a:bodyPr wrap="square" anchor="t">
-            <a:spAutoFit/>
-          </a:bodyPr>
-          <a:lstStyle/>
-          <a:p>
-            <a:pPr algn="l">
-              <a:spcAft>
-                <a:spcPts val="0"/>
-              </a:spcAft>
-            </a:pPr>
-            <a:r>
-              <a:rPr sz="2200" b="1" i="0">
-                <a:solidFill>
-                  <a:srgbClr val="0A1F2E"/>
-                </a:solidFill>
-                <a:latin typeface="Calibri"/>
-              </a:rPr>
-              <a:t>A live community health ecosystem</a:t>
+              <a:t>Proof</a:t>
             </a:r>
           </a:p>
         </p:txBody>
       </p:sp>
       <p:pic>
         <p:nvPicPr>
-          <p:cNvPr id="6" name="Picture 5" descr="outreach_facilitator_canopy_01_opt.jpg"/>
+          <p:cNvPr id="5" name="Picture 4" descr="dashboard_demo_opt.jpg"/>
           <p:cNvPicPr>
             <a:picLocks noChangeAspect="1"/>
           </p:cNvPicPr>
@@ -6014,8 +4738,8 @@
         </p:blipFill>
         <p:spPr>
           <a:xfrm>
-            <a:off x="411480" y="1943753"/>
-            <a:ext cx="5486400" cy="3656293"/>
+            <a:off x="365760" y="1958340"/>
+            <a:ext cx="5303520" cy="3535680"/>
           </a:xfrm>
           <a:prstGeom prst="rect">
             <a:avLst/>
@@ -6024,14 +4748,14 @@
       </p:pic>
       <p:sp>
         <p:nvSpPr>
-          <p:cNvPr id="7" name="TextBox 6"/>
+          <p:cNvPr id="6" name="TextBox 5"/>
           <p:cNvSpPr txBox="1"/>
           <p:nvPr/>
         </p:nvSpPr>
         <p:spPr>
           <a:xfrm>
-            <a:off x="6217920" y="1234440"/>
-            <a:ext cx="5486400" cy="5074920"/>
+            <a:off x="5852160" y="1097280"/>
+            <a:ext cx="6035040" cy="5212080"/>
           </a:xfrm>
           <a:prstGeom prst="rect">
             <a:avLst/>
@@ -6044,113 +4768,65 @@
           </a:bodyPr>
           <a:lstStyle/>
           <a:p>
-            <a:pPr>
-              <a:spcAft>
-                <a:spcPts val="800"/>
-              </a:spcAft>
-            </a:pPr>
-            <a:r>
-              <a:rPr sz="1400">
+            <a:pPr algn="l"/>
+            <a:r>
+              <a:rPr sz="1500" b="0" i="0">
                 <a:solidFill>
                   <a:srgbClr val="1E2F38"/>
                 </a:solidFill>
                 <a:latin typeface="Calibri"/>
               </a:rPr>
-              <a:t>•  Functioning FairBanks Medical Centre with clinic, pharmacy, and diagnostics</a:t>
-            </a:r>
-          </a:p>
-          <a:p>
-            <a:pPr>
-              <a:spcAft>
-                <a:spcPts val="800"/>
-              </a:spcAft>
-            </a:pPr>
-            <a:r>
-              <a:rPr sz="1400">
+              <a:t>• Live outreach in Bukoto, Kyebando, Kisaasi, Kamwokya, Kikaaya</a:t>
+            </a:r>
+          </a:p>
+          <a:p>
+            <a:pPr algn="l"/>
+            <a:r>
+              <a:rPr sz="1500" b="0" i="0">
                 <a:solidFill>
                   <a:srgbClr val="1E2F38"/>
                 </a:solidFill>
                 <a:latin typeface="Calibri"/>
               </a:rPr>
-              <a:t>•  Active Community Reach outreach in Bukoto, Kyebando, Kisaasi, Kamwokya, Kikaaya</a:t>
-            </a:r>
-          </a:p>
-          <a:p>
-            <a:pPr>
-              <a:spcAft>
-                <a:spcPts val="800"/>
-              </a:spcAft>
-            </a:pPr>
-            <a:r>
-              <a:rPr sz="1400">
+              <a:t>• Maternal, child, Gericare, and NCD screening programmes generating real field data</a:t>
+            </a:r>
+          </a:p>
+          <a:p>
+            <a:pPr algn="l"/>
+            <a:r>
+              <a:rPr sz="1500" b="0" i="0">
                 <a:solidFill>
                   <a:srgbClr val="1E2F38"/>
                 </a:solidFill>
                 <a:latin typeface="Calibri"/>
               </a:rPr>
-              <a:t>•  Trusted CHW and VHT relationships for household visits and referrals</a:t>
-            </a:r>
-          </a:p>
-          <a:p>
-            <a:pPr>
-              <a:spcAft>
-                <a:spcPts val="800"/>
-              </a:spcAft>
-            </a:pPr>
-            <a:r>
-              <a:rPr sz="1400">
+              <a:t>• Functioning medical centre anchoring referrals and quality assurance</a:t>
+            </a:r>
+          </a:p>
+          <a:p>
+            <a:pPr algn="l"/>
+            <a:r>
+              <a:rPr sz="1500" b="0" i="0">
                 <a:solidFill>
                   <a:srgbClr val="1E2F38"/>
                 </a:solidFill>
                 <a:latin typeface="Calibri"/>
               </a:rPr>
-              <a:t>•  Live programmes: maternal &amp; child health, Gericare, chronic-disease screening</a:t>
-            </a:r>
-          </a:p>
-          <a:p>
-            <a:pPr>
-              <a:spcAft>
-                <a:spcPts val="800"/>
-              </a:spcAft>
-            </a:pPr>
-            <a:r>
-              <a:rPr sz="1400">
-                <a:solidFill>
-                  <a:srgbClr val="1E2F38"/>
-                </a:solidFill>
-                <a:latin typeface="Calibri"/>
-              </a:rPr>
-              <a:t>•  Digital health records and outreach data ready to feed FCHIP</a:t>
-            </a:r>
-          </a:p>
-          <a:p>
-            <a:pPr>
-              <a:spcAft>
-                <a:spcPts val="800"/>
-              </a:spcAft>
-            </a:pPr>
-            <a:r>
-              <a:rPr sz="1400">
-                <a:solidFill>
-                  <a:srgbClr val="1E2F38"/>
-                </a:solidFill>
-                <a:latin typeface="Calibri"/>
-              </a:rPr>
-              <a:t>•  Research and partnership mindset for ethical, evidence-based scale</a:t>
-            </a:r>
-          </a:p>
-        </p:txBody>
-      </p:sp>
-      <p:sp>
-        <p:nvSpPr>
-          <p:cNvPr id="8" name="Rectangle 7"/>
+              <a:t>• CHW/VHT relationships built on trust — essential for ethical AI adoption</a:t>
+            </a:r>
+          </a:p>
+        </p:txBody>
+      </p:sp>
+      <p:sp>
+        <p:nvSpPr>
+          <p:cNvPr id="7" name="Rectangle 6"/>
           <p:cNvSpPr/>
           <p:nvPr/>
         </p:nvSpPr>
         <p:spPr>
           <a:xfrm>
-            <a:off x="0" y="6565392"/>
-            <a:ext cx="12191695" cy="292608"/>
+            <a:off x="0" y="6583680"/>
+            <a:ext cx="12191695" cy="274320"/>
           </a:xfrm>
           <a:prstGeom prst="rect">
             <a:avLst/>
@@ -6161,7 +4837,6 @@
           <a:ln>
             <a:noFill/>
           </a:ln>
-          <a:effectLst/>
         </p:spPr>
         <p:style>
           <a:lnRef idx="1">
@@ -6187,14 +4862,49 @@
       </p:sp>
       <p:sp>
         <p:nvSpPr>
+          <p:cNvPr id="8" name="TextBox 7"/>
+          <p:cNvSpPr txBox="1"/>
+          <p:nvPr/>
+        </p:nvSpPr>
+        <p:spPr>
+          <a:xfrm>
+            <a:off x="365760" y="6601968"/>
+            <a:ext cx="10058400" cy="228600"/>
+          </a:xfrm>
+          <a:prstGeom prst="rect">
+            <a:avLst/>
+          </a:prstGeom>
+          <a:noFill/>
+        </p:spPr>
+        <p:txBody>
+          <a:bodyPr wrap="square">
+            <a:spAutoFit/>
+          </a:bodyPr>
+          <a:lstStyle/>
+          <a:p>
+            <a:pPr algn="l"/>
+            <a:r>
+              <a:rPr sz="900" b="0" i="0">
+                <a:solidFill>
+                  <a:srgbClr val="FFFFFF"/>
+                </a:solidFill>
+                <a:latin typeface="Calibri"/>
+              </a:rPr>
+              <a:t>FairBanks FCHIP  |  OYW Cape Town 2026  |  Your health, our mission.</a:t>
+            </a:r>
+          </a:p>
+        </p:txBody>
+      </p:sp>
+      <p:sp>
+        <p:nvSpPr>
           <p:cNvPr id="9" name="TextBox 8"/>
           <p:cNvSpPr txBox="1"/>
           <p:nvPr/>
         </p:nvSpPr>
         <p:spPr>
           <a:xfrm>
-            <a:off x="365760" y="6574536"/>
-            <a:ext cx="9144000" cy="274320"/>
+            <a:off x="11368735" y="6601968"/>
+            <a:ext cx="548640" cy="228600"/>
           </a:xfrm>
           <a:prstGeom prst="rect">
             <a:avLst/>
@@ -6202,55 +4912,12 @@
           <a:noFill/>
         </p:spPr>
         <p:txBody>
-          <a:bodyPr wrap="square" anchor="ctr">
+          <a:bodyPr wrap="square">
             <a:spAutoFit/>
           </a:bodyPr>
           <a:lstStyle/>
           <a:p>
-            <a:pPr algn="l">
-              <a:spcAft>
-                <a:spcPts val="0"/>
-              </a:spcAft>
-            </a:pPr>
-            <a:r>
-              <a:rPr sz="900" b="0" i="0">
-                <a:solidFill>
-                  <a:srgbClr val="FFFFFF"/>
-                </a:solidFill>
-                <a:latin typeface="Calibri"/>
-              </a:rPr>
-              <a:t>FairBanks FCHIP  |  Brandtech Group AI for Good Scholarship   |  Your health, our mission.</a:t>
-            </a:r>
-          </a:p>
-        </p:txBody>
-      </p:sp>
-      <p:sp>
-        <p:nvSpPr>
-          <p:cNvPr id="10" name="TextBox 9"/>
-          <p:cNvSpPr txBox="1"/>
-          <p:nvPr/>
-        </p:nvSpPr>
-        <p:spPr>
-          <a:xfrm>
-            <a:off x="11094415" y="6574536"/>
-            <a:ext cx="731520" cy="274320"/>
-          </a:xfrm>
-          <a:prstGeom prst="rect">
-            <a:avLst/>
-          </a:prstGeom>
-          <a:noFill/>
-        </p:spPr>
-        <p:txBody>
-          <a:bodyPr wrap="square" anchor="ctr">
-            <a:spAutoFit/>
-          </a:bodyPr>
-          <a:lstStyle/>
-          <a:p>
-            <a:pPr algn="r">
-              <a:spcAft>
-                <a:spcPts val="0"/>
-              </a:spcAft>
-            </a:pPr>
+            <a:pPr algn="r"/>
             <a:r>
               <a:rPr sz="900" b="0" i="0">
                 <a:solidFill>
@@ -6301,7 +4968,6 @@
           <a:ln>
             <a:noFill/>
           </a:ln>
-          <a:effectLst/>
         </p:spPr>
         <p:style>
           <a:lnRef idx="1">
@@ -6333,19 +4999,18 @@
         </p:nvSpPr>
         <p:spPr>
           <a:xfrm>
-            <a:off x="0" y="0"/>
-            <a:ext cx="164592" cy="960120"/>
+            <a:off x="457200" y="164592"/>
+            <a:ext cx="73152" cy="640080"/>
           </a:xfrm>
           <a:prstGeom prst="rect">
             <a:avLst/>
           </a:prstGeom>
           <a:solidFill>
-            <a:srgbClr val="0D6E6E"/>
+            <a:srgbClr val="C45C26"/>
           </a:solidFill>
           <a:ln>
             <a:noFill/>
           </a:ln>
-          <a:effectLst/>
         </p:spPr>
         <p:style>
           <a:lnRef idx="1">
@@ -6377,86 +5042,8 @@
         </p:nvSpPr>
         <p:spPr>
           <a:xfrm>
-            <a:off x="457200" y="109728"/>
-            <a:ext cx="10972800" cy="256032"/>
-          </a:xfrm>
-          <a:prstGeom prst="rect">
-            <a:avLst/>
-          </a:prstGeom>
-          <a:noFill/>
-        </p:spPr>
-        <p:txBody>
-          <a:bodyPr wrap="square" anchor="t">
-            <a:spAutoFit/>
-          </a:bodyPr>
-          <a:lstStyle/>
-          <a:p>
-            <a:pPr algn="l">
-              <a:spcAft>
-                <a:spcPts val="0"/>
-              </a:spcAft>
-            </a:pPr>
-            <a:r>
-              <a:rPr sz="1100" b="1" i="0">
-                <a:solidFill>
-                  <a:srgbClr val="C45C26"/>
-                </a:solidFill>
-                <a:latin typeface="Calibri"/>
-              </a:rPr>
-              <a:t>THE PLAN</a:t>
-            </a:r>
-          </a:p>
-        </p:txBody>
-      </p:sp>
-      <p:sp>
-        <p:nvSpPr>
-          <p:cNvPr id="5" name="TextBox 4"/>
-          <p:cNvSpPr txBox="1"/>
-          <p:nvPr/>
-        </p:nvSpPr>
-        <p:spPr>
-          <a:xfrm>
-            <a:off x="457200" y="384048"/>
-            <a:ext cx="11247120" cy="475488"/>
-          </a:xfrm>
-          <a:prstGeom prst="rect">
-            <a:avLst/>
-          </a:prstGeom>
-          <a:noFill/>
-        </p:spPr>
-        <p:txBody>
-          <a:bodyPr wrap="square" anchor="t">
-            <a:spAutoFit/>
-          </a:bodyPr>
-          <a:lstStyle/>
-          <a:p>
-            <a:pPr algn="l">
-              <a:spcAft>
-                <a:spcPts val="0"/>
-              </a:spcAft>
-            </a:pPr>
-            <a:r>
-              <a:rPr sz="2200" b="1" i="0">
-                <a:solidFill>
-                  <a:srgbClr val="0A1F2E"/>
-                </a:solidFill>
-                <a:latin typeface="Calibri"/>
-              </a:rPr>
-              <a:t>Scholarship journey</a:t>
-            </a:r>
-          </a:p>
-        </p:txBody>
-      </p:sp>
-      <p:sp>
-        <p:nvSpPr>
-          <p:cNvPr id="6" name="TextBox 5"/>
-          <p:cNvSpPr txBox="1"/>
-          <p:nvPr/>
-        </p:nvSpPr>
-        <p:spPr>
-          <a:xfrm>
-            <a:off x="502920" y="1234440"/>
-            <a:ext cx="5760720" cy="5074920"/>
+            <a:off x="685800" y="201168"/>
+            <a:ext cx="10972800" cy="594360"/>
           </a:xfrm>
           <a:prstGeom prst="rect">
             <a:avLst/>
@@ -6469,74 +5056,22 @@
           </a:bodyPr>
           <a:lstStyle/>
           <a:p>
-            <a:pPr>
-              <a:spcAft>
-                <a:spcPts val="800"/>
-              </a:spcAft>
-            </a:pPr>
-            <a:r>
-              <a:rPr sz="1500">
-                <a:solidFill>
-                  <a:srgbClr val="1E2F38"/>
+            <a:pPr algn="l"/>
+            <a:r>
+              <a:rPr sz="2600" b="1" i="0">
+                <a:solidFill>
+                  <a:srgbClr val="0A1F2E"/>
                 </a:solidFill>
                 <a:latin typeface="Calibri"/>
               </a:rPr>
-              <a:t>•  Submit nominee profile with AI-for-health evidence and references</a:t>
-            </a:r>
-          </a:p>
-          <a:p>
-            <a:pPr>
-              <a:spcAft>
-                <a:spcPts val="800"/>
-              </a:spcAft>
-            </a:pPr>
-            <a:r>
-              <a:rPr sz="1500">
-                <a:solidFill>
-                  <a:srgbClr val="1E2F38"/>
-                </a:solidFill>
-                <a:latin typeface="Calibri"/>
-              </a:rPr>
-              <a:t>•  Prepare summit talking points on FCHIP and FairBanks cascade</a:t>
-            </a:r>
-          </a:p>
-          <a:p>
-            <a:pPr>
-              <a:spcAft>
-                <a:spcPts val="800"/>
-              </a:spcAft>
-            </a:pPr>
-            <a:r>
-              <a:rPr sz="1500">
-                <a:solidFill>
-                  <a:srgbClr val="1E2F38"/>
-                </a:solidFill>
-                <a:latin typeface="Calibri"/>
-              </a:rPr>
-              <a:t>•  Engage Brandtech / OYW sessions on responsible AI</a:t>
-            </a:r>
-          </a:p>
-          <a:p>
-            <a:pPr>
-              <a:spcAft>
-                <a:spcPts val="800"/>
-              </a:spcAft>
-            </a:pPr>
-            <a:r>
-              <a:rPr sz="1500">
-                <a:solidFill>
-                  <a:srgbClr val="1E2F38"/>
-                </a:solidFill>
-                <a:latin typeface="Calibri"/>
-              </a:rPr>
-              <a:t>•  Publish a public learning note for FairBanks community partners</a:t>
+              <a:t>Cape Town</a:t>
             </a:r>
           </a:p>
         </p:txBody>
       </p:sp>
       <p:pic>
         <p:nvPicPr>
-          <p:cNvPr id="7" name="Picture 6" descr="indoor_training_staff_presenting_01_opt.jpg"/>
+          <p:cNvPr id="5" name="Picture 4" descr="outreach_hands_raised_01_opt.jpg"/>
           <p:cNvPicPr>
             <a:picLocks noChangeAspect="1"/>
           </p:cNvPicPr>
@@ -6550,8 +5085,8 @@
         </p:blipFill>
         <p:spPr>
           <a:xfrm>
-            <a:off x="6492240" y="2035160"/>
-            <a:ext cx="5212080" cy="3473479"/>
+            <a:off x="365760" y="1958340"/>
+            <a:ext cx="5303520" cy="3535680"/>
           </a:xfrm>
           <a:prstGeom prst="rect">
             <a:avLst/>
@@ -6560,14 +5095,49 @@
       </p:pic>
       <p:sp>
         <p:nvSpPr>
-          <p:cNvPr id="8" name="Rectangle 7"/>
+          <p:cNvPr id="6" name="TextBox 5"/>
+          <p:cNvSpPr txBox="1"/>
+          <p:nvPr/>
+        </p:nvSpPr>
+        <p:spPr>
+          <a:xfrm>
+            <a:off x="5852160" y="1097280"/>
+            <a:ext cx="6035040" cy="5212080"/>
+          </a:xfrm>
+          <a:prstGeom prst="rect">
+            <a:avLst/>
+          </a:prstGeom>
+          <a:noFill/>
+        </p:spPr>
+        <p:txBody>
+          <a:bodyPr wrap="square">
+            <a:spAutoFit/>
+          </a:bodyPr>
+          <a:lstStyle/>
+          <a:p>
+            <a:pPr algn="l"/>
+            <a:r>
+              <a:rPr sz="1500" b="0" i="0">
+                <a:solidFill>
+                  <a:srgbClr val="1E2F38"/>
+                </a:solidFill>
+                <a:latin typeface="Calibri"/>
+              </a:rPr>
+              <a:t>Share a practitioner story: how AI can strengthen — not bypass — community health workers</a:t>
+            </a:r>
+          </a:p>
+        </p:txBody>
+      </p:sp>
+      <p:sp>
+        <p:nvSpPr>
+          <p:cNvPr id="7" name="Rectangle 6"/>
           <p:cNvSpPr/>
           <p:nvPr/>
         </p:nvSpPr>
         <p:spPr>
           <a:xfrm>
-            <a:off x="0" y="6565392"/>
-            <a:ext cx="12191695" cy="292608"/>
+            <a:off x="0" y="6583680"/>
+            <a:ext cx="12191695" cy="274320"/>
           </a:xfrm>
           <a:prstGeom prst="rect">
             <a:avLst/>
@@ -6578,7 +5148,6 @@
           <a:ln>
             <a:noFill/>
           </a:ln>
-          <a:effectLst/>
         </p:spPr>
         <p:style>
           <a:lnRef idx="1">
@@ -6604,14 +5173,49 @@
       </p:sp>
       <p:sp>
         <p:nvSpPr>
+          <p:cNvPr id="8" name="TextBox 7"/>
+          <p:cNvSpPr txBox="1"/>
+          <p:nvPr/>
+        </p:nvSpPr>
+        <p:spPr>
+          <a:xfrm>
+            <a:off x="365760" y="6601968"/>
+            <a:ext cx="10058400" cy="228600"/>
+          </a:xfrm>
+          <a:prstGeom prst="rect">
+            <a:avLst/>
+          </a:prstGeom>
+          <a:noFill/>
+        </p:spPr>
+        <p:txBody>
+          <a:bodyPr wrap="square">
+            <a:spAutoFit/>
+          </a:bodyPr>
+          <a:lstStyle/>
+          <a:p>
+            <a:pPr algn="l"/>
+            <a:r>
+              <a:rPr sz="900" b="0" i="0">
+                <a:solidFill>
+                  <a:srgbClr val="FFFFFF"/>
+                </a:solidFill>
+                <a:latin typeface="Calibri"/>
+              </a:rPr>
+              <a:t>FairBanks FCHIP  |  OYW Cape Town 2026  |  Your health, our mission.</a:t>
+            </a:r>
+          </a:p>
+        </p:txBody>
+      </p:sp>
+      <p:sp>
+        <p:nvSpPr>
           <p:cNvPr id="9" name="TextBox 8"/>
           <p:cNvSpPr txBox="1"/>
           <p:nvPr/>
         </p:nvSpPr>
         <p:spPr>
           <a:xfrm>
-            <a:off x="365760" y="6574536"/>
-            <a:ext cx="9144000" cy="274320"/>
+            <a:off x="11368735" y="6601968"/>
+            <a:ext cx="548640" cy="228600"/>
           </a:xfrm>
           <a:prstGeom prst="rect">
             <a:avLst/>
@@ -6619,55 +5223,12 @@
           <a:noFill/>
         </p:spPr>
         <p:txBody>
-          <a:bodyPr wrap="square" anchor="ctr">
+          <a:bodyPr wrap="square">
             <a:spAutoFit/>
           </a:bodyPr>
           <a:lstStyle/>
           <a:p>
-            <a:pPr algn="l">
-              <a:spcAft>
-                <a:spcPts val="0"/>
-              </a:spcAft>
-            </a:pPr>
-            <a:r>
-              <a:rPr sz="900" b="0" i="0">
-                <a:solidFill>
-                  <a:srgbClr val="FFFFFF"/>
-                </a:solidFill>
-                <a:latin typeface="Calibri"/>
-              </a:rPr>
-              <a:t>FairBanks FCHIP  |  Brandtech Group AI for Good Scholarship   |  Your health, our mission.</a:t>
-            </a:r>
-          </a:p>
-        </p:txBody>
-      </p:sp>
-      <p:sp>
-        <p:nvSpPr>
-          <p:cNvPr id="10" name="TextBox 9"/>
-          <p:cNvSpPr txBox="1"/>
-          <p:nvPr/>
-        </p:nvSpPr>
-        <p:spPr>
-          <a:xfrm>
-            <a:off x="11094415" y="6574536"/>
-            <a:ext cx="731520" cy="274320"/>
-          </a:xfrm>
-          <a:prstGeom prst="rect">
-            <a:avLst/>
-          </a:prstGeom>
-          <a:noFill/>
-        </p:spPr>
-        <p:txBody>
-          <a:bodyPr wrap="square" anchor="ctr">
-            <a:spAutoFit/>
-          </a:bodyPr>
-          <a:lstStyle/>
-          <a:p>
-            <a:pPr algn="r">
-              <a:spcAft>
-                <a:spcPts val="0"/>
-              </a:spcAft>
-            </a:pPr>
+            <a:pPr algn="r"/>
             <a:r>
               <a:rPr sz="900" b="0" i="0">
                 <a:solidFill>
@@ -6718,7 +5279,6 @@
           <a:ln>
             <a:noFill/>
           </a:ln>
-          <a:effectLst/>
         </p:spPr>
         <p:style>
           <a:lnRef idx="1">
@@ -6750,19 +5310,18 @@
         </p:nvSpPr>
         <p:spPr>
           <a:xfrm>
-            <a:off x="0" y="0"/>
-            <a:ext cx="164592" cy="960120"/>
+            <a:off x="457200" y="164592"/>
+            <a:ext cx="73152" cy="640080"/>
           </a:xfrm>
           <a:prstGeom prst="rect">
             <a:avLst/>
           </a:prstGeom>
           <a:solidFill>
-            <a:srgbClr val="0D6E6E"/>
+            <a:srgbClr val="C45C26"/>
           </a:solidFill>
           <a:ln>
             <a:noFill/>
           </a:ln>
-          <a:effectLst/>
         </p:spPr>
         <p:style>
           <a:lnRef idx="1">
@@ -6794,8 +5353,8 @@
         </p:nvSpPr>
         <p:spPr>
           <a:xfrm>
-            <a:off x="457200" y="109728"/>
-            <a:ext cx="10972800" cy="256032"/>
+            <a:off x="685800" y="201168"/>
+            <a:ext cx="10972800" cy="594360"/>
           </a:xfrm>
           <a:prstGeom prst="rect">
             <a:avLst/>
@@ -6803,24 +5362,20 @@
           <a:noFill/>
         </p:spPr>
         <p:txBody>
-          <a:bodyPr wrap="square" anchor="t">
+          <a:bodyPr wrap="square">
             <a:spAutoFit/>
           </a:bodyPr>
           <a:lstStyle/>
           <a:p>
-            <a:pPr algn="l">
-              <a:spcAft>
-                <a:spcPts val="0"/>
-              </a:spcAft>
-            </a:pPr>
-            <a:r>
-              <a:rPr sz="1100" b="1" i="0">
-                <a:solidFill>
-                  <a:srgbClr val="C45C26"/>
+            <a:pPr algn="l"/>
+            <a:r>
+              <a:rPr sz="2600" b="1" i="0">
+                <a:solidFill>
+                  <a:srgbClr val="0A1F2E"/>
                 </a:solidFill>
                 <a:latin typeface="Calibri"/>
               </a:rPr>
-              <a:t>DEEP TECHNOLOGY</a:t>
+              <a:t>Ethics</a:t>
             </a:r>
           </a:p>
         </p:txBody>
@@ -6833,8 +5388,8 @@
         </p:nvSpPr>
         <p:spPr>
           <a:xfrm>
-            <a:off x="457200" y="384048"/>
-            <a:ext cx="11247120" cy="475488"/>
+            <a:off x="502920" y="1143000"/>
+            <a:ext cx="11155680" cy="5120640"/>
           </a:xfrm>
           <a:prstGeom prst="rect">
             <a:avLst/>
@@ -6842,806 +5397,46 @@
           <a:noFill/>
         </p:spPr>
         <p:txBody>
-          <a:bodyPr wrap="square" anchor="t">
+          <a:bodyPr wrap="square">
             <a:spAutoFit/>
           </a:bodyPr>
           <a:lstStyle/>
           <a:p>
-            <a:pPr algn="l">
-              <a:spcAft>
-                <a:spcPts val="0"/>
-              </a:spcAft>
-            </a:pPr>
-            <a:r>
-              <a:rPr sz="2200" b="1" i="0">
-                <a:solidFill>
-                  <a:srgbClr val="0A1F2E"/>
+            <a:pPr algn="l"/>
+            <a:r>
+              <a:rPr sz="1800" b="0" i="0">
+                <a:solidFill>
+                  <a:srgbClr val="1E2F38"/>
                 </a:solidFill>
                 <a:latin typeface="Calibri"/>
               </a:rPr>
-              <a:t>Intelligence rooted in African community care</a:t>
-            </a:r>
-          </a:p>
-        </p:txBody>
-      </p:sp>
-      <p:pic>
-        <p:nvPicPr>
-          <p:cNvPr id="6" name="Picture 5" descr="deep_tech_collage_opt.jpg"/>
-          <p:cNvPicPr>
-            <a:picLocks noChangeAspect="1"/>
-          </p:cNvPicPr>
-          <p:nvPr/>
-        </p:nvPicPr>
-        <p:blipFill>
-          <a:blip r:embed="rId2"/>
-          <a:stretch>
-            <a:fillRect/>
-          </a:stretch>
-        </p:blipFill>
-        <p:spPr>
-          <a:xfrm>
-            <a:off x="411480" y="2065630"/>
-            <a:ext cx="5120640" cy="3412540"/>
-          </a:xfrm>
-          <a:prstGeom prst="rect">
-            <a:avLst/>
-          </a:prstGeom>
-        </p:spPr>
-      </p:pic>
-      <p:sp>
-        <p:nvSpPr>
-          <p:cNvPr id="7" name="Rectangle 6"/>
-          <p:cNvSpPr/>
-          <p:nvPr/>
-        </p:nvSpPr>
-        <p:spPr>
-          <a:xfrm>
-            <a:off x="5852160" y="1197864"/>
-            <a:ext cx="5852160" cy="766572"/>
-          </a:xfrm>
-          <a:prstGeom prst="rect">
-            <a:avLst/>
-          </a:prstGeom>
-          <a:solidFill>
-            <a:srgbClr val="FFFFFF"/>
-          </a:solidFill>
-          <a:ln w="9525">
-            <a:solidFill>
-              <a:srgbClr val="D0DCDC"/>
-            </a:solidFill>
-          </a:ln>
-          <a:effectLst/>
-        </p:spPr>
-        <p:style>
-          <a:lnRef idx="1">
-            <a:schemeClr val="accent1"/>
-          </a:lnRef>
-          <a:fillRef idx="3">
-            <a:schemeClr val="accent1"/>
-          </a:fillRef>
-          <a:effectRef idx="2">
-            <a:schemeClr val="accent1"/>
-          </a:effectRef>
-          <a:fontRef idx="minor">
-            <a:schemeClr val="lt1"/>
-          </a:fontRef>
-        </p:style>
-        <p:txBody>
-          <a:bodyPr rtlCol="0" anchor="ctr"/>
-          <a:lstStyle/>
-          <a:p>
-            <a:pPr algn="ctr"/>
-          </a:p>
-        </p:txBody>
-      </p:sp>
-      <p:sp>
-        <p:nvSpPr>
-          <p:cNvPr id="8" name="TextBox 7"/>
-          <p:cNvSpPr txBox="1"/>
-          <p:nvPr/>
-        </p:nvSpPr>
-        <p:spPr>
-          <a:xfrm>
-            <a:off x="6035040" y="1252728"/>
-            <a:ext cx="5486400" cy="274320"/>
-          </a:xfrm>
-          <a:prstGeom prst="rect">
-            <a:avLst/>
-          </a:prstGeom>
-          <a:noFill/>
-        </p:spPr>
-        <p:txBody>
-          <a:bodyPr wrap="square" anchor="t">
-            <a:spAutoFit/>
-          </a:bodyPr>
-          <a:lstStyle/>
-          <a:p>
-            <a:pPr algn="l">
-              <a:spcAft>
-                <a:spcPts val="0"/>
-              </a:spcAft>
-            </a:pPr>
-            <a:r>
-              <a:rPr sz="1400" b="1" i="0">
-                <a:solidFill>
-                  <a:srgbClr val="0D6E6E"/>
+              <a:t>Privacy: Household consent; minimum necessary data; secure storage</a:t>
+            </a:r>
+          </a:p>
+          <a:p>
+            <a:pPr algn="l"/>
+            <a:r>
+              <a:rPr sz="1800" b="0" i="0">
+                <a:solidFill>
+                  <a:srgbClr val="1E2F38"/>
                 </a:solidFill>
                 <a:latin typeface="Calibri"/>
               </a:rPr>
-              <a:t>Artificial Intelligence</a:t>
-            </a:r>
-          </a:p>
-        </p:txBody>
-      </p:sp>
-      <p:sp>
-        <p:nvSpPr>
-          <p:cNvPr id="9" name="TextBox 8"/>
-          <p:cNvSpPr txBox="1"/>
-          <p:nvPr/>
-        </p:nvSpPr>
-        <p:spPr>
-          <a:xfrm>
-            <a:off x="6035040" y="1527048"/>
-            <a:ext cx="5486400" cy="365760"/>
-          </a:xfrm>
-          <a:prstGeom prst="rect">
-            <a:avLst/>
-          </a:prstGeom>
-          <a:noFill/>
-        </p:spPr>
-        <p:txBody>
-          <a:bodyPr wrap="square" anchor="t">
-            <a:spAutoFit/>
-          </a:bodyPr>
-          <a:lstStyle/>
-          <a:p>
-            <a:pPr algn="l">
-              <a:spcAft>
-                <a:spcPts val="0"/>
-              </a:spcAft>
-            </a:pPr>
-            <a:r>
-              <a:rPr sz="1200" b="0" i="0">
-                <a:solidFill>
-                  <a:srgbClr val="3A4A54"/>
-                </a:solidFill>
-                <a:latin typeface="Calibri"/>
-              </a:rPr>
-              <a:t>Outbreak early warning; maternal and NCD risk scoring</a:t>
-            </a:r>
-          </a:p>
-        </p:txBody>
-      </p:sp>
-      <p:sp>
-        <p:nvSpPr>
-          <p:cNvPr id="10" name="Rectangle 9"/>
+              <a:t>Equity: Design for users with low digital literacy and basic phones</a:t>
+            </a:r>
+          </a:p>
+        </p:txBody>
+      </p:sp>
+      <p:sp>
+        <p:nvSpPr>
+          <p:cNvPr id="6" name="Rectangle 5"/>
           <p:cNvSpPr/>
           <p:nvPr/>
         </p:nvSpPr>
         <p:spPr>
           <a:xfrm>
-            <a:off x="5852160" y="2074164"/>
-            <a:ext cx="5852160" cy="766572"/>
-          </a:xfrm>
-          <a:prstGeom prst="rect">
-            <a:avLst/>
-          </a:prstGeom>
-          <a:solidFill>
-            <a:srgbClr val="FFFFFF"/>
-          </a:solidFill>
-          <a:ln w="9525">
-            <a:solidFill>
-              <a:srgbClr val="D0DCDC"/>
-            </a:solidFill>
-          </a:ln>
-          <a:effectLst/>
-        </p:spPr>
-        <p:style>
-          <a:lnRef idx="1">
-            <a:schemeClr val="accent1"/>
-          </a:lnRef>
-          <a:fillRef idx="3">
-            <a:schemeClr val="accent1"/>
-          </a:fillRef>
-          <a:effectRef idx="2">
-            <a:schemeClr val="accent1"/>
-          </a:effectRef>
-          <a:fontRef idx="minor">
-            <a:schemeClr val="lt1"/>
-          </a:fontRef>
-        </p:style>
-        <p:txBody>
-          <a:bodyPr rtlCol="0" anchor="ctr"/>
-          <a:lstStyle/>
-          <a:p>
-            <a:pPr algn="ctr"/>
-          </a:p>
-        </p:txBody>
-      </p:sp>
-      <p:sp>
-        <p:nvSpPr>
-          <p:cNvPr id="11" name="TextBox 10"/>
-          <p:cNvSpPr txBox="1"/>
-          <p:nvPr/>
-        </p:nvSpPr>
-        <p:spPr>
-          <a:xfrm>
-            <a:off x="6035040" y="2129028"/>
-            <a:ext cx="5486400" cy="274320"/>
-          </a:xfrm>
-          <a:prstGeom prst="rect">
-            <a:avLst/>
-          </a:prstGeom>
-          <a:noFill/>
-        </p:spPr>
-        <p:txBody>
-          <a:bodyPr wrap="square" anchor="t">
-            <a:spAutoFit/>
-          </a:bodyPr>
-          <a:lstStyle/>
-          <a:p>
-            <a:pPr algn="l">
-              <a:spcAft>
-                <a:spcPts val="0"/>
-              </a:spcAft>
-            </a:pPr>
-            <a:r>
-              <a:rPr sz="1400" b="1" i="0">
-                <a:solidFill>
-                  <a:srgbClr val="0D6E6E"/>
-                </a:solidFill>
-                <a:latin typeface="Calibri"/>
-              </a:rPr>
-              <a:t>Machine Learning</a:t>
-            </a:r>
-          </a:p>
-        </p:txBody>
-      </p:sp>
-      <p:sp>
-        <p:nvSpPr>
-          <p:cNvPr id="12" name="TextBox 11"/>
-          <p:cNvSpPr txBox="1"/>
-          <p:nvPr/>
-        </p:nvSpPr>
-        <p:spPr>
-          <a:xfrm>
-            <a:off x="6035040" y="2403348"/>
-            <a:ext cx="5486400" cy="365760"/>
-          </a:xfrm>
-          <a:prstGeom prst="rect">
-            <a:avLst/>
-          </a:prstGeom>
-          <a:noFill/>
-        </p:spPr>
-        <p:txBody>
-          <a:bodyPr wrap="square" anchor="t">
-            <a:spAutoFit/>
-          </a:bodyPr>
-          <a:lstStyle/>
-          <a:p>
-            <a:pPr algn="l">
-              <a:spcAft>
-                <a:spcPts val="0"/>
-              </a:spcAft>
-            </a:pPr>
-            <a:r>
-              <a:rPr sz="1200" b="0" i="0">
-                <a:solidFill>
-                  <a:srgbClr val="3A4A54"/>
-                </a:solidFill>
-                <a:latin typeface="Calibri"/>
-              </a:rPr>
-              <a:t>Learn from community patterns, seasons, and outreach outcomes</a:t>
-            </a:r>
-          </a:p>
-        </p:txBody>
-      </p:sp>
-      <p:sp>
-        <p:nvSpPr>
-          <p:cNvPr id="13" name="Rectangle 12"/>
-          <p:cNvSpPr/>
-          <p:nvPr/>
-        </p:nvSpPr>
-        <p:spPr>
-          <a:xfrm>
-            <a:off x="5852160" y="2950464"/>
-            <a:ext cx="5852160" cy="766572"/>
-          </a:xfrm>
-          <a:prstGeom prst="rect">
-            <a:avLst/>
-          </a:prstGeom>
-          <a:solidFill>
-            <a:srgbClr val="FFFFFF"/>
-          </a:solidFill>
-          <a:ln w="9525">
-            <a:solidFill>
-              <a:srgbClr val="D0DCDC"/>
-            </a:solidFill>
-          </a:ln>
-          <a:effectLst/>
-        </p:spPr>
-        <p:style>
-          <a:lnRef idx="1">
-            <a:schemeClr val="accent1"/>
-          </a:lnRef>
-          <a:fillRef idx="3">
-            <a:schemeClr val="accent1"/>
-          </a:fillRef>
-          <a:effectRef idx="2">
-            <a:schemeClr val="accent1"/>
-          </a:effectRef>
-          <a:fontRef idx="minor">
-            <a:schemeClr val="lt1"/>
-          </a:fontRef>
-        </p:style>
-        <p:txBody>
-          <a:bodyPr rtlCol="0" anchor="ctr"/>
-          <a:lstStyle/>
-          <a:p>
-            <a:pPr algn="ctr"/>
-          </a:p>
-        </p:txBody>
-      </p:sp>
-      <p:sp>
-        <p:nvSpPr>
-          <p:cNvPr id="14" name="TextBox 13"/>
-          <p:cNvSpPr txBox="1"/>
-          <p:nvPr/>
-        </p:nvSpPr>
-        <p:spPr>
-          <a:xfrm>
-            <a:off x="6035040" y="3005328"/>
-            <a:ext cx="5486400" cy="274320"/>
-          </a:xfrm>
-          <a:prstGeom prst="rect">
-            <a:avLst/>
-          </a:prstGeom>
-          <a:noFill/>
-        </p:spPr>
-        <p:txBody>
-          <a:bodyPr wrap="square" anchor="t">
-            <a:spAutoFit/>
-          </a:bodyPr>
-          <a:lstStyle/>
-          <a:p>
-            <a:pPr algn="l">
-              <a:spcAft>
-                <a:spcPts val="0"/>
-              </a:spcAft>
-            </a:pPr>
-            <a:r>
-              <a:rPr sz="1400" b="1" i="0">
-                <a:solidFill>
-                  <a:srgbClr val="0D6E6E"/>
-                </a:solidFill>
-                <a:latin typeface="Calibri"/>
-              </a:rPr>
-              <a:t>GIS Mapping</a:t>
-            </a:r>
-          </a:p>
-        </p:txBody>
-      </p:sp>
-      <p:sp>
-        <p:nvSpPr>
-          <p:cNvPr id="15" name="TextBox 14"/>
-          <p:cNvSpPr txBox="1"/>
-          <p:nvPr/>
-        </p:nvSpPr>
-        <p:spPr>
-          <a:xfrm>
-            <a:off x="6035040" y="3279648"/>
-            <a:ext cx="5486400" cy="365760"/>
-          </a:xfrm>
-          <a:prstGeom prst="rect">
-            <a:avLst/>
-          </a:prstGeom>
-          <a:noFill/>
-        </p:spPr>
-        <p:txBody>
-          <a:bodyPr wrap="square" anchor="t">
-            <a:spAutoFit/>
-          </a:bodyPr>
-          <a:lstStyle/>
-          <a:p>
-            <a:pPr algn="l">
-              <a:spcAft>
-                <a:spcPts val="0"/>
-              </a:spcAft>
-            </a:pPr>
-            <a:r>
-              <a:rPr sz="1200" b="0" i="0">
-                <a:solidFill>
-                  <a:srgbClr val="3A4A54"/>
-                </a:solidFill>
-                <a:latin typeface="Calibri"/>
-              </a:rPr>
-              <a:t>Disease distribution, hotspots, and resource gaps</a:t>
-            </a:r>
-          </a:p>
-        </p:txBody>
-      </p:sp>
-      <p:sp>
-        <p:nvSpPr>
-          <p:cNvPr id="16" name="Rectangle 15"/>
-          <p:cNvSpPr/>
-          <p:nvPr/>
-        </p:nvSpPr>
-        <p:spPr>
-          <a:xfrm>
-            <a:off x="5852160" y="3826764"/>
-            <a:ext cx="5852160" cy="766572"/>
-          </a:xfrm>
-          <a:prstGeom prst="rect">
-            <a:avLst/>
-          </a:prstGeom>
-          <a:solidFill>
-            <a:srgbClr val="FFFFFF"/>
-          </a:solidFill>
-          <a:ln w="9525">
-            <a:solidFill>
-              <a:srgbClr val="D0DCDC"/>
-            </a:solidFill>
-          </a:ln>
-          <a:effectLst/>
-        </p:spPr>
-        <p:style>
-          <a:lnRef idx="1">
-            <a:schemeClr val="accent1"/>
-          </a:lnRef>
-          <a:fillRef idx="3">
-            <a:schemeClr val="accent1"/>
-          </a:fillRef>
-          <a:effectRef idx="2">
-            <a:schemeClr val="accent1"/>
-          </a:effectRef>
-          <a:fontRef idx="minor">
-            <a:schemeClr val="lt1"/>
-          </a:fontRef>
-        </p:style>
-        <p:txBody>
-          <a:bodyPr rtlCol="0" anchor="ctr"/>
-          <a:lstStyle/>
-          <a:p>
-            <a:pPr algn="ctr"/>
-          </a:p>
-        </p:txBody>
-      </p:sp>
-      <p:sp>
-        <p:nvSpPr>
-          <p:cNvPr id="17" name="TextBox 16"/>
-          <p:cNvSpPr txBox="1"/>
-          <p:nvPr/>
-        </p:nvSpPr>
-        <p:spPr>
-          <a:xfrm>
-            <a:off x="6035040" y="3881628"/>
-            <a:ext cx="5486400" cy="274320"/>
-          </a:xfrm>
-          <a:prstGeom prst="rect">
-            <a:avLst/>
-          </a:prstGeom>
-          <a:noFill/>
-        </p:spPr>
-        <p:txBody>
-          <a:bodyPr wrap="square" anchor="t">
-            <a:spAutoFit/>
-          </a:bodyPr>
-          <a:lstStyle/>
-          <a:p>
-            <a:pPr algn="l">
-              <a:spcAft>
-                <a:spcPts val="0"/>
-              </a:spcAft>
-            </a:pPr>
-            <a:r>
-              <a:rPr sz="1400" b="1" i="0">
-                <a:solidFill>
-                  <a:srgbClr val="0D6E6E"/>
-                </a:solidFill>
-                <a:latin typeface="Calibri"/>
-              </a:rPr>
-              <a:t>Mobile Data Collection</a:t>
-            </a:r>
-          </a:p>
-        </p:txBody>
-      </p:sp>
-      <p:sp>
-        <p:nvSpPr>
-          <p:cNvPr id="18" name="TextBox 17"/>
-          <p:cNvSpPr txBox="1"/>
-          <p:nvPr/>
-        </p:nvSpPr>
-        <p:spPr>
-          <a:xfrm>
-            <a:off x="6035040" y="4155948"/>
-            <a:ext cx="5486400" cy="365760"/>
-          </a:xfrm>
-          <a:prstGeom prst="rect">
-            <a:avLst/>
-          </a:prstGeom>
-          <a:noFill/>
-        </p:spPr>
-        <p:txBody>
-          <a:bodyPr wrap="square" anchor="t">
-            <a:spAutoFit/>
-          </a:bodyPr>
-          <a:lstStyle/>
-          <a:p>
-            <a:pPr algn="l">
-              <a:spcAft>
-                <a:spcPts val="0"/>
-              </a:spcAft>
-            </a:pPr>
-            <a:r>
-              <a:rPr sz="1200" b="0" i="0">
-                <a:solidFill>
-                  <a:srgbClr val="3A4A54"/>
-                </a:solidFill>
-                <a:latin typeface="Calibri"/>
-              </a:rPr>
-              <a:t>Offline-capable CHW/VHT capture at household level</a:t>
-            </a:r>
-          </a:p>
-        </p:txBody>
-      </p:sp>
-      <p:sp>
-        <p:nvSpPr>
-          <p:cNvPr id="19" name="Rectangle 18"/>
-          <p:cNvSpPr/>
-          <p:nvPr/>
-        </p:nvSpPr>
-        <p:spPr>
-          <a:xfrm>
-            <a:off x="5852160" y="4703064"/>
-            <a:ext cx="5852160" cy="766572"/>
-          </a:xfrm>
-          <a:prstGeom prst="rect">
-            <a:avLst/>
-          </a:prstGeom>
-          <a:solidFill>
-            <a:srgbClr val="FFFFFF"/>
-          </a:solidFill>
-          <a:ln w="9525">
-            <a:solidFill>
-              <a:srgbClr val="D0DCDC"/>
-            </a:solidFill>
-          </a:ln>
-          <a:effectLst/>
-        </p:spPr>
-        <p:style>
-          <a:lnRef idx="1">
-            <a:schemeClr val="accent1"/>
-          </a:lnRef>
-          <a:fillRef idx="3">
-            <a:schemeClr val="accent1"/>
-          </a:fillRef>
-          <a:effectRef idx="2">
-            <a:schemeClr val="accent1"/>
-          </a:effectRef>
-          <a:fontRef idx="minor">
-            <a:schemeClr val="lt1"/>
-          </a:fontRef>
-        </p:style>
-        <p:txBody>
-          <a:bodyPr rtlCol="0" anchor="ctr"/>
-          <a:lstStyle/>
-          <a:p>
-            <a:pPr algn="ctr"/>
-          </a:p>
-        </p:txBody>
-      </p:sp>
-      <p:sp>
-        <p:nvSpPr>
-          <p:cNvPr id="20" name="TextBox 19"/>
-          <p:cNvSpPr txBox="1"/>
-          <p:nvPr/>
-        </p:nvSpPr>
-        <p:spPr>
-          <a:xfrm>
-            <a:off x="6035040" y="4757928"/>
-            <a:ext cx="5486400" cy="274320"/>
-          </a:xfrm>
-          <a:prstGeom prst="rect">
-            <a:avLst/>
-          </a:prstGeom>
-          <a:noFill/>
-        </p:spPr>
-        <p:txBody>
-          <a:bodyPr wrap="square" anchor="t">
-            <a:spAutoFit/>
-          </a:bodyPr>
-          <a:lstStyle/>
-          <a:p>
-            <a:pPr algn="l">
-              <a:spcAft>
-                <a:spcPts val="0"/>
-              </a:spcAft>
-            </a:pPr>
-            <a:r>
-              <a:rPr sz="1400" b="1" i="0">
-                <a:solidFill>
-                  <a:srgbClr val="0D6E6E"/>
-                </a:solidFill>
-                <a:latin typeface="Calibri"/>
-              </a:rPr>
-              <a:t>Cloud Computing</a:t>
-            </a:r>
-          </a:p>
-        </p:txBody>
-      </p:sp>
-      <p:sp>
-        <p:nvSpPr>
-          <p:cNvPr id="21" name="TextBox 20"/>
-          <p:cNvSpPr txBox="1"/>
-          <p:nvPr/>
-        </p:nvSpPr>
-        <p:spPr>
-          <a:xfrm>
-            <a:off x="6035040" y="5032248"/>
-            <a:ext cx="5486400" cy="365760"/>
-          </a:xfrm>
-          <a:prstGeom prst="rect">
-            <a:avLst/>
-          </a:prstGeom>
-          <a:noFill/>
-        </p:spPr>
-        <p:txBody>
-          <a:bodyPr wrap="square" anchor="t">
-            <a:spAutoFit/>
-          </a:bodyPr>
-          <a:lstStyle/>
-          <a:p>
-            <a:pPr algn="l">
-              <a:spcAft>
-                <a:spcPts val="0"/>
-              </a:spcAft>
-            </a:pPr>
-            <a:r>
-              <a:rPr sz="1200" b="0" i="0">
-                <a:solidFill>
-                  <a:srgbClr val="3A4A54"/>
-                </a:solidFill>
-                <a:latin typeface="Calibri"/>
-              </a:rPr>
-              <a:t>Secure sync across facilities and partners</a:t>
-            </a:r>
-          </a:p>
-        </p:txBody>
-      </p:sp>
-      <p:sp>
-        <p:nvSpPr>
-          <p:cNvPr id="22" name="Rectangle 21"/>
-          <p:cNvSpPr/>
-          <p:nvPr/>
-        </p:nvSpPr>
-        <p:spPr>
-          <a:xfrm>
-            <a:off x="5852160" y="5579364"/>
-            <a:ext cx="5852160" cy="766572"/>
-          </a:xfrm>
-          <a:prstGeom prst="rect">
-            <a:avLst/>
-          </a:prstGeom>
-          <a:solidFill>
-            <a:srgbClr val="FFFFFF"/>
-          </a:solidFill>
-          <a:ln w="9525">
-            <a:solidFill>
-              <a:srgbClr val="D0DCDC"/>
-            </a:solidFill>
-          </a:ln>
-          <a:effectLst/>
-        </p:spPr>
-        <p:style>
-          <a:lnRef idx="1">
-            <a:schemeClr val="accent1"/>
-          </a:lnRef>
-          <a:fillRef idx="3">
-            <a:schemeClr val="accent1"/>
-          </a:fillRef>
-          <a:effectRef idx="2">
-            <a:schemeClr val="accent1"/>
-          </a:effectRef>
-          <a:fontRef idx="minor">
-            <a:schemeClr val="lt1"/>
-          </a:fontRef>
-        </p:style>
-        <p:txBody>
-          <a:bodyPr rtlCol="0" anchor="ctr"/>
-          <a:lstStyle/>
-          <a:p>
-            <a:pPr algn="ctr"/>
-          </a:p>
-        </p:txBody>
-      </p:sp>
-      <p:sp>
-        <p:nvSpPr>
-          <p:cNvPr id="23" name="TextBox 22"/>
-          <p:cNvSpPr txBox="1"/>
-          <p:nvPr/>
-        </p:nvSpPr>
-        <p:spPr>
-          <a:xfrm>
-            <a:off x="6035040" y="5634228"/>
-            <a:ext cx="5486400" cy="274320"/>
-          </a:xfrm>
-          <a:prstGeom prst="rect">
-            <a:avLst/>
-          </a:prstGeom>
-          <a:noFill/>
-        </p:spPr>
-        <p:txBody>
-          <a:bodyPr wrap="square" anchor="t">
-            <a:spAutoFit/>
-          </a:bodyPr>
-          <a:lstStyle/>
-          <a:p>
-            <a:pPr algn="l">
-              <a:spcAft>
-                <a:spcPts val="0"/>
-              </a:spcAft>
-            </a:pPr>
-            <a:r>
-              <a:rPr sz="1400" b="1" i="0">
-                <a:solidFill>
-                  <a:srgbClr val="0D6E6E"/>
-                </a:solidFill>
-                <a:latin typeface="Calibri"/>
-              </a:rPr>
-              <a:t>Analytics Dashboards</a:t>
-            </a:r>
-          </a:p>
-        </p:txBody>
-      </p:sp>
-      <p:sp>
-        <p:nvSpPr>
-          <p:cNvPr id="24" name="TextBox 23"/>
-          <p:cNvSpPr txBox="1"/>
-          <p:nvPr/>
-        </p:nvSpPr>
-        <p:spPr>
-          <a:xfrm>
-            <a:off x="6035040" y="5908548"/>
-            <a:ext cx="5486400" cy="365760"/>
-          </a:xfrm>
-          <a:prstGeom prst="rect">
-            <a:avLst/>
-          </a:prstGeom>
-          <a:noFill/>
-        </p:spPr>
-        <p:txBody>
-          <a:bodyPr wrap="square" anchor="t">
-            <a:spAutoFit/>
-          </a:bodyPr>
-          <a:lstStyle/>
-          <a:p>
-            <a:pPr algn="l">
-              <a:spcAft>
-                <a:spcPts val="0"/>
-              </a:spcAft>
-            </a:pPr>
-            <a:r>
-              <a:rPr sz="1200" b="0" i="0">
-                <a:solidFill>
-                  <a:srgbClr val="3A4A54"/>
-                </a:solidFill>
-                <a:latin typeface="Calibri"/>
-              </a:rPr>
-              <a:t>Real-time views for clinics, districts, and NGOs</a:t>
-            </a:r>
-          </a:p>
-        </p:txBody>
-      </p:sp>
-      <p:sp>
-        <p:nvSpPr>
-          <p:cNvPr id="25" name="Rectangle 24"/>
-          <p:cNvSpPr/>
-          <p:nvPr/>
-        </p:nvSpPr>
-        <p:spPr>
-          <a:xfrm>
-            <a:off x="0" y="6565392"/>
-            <a:ext cx="12191695" cy="292608"/>
+            <a:off x="0" y="6583680"/>
+            <a:ext cx="12191695" cy="274320"/>
           </a:xfrm>
           <a:prstGeom prst="rect">
             <a:avLst/>
@@ -7652,7 +5447,6 @@
           <a:ln>
             <a:noFill/>
           </a:ln>
-          <a:effectLst/>
         </p:spPr>
         <p:style>
           <a:lnRef idx="1">
@@ -7678,14 +5472,14 @@
       </p:sp>
       <p:sp>
         <p:nvSpPr>
-          <p:cNvPr id="26" name="TextBox 25"/>
+          <p:cNvPr id="7" name="TextBox 6"/>
           <p:cNvSpPr txBox="1"/>
           <p:nvPr/>
         </p:nvSpPr>
         <p:spPr>
           <a:xfrm>
-            <a:off x="365760" y="6574536"/>
-            <a:ext cx="9144000" cy="274320"/>
+            <a:off x="365760" y="6601968"/>
+            <a:ext cx="10058400" cy="228600"/>
           </a:xfrm>
           <a:prstGeom prst="rect">
             <a:avLst/>
@@ -7693,16 +5487,12 @@
           <a:noFill/>
         </p:spPr>
         <p:txBody>
-          <a:bodyPr wrap="square" anchor="ctr">
+          <a:bodyPr wrap="square">
             <a:spAutoFit/>
           </a:bodyPr>
           <a:lstStyle/>
           <a:p>
-            <a:pPr algn="l">
-              <a:spcAft>
-                <a:spcPts val="0"/>
-              </a:spcAft>
-            </a:pPr>
+            <a:pPr algn="l"/>
             <a:r>
               <a:rPr sz="900" b="0" i="0">
                 <a:solidFill>
@@ -7710,21 +5500,21 @@
                 </a:solidFill>
                 <a:latin typeface="Calibri"/>
               </a:rPr>
-              <a:t>FairBanks FCHIP  |  Brandtech Group AI for Good Scholarship   |  Your health, our mission.</a:t>
-            </a:r>
-          </a:p>
-        </p:txBody>
-      </p:sp>
-      <p:sp>
-        <p:nvSpPr>
-          <p:cNvPr id="27" name="TextBox 26"/>
+              <a:t>FairBanks FCHIP  |  OYW Cape Town 2026  |  Your health, our mission.</a:t>
+            </a:r>
+          </a:p>
+        </p:txBody>
+      </p:sp>
+      <p:sp>
+        <p:nvSpPr>
+          <p:cNvPr id="8" name="TextBox 7"/>
           <p:cNvSpPr txBox="1"/>
           <p:nvPr/>
         </p:nvSpPr>
         <p:spPr>
           <a:xfrm>
-            <a:off x="11094415" y="6574536"/>
-            <a:ext cx="731520" cy="274320"/>
+            <a:off x="11368735" y="6601968"/>
+            <a:ext cx="548640" cy="228600"/>
           </a:xfrm>
           <a:prstGeom prst="rect">
             <a:avLst/>
@@ -7732,16 +5522,12 @@
           <a:noFill/>
         </p:spPr>
         <p:txBody>
-          <a:bodyPr wrap="square" anchor="ctr">
+          <a:bodyPr wrap="square">
             <a:spAutoFit/>
           </a:bodyPr>
           <a:lstStyle/>
           <a:p>
-            <a:pPr algn="r">
-              <a:spcAft>
-                <a:spcPts val="0"/>
-              </a:spcAft>
-            </a:pPr>
+            <a:pPr algn="r"/>
             <a:r>
               <a:rPr sz="900" b="0" i="0">
                 <a:solidFill>
@@ -7781,316 +5567,7 @@
         <p:spPr>
           <a:xfrm>
             <a:off x="0" y="0"/>
-            <a:ext cx="12191695" cy="960120"/>
-          </a:xfrm>
-          <a:prstGeom prst="rect">
-            <a:avLst/>
-          </a:prstGeom>
-          <a:solidFill>
-            <a:srgbClr val="F7F5F0"/>
-          </a:solidFill>
-          <a:ln>
-            <a:noFill/>
-          </a:ln>
-          <a:effectLst/>
-        </p:spPr>
-        <p:style>
-          <a:lnRef idx="1">
-            <a:schemeClr val="accent1"/>
-          </a:lnRef>
-          <a:fillRef idx="3">
-            <a:schemeClr val="accent1"/>
-          </a:fillRef>
-          <a:effectRef idx="2">
-            <a:schemeClr val="accent1"/>
-          </a:effectRef>
-          <a:fontRef idx="minor">
-            <a:schemeClr val="lt1"/>
-          </a:fontRef>
-        </p:style>
-        <p:txBody>
-          <a:bodyPr rtlCol="0" anchor="ctr"/>
-          <a:lstStyle/>
-          <a:p>
-            <a:pPr algn="ctr"/>
-          </a:p>
-        </p:txBody>
-      </p:sp>
-      <p:sp>
-        <p:nvSpPr>
-          <p:cNvPr id="3" name="Rectangle 2"/>
-          <p:cNvSpPr/>
-          <p:nvPr/>
-        </p:nvSpPr>
-        <p:spPr>
-          <a:xfrm>
-            <a:off x="0" y="0"/>
-            <a:ext cx="164592" cy="960120"/>
-          </a:xfrm>
-          <a:prstGeom prst="rect">
-            <a:avLst/>
-          </a:prstGeom>
-          <a:solidFill>
-            <a:srgbClr val="0D6E6E"/>
-          </a:solidFill>
-          <a:ln>
-            <a:noFill/>
-          </a:ln>
-          <a:effectLst/>
-        </p:spPr>
-        <p:style>
-          <a:lnRef idx="1">
-            <a:schemeClr val="accent1"/>
-          </a:lnRef>
-          <a:fillRef idx="3">
-            <a:schemeClr val="accent1"/>
-          </a:fillRef>
-          <a:effectRef idx="2">
-            <a:schemeClr val="accent1"/>
-          </a:effectRef>
-          <a:fontRef idx="minor">
-            <a:schemeClr val="lt1"/>
-          </a:fontRef>
-        </p:style>
-        <p:txBody>
-          <a:bodyPr rtlCol="0" anchor="ctr"/>
-          <a:lstStyle/>
-          <a:p>
-            <a:pPr algn="ctr"/>
-          </a:p>
-        </p:txBody>
-      </p:sp>
-      <p:sp>
-        <p:nvSpPr>
-          <p:cNvPr id="4" name="TextBox 3"/>
-          <p:cNvSpPr txBox="1"/>
-          <p:nvPr/>
-        </p:nvSpPr>
-        <p:spPr>
-          <a:xfrm>
-            <a:off x="457200" y="109728"/>
-            <a:ext cx="10972800" cy="256032"/>
-          </a:xfrm>
-          <a:prstGeom prst="rect">
-            <a:avLst/>
-          </a:prstGeom>
-          <a:noFill/>
-        </p:spPr>
-        <p:txBody>
-          <a:bodyPr wrap="square" anchor="t">
-            <a:spAutoFit/>
-          </a:bodyPr>
-          <a:lstStyle/>
-          <a:p>
-            <a:pPr algn="l">
-              <a:spcAft>
-                <a:spcPts val="0"/>
-              </a:spcAft>
-            </a:pPr>
-            <a:r>
-              <a:rPr sz="1100" b="1" i="0">
-                <a:solidFill>
-                  <a:srgbClr val="C45C26"/>
-                </a:solidFill>
-                <a:latin typeface="Calibri"/>
-              </a:rPr>
-              <a:t>OUR MODEL</a:t>
-            </a:r>
-          </a:p>
-        </p:txBody>
-      </p:sp>
-      <p:sp>
-        <p:nvSpPr>
-          <p:cNvPr id="5" name="TextBox 4"/>
-          <p:cNvSpPr txBox="1"/>
-          <p:nvPr/>
-        </p:nvSpPr>
-        <p:spPr>
-          <a:xfrm>
-            <a:off x="457200" y="384048"/>
-            <a:ext cx="11247120" cy="475488"/>
-          </a:xfrm>
-          <a:prstGeom prst="rect">
-            <a:avLst/>
-          </a:prstGeom>
-          <a:noFill/>
-        </p:spPr>
-        <p:txBody>
-          <a:bodyPr wrap="square" anchor="t">
-            <a:spAutoFit/>
-          </a:bodyPr>
-          <a:lstStyle/>
-          <a:p>
-            <a:pPr algn="l">
-              <a:spcAft>
-                <a:spcPts val="0"/>
-              </a:spcAft>
-            </a:pPr>
-            <a:r>
-              <a:rPr sz="2200" b="1" i="0">
-                <a:solidFill>
-                  <a:srgbClr val="0A1F2E"/>
-                </a:solidFill>
-                <a:latin typeface="Calibri"/>
-              </a:rPr>
-              <a:t>Communities first — intelligence that serves care</a:t>
-            </a:r>
-          </a:p>
-        </p:txBody>
-      </p:sp>
-      <p:sp>
-        <p:nvSpPr>
-          <p:cNvPr id="6" name="TextBox 5"/>
-          <p:cNvSpPr txBox="1"/>
-          <p:nvPr/>
-        </p:nvSpPr>
-        <p:spPr>
-          <a:xfrm>
-            <a:off x="502920" y="1234440"/>
-            <a:ext cx="5760720" cy="5074920"/>
-          </a:xfrm>
-          <a:prstGeom prst="rect">
-            <a:avLst/>
-          </a:prstGeom>
-          <a:noFill/>
-        </p:spPr>
-        <p:txBody>
-          <a:bodyPr wrap="square">
-            <a:spAutoFit/>
-          </a:bodyPr>
-          <a:lstStyle/>
-          <a:p>
-            <a:pPr>
-              <a:spcAft>
-                <a:spcPts val="800"/>
-              </a:spcAft>
-            </a:pPr>
-            <a:r>
-              <a:rPr sz="1400">
-                <a:solidFill>
-                  <a:srgbClr val="1E2F38"/>
-                </a:solidFill>
-                <a:latin typeface="Calibri"/>
-              </a:rPr>
-              <a:t>•  Community members identify needs and own solutions</a:t>
-            </a:r>
-          </a:p>
-          <a:p>
-            <a:pPr>
-              <a:spcAft>
-                <a:spcPts val="800"/>
-              </a:spcAft>
-            </a:pPr>
-            <a:r>
-              <a:rPr sz="1400">
-                <a:solidFill>
-                  <a:srgbClr val="1E2F38"/>
-                </a:solidFill>
-                <a:latin typeface="Calibri"/>
-              </a:rPr>
-              <a:t>•  CHWs / VHTs bridge homes to clinics</a:t>
-            </a:r>
-          </a:p>
-          <a:p>
-            <a:pPr>
-              <a:spcAft>
-                <a:spcPts val="800"/>
-              </a:spcAft>
-            </a:pPr>
-            <a:r>
-              <a:rPr sz="1400">
-                <a:solidFill>
-                  <a:srgbClr val="1E2F38"/>
-                </a:solidFill>
-                <a:latin typeface="Calibri"/>
-              </a:rPr>
-              <a:t>•  FairBanks Community Reach programmes deliver outreach</a:t>
-            </a:r>
-          </a:p>
-          <a:p>
-            <a:pPr>
-              <a:spcAft>
-                <a:spcPts val="800"/>
-              </a:spcAft>
-            </a:pPr>
-            <a:r>
-              <a:rPr sz="1400">
-                <a:solidFill>
-                  <a:srgbClr val="1E2F38"/>
-                </a:solidFill>
-                <a:latin typeface="Calibri"/>
-              </a:rPr>
-              <a:t>•  FairBanks Medical Centre provides clinical care</a:t>
-            </a:r>
-          </a:p>
-          <a:p>
-            <a:pPr>
-              <a:spcAft>
-                <a:spcPts val="800"/>
-              </a:spcAft>
-            </a:pPr>
-            <a:r>
-              <a:rPr sz="1400">
-                <a:solidFill>
-                  <a:srgbClr val="1E2F38"/>
-                </a:solidFill>
-                <a:latin typeface="Calibri"/>
-              </a:rPr>
-              <a:t>•  Research, partnerships, and skills strengthen the system</a:t>
-            </a:r>
-          </a:p>
-          <a:p>
-            <a:pPr>
-              <a:spcAft>
-                <a:spcPts val="800"/>
-              </a:spcAft>
-            </a:pPr>
-            <a:r>
-              <a:rPr sz="1400">
-                <a:solidFill>
-                  <a:srgbClr val="1E2F38"/>
-                </a:solidFill>
-                <a:latin typeface="Calibri"/>
-              </a:rPr>
-              <a:t>•  Livelihoods and empowerment make health gains last</a:t>
-            </a:r>
-          </a:p>
-        </p:txBody>
-      </p:sp>
-      <p:pic>
-        <p:nvPicPr>
-          <p:cNvPr id="7" name="Picture 6" descr="gis_hotspots_opt.jpg"/>
-          <p:cNvPicPr>
-            <a:picLocks noChangeAspect="1"/>
-          </p:cNvPicPr>
-          <p:nvPr/>
-        </p:nvPicPr>
-        <p:blipFill>
-          <a:blip r:embed="rId2"/>
-          <a:stretch>
-            <a:fillRect/>
-          </a:stretch>
-        </p:blipFill>
-        <p:spPr>
-          <a:xfrm>
-            <a:off x="6492240" y="2035160"/>
-            <a:ext cx="5212080" cy="3473479"/>
-          </a:xfrm>
-          <a:prstGeom prst="rect">
-            <a:avLst/>
-          </a:prstGeom>
-        </p:spPr>
-      </p:pic>
-      <p:sp>
-        <p:nvSpPr>
-          <p:cNvPr id="8" name="Rectangle 7"/>
-          <p:cNvSpPr/>
-          <p:nvPr/>
-        </p:nvSpPr>
-        <p:spPr>
-          <a:xfrm>
-            <a:off x="0" y="6565392"/>
-            <a:ext cx="12191695" cy="292608"/>
+            <a:ext cx="12191695" cy="6858000"/>
           </a:xfrm>
           <a:prstGeom prst="rect">
             <a:avLst/>
@@ -8101,7 +5578,6 @@
           <a:ln>
             <a:noFill/>
           </a:ln>
-          <a:effectLst/>
         </p:spPr>
         <p:style>
           <a:lnRef idx="1">
@@ -8127,14 +5603,14 @@
       </p:sp>
       <p:sp>
         <p:nvSpPr>
-          <p:cNvPr id="9" name="TextBox 8"/>
+          <p:cNvPr id="3" name="TextBox 2"/>
           <p:cNvSpPr txBox="1"/>
           <p:nvPr/>
         </p:nvSpPr>
         <p:spPr>
           <a:xfrm>
-            <a:off x="365760" y="6574536"/>
-            <a:ext cx="9144000" cy="274320"/>
+            <a:off x="548640" y="2011680"/>
+            <a:ext cx="11064240" cy="1097280"/>
           </a:xfrm>
           <a:prstGeom prst="rect">
             <a:avLst/>
@@ -8142,38 +5618,58 @@
           <a:noFill/>
         </p:spPr>
         <p:txBody>
-          <a:bodyPr wrap="square" anchor="ctr">
+          <a:bodyPr wrap="square">
             <a:spAutoFit/>
           </a:bodyPr>
           <a:lstStyle/>
           <a:p>
-            <a:pPr algn="l">
-              <a:spcAft>
-                <a:spcPts val="0"/>
-              </a:spcAft>
-            </a:pPr>
-            <a:r>
-              <a:rPr sz="900" b="0" i="0">
+            <a:pPr algn="ctr"/>
+            <a:r>
+              <a:rPr sz="3200" b="1" i="0">
                 <a:solidFill>
                   <a:srgbClr val="FFFFFF"/>
                 </a:solidFill>
                 <a:latin typeface="Calibri"/>
               </a:rPr>
-              <a:t>FairBanks FCHIP  |  Brandtech Group AI for Good Scholarship   |  Your health, our mission.</a:t>
-            </a:r>
-          </a:p>
-        </p:txBody>
-      </p:sp>
-      <p:sp>
-        <p:nvSpPr>
-          <p:cNvPr id="10" name="TextBox 9"/>
+              <a:t>Communities first.</a:t>
+            </a:r>
+          </a:p>
+          <a:p>
+            <a:pPr algn="ctr"/>
+            <a:r>
+              <a:rPr sz="3200" b="1" i="0">
+                <a:solidFill>
+                  <a:srgbClr val="FFFFFF"/>
+                </a:solidFill>
+                <a:latin typeface="Calibri"/>
+              </a:rPr>
+              <a:t>AI second.</a:t>
+            </a:r>
+          </a:p>
+          <a:p>
+            <a:pPr algn="ctr"/>
+            <a:r>
+              <a:rPr sz="3200" b="1" i="0">
+                <a:solidFill>
+                  <a:srgbClr val="FFFFFF"/>
+                </a:solidFill>
+                <a:latin typeface="Calibri"/>
+              </a:rPr>
+              <a:t>Impact always.</a:t>
+            </a:r>
+          </a:p>
+        </p:txBody>
+      </p:sp>
+      <p:sp>
+        <p:nvSpPr>
+          <p:cNvPr id="4" name="TextBox 3"/>
           <p:cNvSpPr txBox="1"/>
           <p:nvPr/>
         </p:nvSpPr>
         <p:spPr>
           <a:xfrm>
-            <a:off x="11094415" y="6574536"/>
-            <a:ext cx="731520" cy="274320"/>
+            <a:off x="548640" y="3657600"/>
+            <a:ext cx="11064240" cy="457200"/>
           </a:xfrm>
           <a:prstGeom prst="rect">
             <a:avLst/>
@@ -8181,16 +5677,125 @@
           <a:noFill/>
         </p:spPr>
         <p:txBody>
-          <a:bodyPr wrap="square" anchor="ctr">
+          <a:bodyPr wrap="square">
             <a:spAutoFit/>
           </a:bodyPr>
           <a:lstStyle/>
           <a:p>
-            <a:pPr algn="r">
-              <a:spcAft>
-                <a:spcPts val="0"/>
-              </a:spcAft>
-            </a:pPr>
+            <a:pPr algn="ctr"/>
+            <a:r>
+              <a:rPr sz="1800" b="1" i="1">
+                <a:solidFill>
+                  <a:srgbClr val="C45C26"/>
+                </a:solidFill>
+                <a:latin typeface="Calibri"/>
+              </a:rPr>
+              <a:t>Your health, our mission.</a:t>
+            </a:r>
+          </a:p>
+        </p:txBody>
+      </p:sp>
+      <p:sp>
+        <p:nvSpPr>
+          <p:cNvPr id="5" name="Rectangle 4"/>
+          <p:cNvSpPr/>
+          <p:nvPr/>
+        </p:nvSpPr>
+        <p:spPr>
+          <a:xfrm>
+            <a:off x="0" y="6583680"/>
+            <a:ext cx="12191695" cy="274320"/>
+          </a:xfrm>
+          <a:prstGeom prst="rect">
+            <a:avLst/>
+          </a:prstGeom>
+          <a:solidFill>
+            <a:srgbClr val="0A1F2E"/>
+          </a:solidFill>
+          <a:ln>
+            <a:noFill/>
+          </a:ln>
+        </p:spPr>
+        <p:style>
+          <a:lnRef idx="1">
+            <a:schemeClr val="accent1"/>
+          </a:lnRef>
+          <a:fillRef idx="3">
+            <a:schemeClr val="accent1"/>
+          </a:fillRef>
+          <a:effectRef idx="2">
+            <a:schemeClr val="accent1"/>
+          </a:effectRef>
+          <a:fontRef idx="minor">
+            <a:schemeClr val="lt1"/>
+          </a:fontRef>
+        </p:style>
+        <p:txBody>
+          <a:bodyPr rtlCol="0" anchor="ctr"/>
+          <a:lstStyle/>
+          <a:p>
+            <a:pPr algn="ctr"/>
+          </a:p>
+        </p:txBody>
+      </p:sp>
+      <p:sp>
+        <p:nvSpPr>
+          <p:cNvPr id="6" name="TextBox 5"/>
+          <p:cNvSpPr txBox="1"/>
+          <p:nvPr/>
+        </p:nvSpPr>
+        <p:spPr>
+          <a:xfrm>
+            <a:off x="365760" y="6601968"/>
+            <a:ext cx="10058400" cy="228600"/>
+          </a:xfrm>
+          <a:prstGeom prst="rect">
+            <a:avLst/>
+          </a:prstGeom>
+          <a:noFill/>
+        </p:spPr>
+        <p:txBody>
+          <a:bodyPr wrap="square">
+            <a:spAutoFit/>
+          </a:bodyPr>
+          <a:lstStyle/>
+          <a:p>
+            <a:pPr algn="l"/>
+            <a:r>
+              <a:rPr sz="900" b="0" i="0">
+                <a:solidFill>
+                  <a:srgbClr val="FFFFFF"/>
+                </a:solidFill>
+                <a:latin typeface="Calibri"/>
+              </a:rPr>
+              <a:t>FairBanks FCHIP  |  OYW Cape Town 2026  |  Your health, our mission.</a:t>
+            </a:r>
+          </a:p>
+        </p:txBody>
+      </p:sp>
+      <p:sp>
+        <p:nvSpPr>
+          <p:cNvPr id="7" name="TextBox 6"/>
+          <p:cNvSpPr txBox="1"/>
+          <p:nvPr/>
+        </p:nvSpPr>
+        <p:spPr>
+          <a:xfrm>
+            <a:off x="11368735" y="6601968"/>
+            <a:ext cx="548640" cy="228600"/>
+          </a:xfrm>
+          <a:prstGeom prst="rect">
+            <a:avLst/>
+          </a:prstGeom>
+          <a:noFill/>
+        </p:spPr>
+        <p:txBody>
+          <a:bodyPr wrap="square">
+            <a:spAutoFit/>
+          </a:bodyPr>
+          <a:lstStyle/>
+          <a:p>
+            <a:pPr algn="r"/>
             <a:r>
               <a:rPr sz="900" b="0" i="0">
                 <a:solidFill>

--- a/applications/oyw/documents/oyw_ppt.pptx
+++ b/applications/oyw/documents/oyw_ppt.pptx
@@ -3207,7 +3207,7 @@
         <p:spPr>
           <a:xfrm>
             <a:off x="502920" y="4572000"/>
-            <a:ext cx="10972800" cy="685800"/>
+            <a:ext cx="10972800" cy="548640"/>
           </a:xfrm>
           <a:prstGeom prst="rect">
             <a:avLst/>
@@ -3222,7 +3222,7 @@
           <a:p>
             <a:pPr algn="l"/>
             <a:r>
-              <a:rPr sz="2400" b="1" i="0">
+              <a:rPr sz="2200" b="1" i="0">
                 <a:solidFill>
                   <a:srgbClr val="FFFFFF"/>
                 </a:solidFill>
@@ -3241,8 +3241,8 @@
         </p:nvSpPr>
         <p:spPr>
           <a:xfrm>
-            <a:off x="502920" y="5440680"/>
-            <a:ext cx="10972800" cy="411480"/>
+            <a:off x="502920" y="5120640"/>
+            <a:ext cx="10972800" cy="320040"/>
           </a:xfrm>
           <a:prstGeom prst="rect">
             <a:avLst/>
@@ -3257,9 +3257,44 @@
           <a:p>
             <a:pPr algn="l"/>
             <a:r>
-              <a:rPr sz="1400" b="0" i="1">
+              <a:rPr sz="1300" b="1" i="1">
                 <a:solidFill>
                   <a:srgbClr val="F2C79B"/>
+                </a:solidFill>
+                <a:latin typeface="Calibri"/>
+              </a:rPr>
+              <a:t>FairBanks Community Health Intelligence Platform (FCHIP)</a:t>
+            </a:r>
+          </a:p>
+        </p:txBody>
+      </p:sp>
+      <p:sp>
+        <p:nvSpPr>
+          <p:cNvPr id="7" name="TextBox 6"/>
+          <p:cNvSpPr txBox="1"/>
+          <p:nvPr/>
+        </p:nvSpPr>
+        <p:spPr>
+          <a:xfrm>
+            <a:off x="502920" y="5532120"/>
+            <a:ext cx="10972800" cy="320040"/>
+          </a:xfrm>
+          <a:prstGeom prst="rect">
+            <a:avLst/>
+          </a:prstGeom>
+          <a:noFill/>
+        </p:spPr>
+        <p:txBody>
+          <a:bodyPr wrap="square">
+            <a:spAutoFit/>
+          </a:bodyPr>
+          <a:lstStyle/>
+          <a:p>
+            <a:pPr algn="l"/>
+            <a:r>
+              <a:rPr sz="1200" b="0" i="1">
+                <a:solidFill>
+                  <a:srgbClr val="D0E8E8"/>
                 </a:solidFill>
                 <a:latin typeface="Calibri"/>
               </a:rPr>
@@ -3270,7 +3305,7 @@
       </p:sp>
       <p:sp>
         <p:nvSpPr>
-          <p:cNvPr id="7" name="TextBox 6"/>
+          <p:cNvPr id="8" name="TextBox 7"/>
           <p:cNvSpPr txBox="1"/>
           <p:nvPr/>
         </p:nvSpPr>

--- a/applications/oyw/documents/oyw_ppt.pptx
+++ b/applications/oyw/documents/oyw_ppt.pptx
@@ -3185,7 +3185,17 @@
           </a:bodyPr>
           <a:lstStyle/>
           <a:p>
-            <a:pPr algn="l"/>
+            <a:pPr algn="l">
+              <a:lnSpc>
+                <a:spcPct val="115000"/>
+              </a:lnSpc>
+              <a:spcBef>
+                <a:spcPts val="0"/>
+              </a:spcBef>
+              <a:spcAft>
+                <a:spcPts val="200"/>
+              </a:spcAft>
+            </a:pPr>
             <a:r>
               <a:rPr sz="1200" b="1" i="0">
                 <a:solidFill>
@@ -3220,7 +3230,17 @@
           </a:bodyPr>
           <a:lstStyle/>
           <a:p>
-            <a:pPr algn="l"/>
+            <a:pPr algn="l">
+              <a:lnSpc>
+                <a:spcPct val="115000"/>
+              </a:lnSpc>
+              <a:spcBef>
+                <a:spcPts val="0"/>
+              </a:spcBef>
+              <a:spcAft>
+                <a:spcPts val="200"/>
+              </a:spcAft>
+            </a:pPr>
             <a:r>
               <a:rPr sz="2200" b="1" i="0">
                 <a:solidFill>
@@ -3255,7 +3275,17 @@
           </a:bodyPr>
           <a:lstStyle/>
           <a:p>
-            <a:pPr algn="l"/>
+            <a:pPr algn="l">
+              <a:lnSpc>
+                <a:spcPct val="115000"/>
+              </a:lnSpc>
+              <a:spcBef>
+                <a:spcPts val="0"/>
+              </a:spcBef>
+              <a:spcAft>
+                <a:spcPts val="200"/>
+              </a:spcAft>
+            </a:pPr>
             <a:r>
               <a:rPr sz="1300" b="1" i="1">
                 <a:solidFill>
@@ -3290,7 +3320,17 @@
           </a:bodyPr>
           <a:lstStyle/>
           <a:p>
-            <a:pPr algn="l"/>
+            <a:pPr algn="l">
+              <a:lnSpc>
+                <a:spcPct val="115000"/>
+              </a:lnSpc>
+              <a:spcBef>
+                <a:spcPts val="0"/>
+              </a:spcBef>
+              <a:spcAft>
+                <a:spcPts val="200"/>
+              </a:spcAft>
+            </a:pPr>
             <a:r>
               <a:rPr sz="1200" b="0" i="1">
                 <a:solidFill>
@@ -3325,7 +3365,17 @@
           </a:bodyPr>
           <a:lstStyle/>
           <a:p>
-            <a:pPr algn="l"/>
+            <a:pPr algn="l">
+              <a:lnSpc>
+                <a:spcPct val="115000"/>
+              </a:lnSpc>
+              <a:spcBef>
+                <a:spcPts val="0"/>
+              </a:spcBef>
+              <a:spcAft>
+                <a:spcPts val="200"/>
+              </a:spcAft>
+            </a:pPr>
             <a:r>
               <a:rPr sz="1300" b="1" i="0">
                 <a:solidFill>
@@ -3464,7 +3514,17 @@
           </a:bodyPr>
           <a:lstStyle/>
           <a:p>
-            <a:pPr algn="l"/>
+            <a:pPr algn="l">
+              <a:lnSpc>
+                <a:spcPct val="115000"/>
+              </a:lnSpc>
+              <a:spcBef>
+                <a:spcPts val="0"/>
+              </a:spcBef>
+              <a:spcAft>
+                <a:spcPts val="200"/>
+              </a:spcAft>
+            </a:pPr>
             <a:r>
               <a:rPr sz="2600" b="1" i="0">
                 <a:solidFill>
@@ -3523,9 +3583,19 @@
           </a:bodyPr>
           <a:lstStyle/>
           <a:p>
-            <a:pPr algn="l"/>
-            <a:r>
-              <a:rPr sz="1500" b="0" i="0">
+            <a:pPr algn="l">
+              <a:lnSpc>
+                <a:spcPct val="128000"/>
+              </a:lnSpc>
+              <a:spcBef>
+                <a:spcPts val="0"/>
+              </a:spcBef>
+              <a:spcAft>
+                <a:spcPts val="200"/>
+              </a:spcAft>
+            </a:pPr>
+            <a:r>
+              <a:rPr sz="2600" b="0" i="0">
                 <a:solidFill>
                   <a:srgbClr val="1E2F38"/>
                 </a:solidFill>
@@ -3601,7 +3671,17 @@
           </a:bodyPr>
           <a:lstStyle/>
           <a:p>
-            <a:pPr algn="l"/>
+            <a:pPr algn="l">
+              <a:lnSpc>
+                <a:spcPct val="115000"/>
+              </a:lnSpc>
+              <a:spcBef>
+                <a:spcPts val="0"/>
+              </a:spcBef>
+              <a:spcAft>
+                <a:spcPts val="200"/>
+              </a:spcAft>
+            </a:pPr>
             <a:r>
               <a:rPr sz="900" b="0" i="0">
                 <a:solidFill>
@@ -3636,7 +3716,17 @@
           </a:bodyPr>
           <a:lstStyle/>
           <a:p>
-            <a:pPr algn="r"/>
+            <a:pPr algn="r">
+              <a:lnSpc>
+                <a:spcPct val="115000"/>
+              </a:lnSpc>
+              <a:spcBef>
+                <a:spcPts val="0"/>
+              </a:spcBef>
+              <a:spcAft>
+                <a:spcPts val="200"/>
+              </a:spcAft>
+            </a:pPr>
             <a:r>
               <a:rPr sz="900" b="0" i="0">
                 <a:solidFill>
@@ -3775,7 +3865,17 @@
           </a:bodyPr>
           <a:lstStyle/>
           <a:p>
-            <a:pPr algn="l"/>
+            <a:pPr algn="l">
+              <a:lnSpc>
+                <a:spcPct val="115000"/>
+              </a:lnSpc>
+              <a:spcBef>
+                <a:spcPts val="0"/>
+              </a:spcBef>
+              <a:spcAft>
+                <a:spcPts val="200"/>
+              </a:spcAft>
+            </a:pPr>
             <a:r>
               <a:rPr sz="2600" b="1" i="0">
                 <a:solidFill>
@@ -3834,9 +3934,19 @@
           </a:bodyPr>
           <a:lstStyle/>
           <a:p>
-            <a:pPr algn="l"/>
-            <a:r>
-              <a:rPr sz="1500" b="0" i="0">
+            <a:pPr algn="l">
+              <a:lnSpc>
+                <a:spcPct val="128000"/>
+              </a:lnSpc>
+              <a:spcBef>
+                <a:spcPts val="0"/>
+              </a:spcBef>
+              <a:spcAft>
+                <a:spcPts val="200"/>
+              </a:spcAft>
+            </a:pPr>
+            <a:r>
+              <a:rPr sz="2600" b="0" i="0">
                 <a:solidFill>
                   <a:srgbClr val="1E2F38"/>
                 </a:solidFill>
@@ -3912,7 +4022,17 @@
           </a:bodyPr>
           <a:lstStyle/>
           <a:p>
-            <a:pPr algn="l"/>
+            <a:pPr algn="l">
+              <a:lnSpc>
+                <a:spcPct val="115000"/>
+              </a:lnSpc>
+              <a:spcBef>
+                <a:spcPts val="0"/>
+              </a:spcBef>
+              <a:spcAft>
+                <a:spcPts val="200"/>
+              </a:spcAft>
+            </a:pPr>
             <a:r>
               <a:rPr sz="900" b="0" i="0">
                 <a:solidFill>
@@ -3947,7 +4067,17 @@
           </a:bodyPr>
           <a:lstStyle/>
           <a:p>
-            <a:pPr algn="r"/>
+            <a:pPr algn="r">
+              <a:lnSpc>
+                <a:spcPct val="115000"/>
+              </a:lnSpc>
+              <a:spcBef>
+                <a:spcPts val="0"/>
+              </a:spcBef>
+              <a:spcAft>
+                <a:spcPts val="200"/>
+              </a:spcAft>
+            </a:pPr>
             <a:r>
               <a:rPr sz="900" b="0" i="0">
                 <a:solidFill>
@@ -4086,7 +4216,17 @@
           </a:bodyPr>
           <a:lstStyle/>
           <a:p>
-            <a:pPr algn="l"/>
+            <a:pPr algn="l">
+              <a:lnSpc>
+                <a:spcPct val="115000"/>
+              </a:lnSpc>
+              <a:spcBef>
+                <a:spcPts val="0"/>
+              </a:spcBef>
+              <a:spcAft>
+                <a:spcPts val="200"/>
+              </a:spcAft>
+            </a:pPr>
             <a:r>
               <a:rPr sz="2600" b="1" i="0">
                 <a:solidFill>
@@ -4145,9 +4285,19 @@
           </a:bodyPr>
           <a:lstStyle/>
           <a:p>
-            <a:pPr algn="l"/>
-            <a:r>
-              <a:rPr sz="1500" b="0" i="0">
+            <a:pPr algn="l">
+              <a:lnSpc>
+                <a:spcPct val="128000"/>
+              </a:lnSpc>
+              <a:spcBef>
+                <a:spcPts val="0"/>
+              </a:spcBef>
+              <a:spcAft>
+                <a:spcPts val="1400"/>
+              </a:spcAft>
+            </a:pPr>
+            <a:r>
+              <a:rPr sz="2600" b="0" i="0">
                 <a:solidFill>
                   <a:srgbClr val="1E2F38"/>
                 </a:solidFill>
@@ -4157,9 +4307,19 @@
             </a:r>
           </a:p>
           <a:p>
-            <a:pPr algn="l"/>
-            <a:r>
-              <a:rPr sz="1500" b="0" i="0">
+            <a:pPr algn="l">
+              <a:lnSpc>
+                <a:spcPct val="128000"/>
+              </a:lnSpc>
+              <a:spcBef>
+                <a:spcPts val="0"/>
+              </a:spcBef>
+              <a:spcAft>
+                <a:spcPts val="1400"/>
+              </a:spcAft>
+            </a:pPr>
+            <a:r>
+              <a:rPr sz="2600" b="0" i="0">
                 <a:solidFill>
                   <a:srgbClr val="1E2F38"/>
                 </a:solidFill>
@@ -4169,9 +4329,19 @@
             </a:r>
           </a:p>
           <a:p>
-            <a:pPr algn="l"/>
-            <a:r>
-              <a:rPr sz="1500" b="0" i="0">
+            <a:pPr algn="l">
+              <a:lnSpc>
+                <a:spcPct val="128000"/>
+              </a:lnSpc>
+              <a:spcBef>
+                <a:spcPts val="0"/>
+              </a:spcBef>
+              <a:spcAft>
+                <a:spcPts val="1400"/>
+              </a:spcAft>
+            </a:pPr>
+            <a:r>
+              <a:rPr sz="2600" b="0" i="0">
                 <a:solidFill>
                   <a:srgbClr val="1E2F38"/>
                 </a:solidFill>
@@ -4181,9 +4351,19 @@
             </a:r>
           </a:p>
           <a:p>
-            <a:pPr algn="l"/>
-            <a:r>
-              <a:rPr sz="1500" b="0" i="0">
+            <a:pPr algn="l">
+              <a:lnSpc>
+                <a:spcPct val="128000"/>
+              </a:lnSpc>
+              <a:spcBef>
+                <a:spcPts val="0"/>
+              </a:spcBef>
+              <a:spcAft>
+                <a:spcPts val="200"/>
+              </a:spcAft>
+            </a:pPr>
+            <a:r>
+              <a:rPr sz="2600" b="0" i="0">
                 <a:solidFill>
                   <a:srgbClr val="1E2F38"/>
                 </a:solidFill>
@@ -4259,7 +4439,17 @@
           </a:bodyPr>
           <a:lstStyle/>
           <a:p>
-            <a:pPr algn="l"/>
+            <a:pPr algn="l">
+              <a:lnSpc>
+                <a:spcPct val="115000"/>
+              </a:lnSpc>
+              <a:spcBef>
+                <a:spcPts val="0"/>
+              </a:spcBef>
+              <a:spcAft>
+                <a:spcPts val="200"/>
+              </a:spcAft>
+            </a:pPr>
             <a:r>
               <a:rPr sz="900" b="0" i="0">
                 <a:solidFill>
@@ -4294,7 +4484,17 @@
           </a:bodyPr>
           <a:lstStyle/>
           <a:p>
-            <a:pPr algn="r"/>
+            <a:pPr algn="r">
+              <a:lnSpc>
+                <a:spcPct val="115000"/>
+              </a:lnSpc>
+              <a:spcBef>
+                <a:spcPts val="0"/>
+              </a:spcBef>
+              <a:spcAft>
+                <a:spcPts val="200"/>
+              </a:spcAft>
+            </a:pPr>
             <a:r>
               <a:rPr sz="900" b="0" i="0">
                 <a:solidFill>
@@ -4433,7 +4633,17 @@
           </a:bodyPr>
           <a:lstStyle/>
           <a:p>
-            <a:pPr algn="l"/>
+            <a:pPr algn="l">
+              <a:lnSpc>
+                <a:spcPct val="115000"/>
+              </a:lnSpc>
+              <a:spcBef>
+                <a:spcPts val="0"/>
+              </a:spcBef>
+              <a:spcAft>
+                <a:spcPts val="200"/>
+              </a:spcAft>
+            </a:pPr>
             <a:r>
               <a:rPr sz="2600" b="1" i="0">
                 <a:solidFill>
@@ -4492,9 +4702,19 @@
           </a:bodyPr>
           <a:lstStyle/>
           <a:p>
-            <a:pPr algn="l"/>
-            <a:r>
-              <a:rPr sz="1500" b="0" i="0">
+            <a:pPr algn="l">
+              <a:lnSpc>
+                <a:spcPct val="128000"/>
+              </a:lnSpc>
+              <a:spcBef>
+                <a:spcPts val="0"/>
+              </a:spcBef>
+              <a:spcAft>
+                <a:spcPts val="200"/>
+              </a:spcAft>
+            </a:pPr>
+            <a:r>
+              <a:rPr sz="2600" b="0" i="0">
                 <a:solidFill>
                   <a:srgbClr val="1E2F38"/>
                 </a:solidFill>
@@ -4570,7 +4790,17 @@
           </a:bodyPr>
           <a:lstStyle/>
           <a:p>
-            <a:pPr algn="l"/>
+            <a:pPr algn="l">
+              <a:lnSpc>
+                <a:spcPct val="115000"/>
+              </a:lnSpc>
+              <a:spcBef>
+                <a:spcPts val="0"/>
+              </a:spcBef>
+              <a:spcAft>
+                <a:spcPts val="200"/>
+              </a:spcAft>
+            </a:pPr>
             <a:r>
               <a:rPr sz="900" b="0" i="0">
                 <a:solidFill>
@@ -4605,7 +4835,17 @@
           </a:bodyPr>
           <a:lstStyle/>
           <a:p>
-            <a:pPr algn="r"/>
+            <a:pPr algn="r">
+              <a:lnSpc>
+                <a:spcPct val="115000"/>
+              </a:lnSpc>
+              <a:spcBef>
+                <a:spcPts val="0"/>
+              </a:spcBef>
+              <a:spcAft>
+                <a:spcPts val="200"/>
+              </a:spcAft>
+            </a:pPr>
             <a:r>
               <a:rPr sz="900" b="0" i="0">
                 <a:solidFill>
@@ -4744,7 +4984,17 @@
           </a:bodyPr>
           <a:lstStyle/>
           <a:p>
-            <a:pPr algn="l"/>
+            <a:pPr algn="l">
+              <a:lnSpc>
+                <a:spcPct val="115000"/>
+              </a:lnSpc>
+              <a:spcBef>
+                <a:spcPts val="0"/>
+              </a:spcBef>
+              <a:spcAft>
+                <a:spcPts val="200"/>
+              </a:spcAft>
+            </a:pPr>
             <a:r>
               <a:rPr sz="2600" b="1" i="0">
                 <a:solidFill>
@@ -4803,9 +5053,19 @@
           </a:bodyPr>
           <a:lstStyle/>
           <a:p>
-            <a:pPr algn="l"/>
-            <a:r>
-              <a:rPr sz="1500" b="0" i="0">
+            <a:pPr algn="l">
+              <a:lnSpc>
+                <a:spcPct val="128000"/>
+              </a:lnSpc>
+              <a:spcBef>
+                <a:spcPts val="0"/>
+              </a:spcBef>
+              <a:spcAft>
+                <a:spcPts val="1400"/>
+              </a:spcAft>
+            </a:pPr>
+            <a:r>
+              <a:rPr sz="2600" b="0" i="0">
                 <a:solidFill>
                   <a:srgbClr val="1E2F38"/>
                 </a:solidFill>
@@ -4815,9 +5075,19 @@
             </a:r>
           </a:p>
           <a:p>
-            <a:pPr algn="l"/>
-            <a:r>
-              <a:rPr sz="1500" b="0" i="0">
+            <a:pPr algn="l">
+              <a:lnSpc>
+                <a:spcPct val="128000"/>
+              </a:lnSpc>
+              <a:spcBef>
+                <a:spcPts val="0"/>
+              </a:spcBef>
+              <a:spcAft>
+                <a:spcPts val="1400"/>
+              </a:spcAft>
+            </a:pPr>
+            <a:r>
+              <a:rPr sz="2600" b="0" i="0">
                 <a:solidFill>
                   <a:srgbClr val="1E2F38"/>
                 </a:solidFill>
@@ -4827,9 +5097,19 @@
             </a:r>
           </a:p>
           <a:p>
-            <a:pPr algn="l"/>
-            <a:r>
-              <a:rPr sz="1500" b="0" i="0">
+            <a:pPr algn="l">
+              <a:lnSpc>
+                <a:spcPct val="128000"/>
+              </a:lnSpc>
+              <a:spcBef>
+                <a:spcPts val="0"/>
+              </a:spcBef>
+              <a:spcAft>
+                <a:spcPts val="1400"/>
+              </a:spcAft>
+            </a:pPr>
+            <a:r>
+              <a:rPr sz="2600" b="0" i="0">
                 <a:solidFill>
                   <a:srgbClr val="1E2F38"/>
                 </a:solidFill>
@@ -4839,9 +5119,19 @@
             </a:r>
           </a:p>
           <a:p>
-            <a:pPr algn="l"/>
-            <a:r>
-              <a:rPr sz="1500" b="0" i="0">
+            <a:pPr algn="l">
+              <a:lnSpc>
+                <a:spcPct val="128000"/>
+              </a:lnSpc>
+              <a:spcBef>
+                <a:spcPts val="0"/>
+              </a:spcBef>
+              <a:spcAft>
+                <a:spcPts val="200"/>
+              </a:spcAft>
+            </a:pPr>
+            <a:r>
+              <a:rPr sz="2600" b="0" i="0">
                 <a:solidFill>
                   <a:srgbClr val="1E2F38"/>
                 </a:solidFill>
@@ -4917,7 +5207,17 @@
           </a:bodyPr>
           <a:lstStyle/>
           <a:p>
-            <a:pPr algn="l"/>
+            <a:pPr algn="l">
+              <a:lnSpc>
+                <a:spcPct val="115000"/>
+              </a:lnSpc>
+              <a:spcBef>
+                <a:spcPts val="0"/>
+              </a:spcBef>
+              <a:spcAft>
+                <a:spcPts val="200"/>
+              </a:spcAft>
+            </a:pPr>
             <a:r>
               <a:rPr sz="900" b="0" i="0">
                 <a:solidFill>
@@ -4952,7 +5252,17 @@
           </a:bodyPr>
           <a:lstStyle/>
           <a:p>
-            <a:pPr algn="r"/>
+            <a:pPr algn="r">
+              <a:lnSpc>
+                <a:spcPct val="115000"/>
+              </a:lnSpc>
+              <a:spcBef>
+                <a:spcPts val="0"/>
+              </a:spcBef>
+              <a:spcAft>
+                <a:spcPts val="200"/>
+              </a:spcAft>
+            </a:pPr>
             <a:r>
               <a:rPr sz="900" b="0" i="0">
                 <a:solidFill>
@@ -5091,7 +5401,17 @@
           </a:bodyPr>
           <a:lstStyle/>
           <a:p>
-            <a:pPr algn="l"/>
+            <a:pPr algn="l">
+              <a:lnSpc>
+                <a:spcPct val="115000"/>
+              </a:lnSpc>
+              <a:spcBef>
+                <a:spcPts val="0"/>
+              </a:spcBef>
+              <a:spcAft>
+                <a:spcPts val="200"/>
+              </a:spcAft>
+            </a:pPr>
             <a:r>
               <a:rPr sz="2600" b="1" i="0">
                 <a:solidFill>
@@ -5150,9 +5470,19 @@
           </a:bodyPr>
           <a:lstStyle/>
           <a:p>
-            <a:pPr algn="l"/>
-            <a:r>
-              <a:rPr sz="1500" b="0" i="0">
+            <a:pPr algn="l">
+              <a:lnSpc>
+                <a:spcPct val="128000"/>
+              </a:lnSpc>
+              <a:spcBef>
+                <a:spcPts val="0"/>
+              </a:spcBef>
+              <a:spcAft>
+                <a:spcPts val="200"/>
+              </a:spcAft>
+            </a:pPr>
+            <a:r>
+              <a:rPr sz="2600" b="0" i="0">
                 <a:solidFill>
                   <a:srgbClr val="1E2F38"/>
                 </a:solidFill>
@@ -5228,7 +5558,17 @@
           </a:bodyPr>
           <a:lstStyle/>
           <a:p>
-            <a:pPr algn="l"/>
+            <a:pPr algn="l">
+              <a:lnSpc>
+                <a:spcPct val="115000"/>
+              </a:lnSpc>
+              <a:spcBef>
+                <a:spcPts val="0"/>
+              </a:spcBef>
+              <a:spcAft>
+                <a:spcPts val="200"/>
+              </a:spcAft>
+            </a:pPr>
             <a:r>
               <a:rPr sz="900" b="0" i="0">
                 <a:solidFill>
@@ -5263,7 +5603,17 @@
           </a:bodyPr>
           <a:lstStyle/>
           <a:p>
-            <a:pPr algn="r"/>
+            <a:pPr algn="r">
+              <a:lnSpc>
+                <a:spcPct val="115000"/>
+              </a:lnSpc>
+              <a:spcBef>
+                <a:spcPts val="0"/>
+              </a:spcBef>
+              <a:spcAft>
+                <a:spcPts val="200"/>
+              </a:spcAft>
+            </a:pPr>
             <a:r>
               <a:rPr sz="900" b="0" i="0">
                 <a:solidFill>
@@ -5402,7 +5752,17 @@
           </a:bodyPr>
           <a:lstStyle/>
           <a:p>
-            <a:pPr algn="l"/>
+            <a:pPr algn="l">
+              <a:lnSpc>
+                <a:spcPct val="115000"/>
+              </a:lnSpc>
+              <a:spcBef>
+                <a:spcPts val="0"/>
+              </a:spcBef>
+              <a:spcAft>
+                <a:spcPts val="200"/>
+              </a:spcAft>
+            </a:pPr>
             <a:r>
               <a:rPr sz="2600" b="1" i="0">
                 <a:solidFill>
@@ -5437,9 +5797,19 @@
           </a:bodyPr>
           <a:lstStyle/>
           <a:p>
-            <a:pPr algn="l"/>
-            <a:r>
-              <a:rPr sz="1800" b="0" i="0">
+            <a:pPr algn="l">
+              <a:lnSpc>
+                <a:spcPct val="128000"/>
+              </a:lnSpc>
+              <a:spcBef>
+                <a:spcPts val="0"/>
+              </a:spcBef>
+              <a:spcAft>
+                <a:spcPts val="1400"/>
+              </a:spcAft>
+            </a:pPr>
+            <a:r>
+              <a:rPr sz="2600" b="0" i="0">
                 <a:solidFill>
                   <a:srgbClr val="1E2F38"/>
                 </a:solidFill>
@@ -5449,9 +5819,19 @@
             </a:r>
           </a:p>
           <a:p>
-            <a:pPr algn="l"/>
-            <a:r>
-              <a:rPr sz="1800" b="0" i="0">
+            <a:pPr algn="l">
+              <a:lnSpc>
+                <a:spcPct val="128000"/>
+              </a:lnSpc>
+              <a:spcBef>
+                <a:spcPts val="0"/>
+              </a:spcBef>
+              <a:spcAft>
+                <a:spcPts val="200"/>
+              </a:spcAft>
+            </a:pPr>
+            <a:r>
+              <a:rPr sz="2600" b="0" i="0">
                 <a:solidFill>
                   <a:srgbClr val="1E2F38"/>
                 </a:solidFill>
@@ -5527,7 +5907,17 @@
           </a:bodyPr>
           <a:lstStyle/>
           <a:p>
-            <a:pPr algn="l"/>
+            <a:pPr algn="l">
+              <a:lnSpc>
+                <a:spcPct val="115000"/>
+              </a:lnSpc>
+              <a:spcBef>
+                <a:spcPts val="0"/>
+              </a:spcBef>
+              <a:spcAft>
+                <a:spcPts val="200"/>
+              </a:spcAft>
+            </a:pPr>
             <a:r>
               <a:rPr sz="900" b="0" i="0">
                 <a:solidFill>
@@ -5562,7 +5952,17 @@
           </a:bodyPr>
           <a:lstStyle/>
           <a:p>
-            <a:pPr algn="r"/>
+            <a:pPr algn="r">
+              <a:lnSpc>
+                <a:spcPct val="115000"/>
+              </a:lnSpc>
+              <a:spcBef>
+                <a:spcPts val="0"/>
+              </a:spcBef>
+              <a:spcAft>
+                <a:spcPts val="200"/>
+              </a:spcAft>
+            </a:pPr>
             <a:r>
               <a:rPr sz="900" b="0" i="0">
                 <a:solidFill>
@@ -5658,7 +6058,17 @@
           </a:bodyPr>
           <a:lstStyle/>
           <a:p>
-            <a:pPr algn="ctr"/>
+            <a:pPr algn="ctr">
+              <a:lnSpc>
+                <a:spcPct val="115000"/>
+              </a:lnSpc>
+              <a:spcBef>
+                <a:spcPts val="0"/>
+              </a:spcBef>
+              <a:spcAft>
+                <a:spcPts val="200"/>
+              </a:spcAft>
+            </a:pPr>
             <a:r>
               <a:rPr sz="3200" b="1" i="0">
                 <a:solidFill>
@@ -5670,7 +6080,17 @@
             </a:r>
           </a:p>
           <a:p>
-            <a:pPr algn="ctr"/>
+            <a:pPr algn="ctr">
+              <a:lnSpc>
+                <a:spcPct val="115000"/>
+              </a:lnSpc>
+              <a:spcBef>
+                <a:spcPts val="0"/>
+              </a:spcBef>
+              <a:spcAft>
+                <a:spcPts val="200"/>
+              </a:spcAft>
+            </a:pPr>
             <a:r>
               <a:rPr sz="3200" b="1" i="0">
                 <a:solidFill>
@@ -5682,7 +6102,17 @@
             </a:r>
           </a:p>
           <a:p>
-            <a:pPr algn="ctr"/>
+            <a:pPr algn="ctr">
+              <a:lnSpc>
+                <a:spcPct val="115000"/>
+              </a:lnSpc>
+              <a:spcBef>
+                <a:spcPts val="0"/>
+              </a:spcBef>
+              <a:spcAft>
+                <a:spcPts val="200"/>
+              </a:spcAft>
+            </a:pPr>
             <a:r>
               <a:rPr sz="3200" b="1" i="0">
                 <a:solidFill>
@@ -5717,7 +6147,17 @@
           </a:bodyPr>
           <a:lstStyle/>
           <a:p>
-            <a:pPr algn="ctr"/>
+            <a:pPr algn="ctr">
+              <a:lnSpc>
+                <a:spcPct val="115000"/>
+              </a:lnSpc>
+              <a:spcBef>
+                <a:spcPts val="0"/>
+              </a:spcBef>
+              <a:spcAft>
+                <a:spcPts val="200"/>
+              </a:spcAft>
+            </a:pPr>
             <a:r>
               <a:rPr sz="1800" b="1" i="1">
                 <a:solidFill>
@@ -5795,7 +6235,17 @@
           </a:bodyPr>
           <a:lstStyle/>
           <a:p>
-            <a:pPr algn="l"/>
+            <a:pPr algn="l">
+              <a:lnSpc>
+                <a:spcPct val="115000"/>
+              </a:lnSpc>
+              <a:spcBef>
+                <a:spcPts val="0"/>
+              </a:spcBef>
+              <a:spcAft>
+                <a:spcPts val="200"/>
+              </a:spcAft>
+            </a:pPr>
             <a:r>
               <a:rPr sz="900" b="0" i="0">
                 <a:solidFill>
@@ -5830,7 +6280,17 @@
           </a:bodyPr>
           <a:lstStyle/>
           <a:p>
-            <a:pPr algn="r"/>
+            <a:pPr algn="r">
+              <a:lnSpc>
+                <a:spcPct val="115000"/>
+              </a:lnSpc>
+              <a:spcBef>
+                <a:spcPts val="0"/>
+              </a:spcBef>
+              <a:spcAft>
+                <a:spcPts val="200"/>
+              </a:spcAft>
+            </a:pPr>
             <a:r>
               <a:rPr sz="900" b="0" i="0">
                 <a:solidFill>

--- a/applications/oyw/documents/oyw_ppt.pptx
+++ b/applications/oyw/documents/oyw_ppt.pptx
@@ -3393,6 +3393,96 @@
   <p:clrMapOvr>
     <a:masterClrMapping/>
   </p:clrMapOvr>
+  <p:timing>
+    <p:tnLst>
+      <p:par>
+        <p:cTn id="1" dur="indefinite" restart="never" nodeType="tmRoot">
+          <p:childTnLst>
+            <p:seq concurrent="true" nextAc="seek">
+              <p:cTn id="2" dur="indefinite" nodeType="mainSeq">
+                <p:childTnLst>
+                  <p:par>
+                    <p:cTn id="9" fill="hold">
+                      <p:stCondLst>
+                        <p:cond delay="0"/>
+                      </p:stCondLst>
+                      <p:childTnLst>
+                        <p:par>
+                          <p:cTn id="3" presetID="10" presetClass="entr" presetSubtype="0" fill="hold" nodeType="withEffect">
+                            <p:stCondLst>
+                              <p:cond delay="0"/>
+                            </p:stCondLst>
+                            <p:childTnLst>
+                              <p:animEffect transition="in" filter="fade">
+                                <p:cBhvr>
+                                  <p:cTn id="4" dur="450"/>
+                                  <p:tgtEl>
+                                    <p:spTgt spid="2"/>
+                                  </p:tgtEl>
+                                </p:cBhvr>
+                              </p:animEffect>
+                            </p:childTnLst>
+                          </p:cTn>
+                        </p:par>
+                        <p:par>
+                          <p:cTn id="5" presetID="10" presetClass="entr" presetSubtype="0" fill="hold" nodeType="withEffect">
+                            <p:stCondLst>
+                              <p:cond delay="200"/>
+                            </p:stCondLst>
+                            <p:childTnLst>
+                              <p:animEffect transition="in" filter="fade">
+                                <p:cBhvr>
+                                  <p:cTn id="6" dur="450"/>
+                                  <p:tgtEl>
+                                    <p:spTgt spid="3"/>
+                                  </p:tgtEl>
+                                </p:cBhvr>
+                              </p:animEffect>
+                            </p:childTnLst>
+                          </p:cTn>
+                        </p:par>
+                        <p:par>
+                          <p:cTn id="7" presetID="10" presetClass="entr" presetSubtype="0" fill="hold" nodeType="withEffect">
+                            <p:stCondLst>
+                              <p:cond delay="200"/>
+                            </p:stCondLst>
+                            <p:childTnLst>
+                              <p:animEffect transition="in" filter="fade">
+                                <p:cBhvr>
+                                  <p:cTn id="8" dur="450"/>
+                                  <p:tgtEl>
+                                    <p:spTgt spid="4"/>
+                                  </p:tgtEl>
+                                </p:cBhvr>
+                              </p:animEffect>
+                            </p:childTnLst>
+                          </p:cTn>
+                        </p:par>
+                      </p:childTnLst>
+                    </p:cTn>
+                  </p:par>
+                </p:childTnLst>
+              </p:cTn>
+              <p:prevCondLst>
+                <p:cond evt="onPrev" delay="0">
+                  <p:tgtEl>
+                    <p:sldTgt/>
+                  </p:tgtEl>
+                </p:cond>
+              </p:prevCondLst>
+              <p:nextCondLst>
+                <p:cond evt="onNext" delay="0">
+                  <p:tgtEl>
+                    <p:sldTgt/>
+                  </p:tgtEl>
+                </p:cond>
+              </p:nextCondLst>
+            </p:seq>
+          </p:childTnLst>
+        </p:cTn>
+      </p:par>
+    </p:tnLst>
+  </p:timing>
 </p:sld>
 </file>
 
@@ -3744,6 +3834,96 @@
   <p:clrMapOvr>
     <a:masterClrMapping/>
   </p:clrMapOvr>
+  <p:timing>
+    <p:tnLst>
+      <p:par>
+        <p:cTn id="1" dur="indefinite" restart="never" nodeType="tmRoot">
+          <p:childTnLst>
+            <p:seq concurrent="true" nextAc="seek">
+              <p:cTn id="2" dur="indefinite" nodeType="mainSeq">
+                <p:childTnLst>
+                  <p:par>
+                    <p:cTn id="9" fill="hold">
+                      <p:stCondLst>
+                        <p:cond delay="0"/>
+                      </p:stCondLst>
+                      <p:childTnLst>
+                        <p:par>
+                          <p:cTn id="3" presetID="10" presetClass="entr" presetSubtype="0" fill="hold" nodeType="withEffect">
+                            <p:stCondLst>
+                              <p:cond delay="0"/>
+                            </p:stCondLst>
+                            <p:childTnLst>
+                              <p:animEffect transition="in" filter="fade">
+                                <p:cBhvr>
+                                  <p:cTn id="4" dur="450"/>
+                                  <p:tgtEl>
+                                    <p:spTgt spid="2"/>
+                                  </p:tgtEl>
+                                </p:cBhvr>
+                              </p:animEffect>
+                            </p:childTnLst>
+                          </p:cTn>
+                        </p:par>
+                        <p:par>
+                          <p:cTn id="5" presetID="10" presetClass="entr" presetSubtype="0" fill="hold" nodeType="withEffect">
+                            <p:stCondLst>
+                              <p:cond delay="200"/>
+                            </p:stCondLst>
+                            <p:childTnLst>
+                              <p:animEffect transition="in" filter="fade">
+                                <p:cBhvr>
+                                  <p:cTn id="6" dur="450"/>
+                                  <p:tgtEl>
+                                    <p:spTgt spid="3"/>
+                                  </p:tgtEl>
+                                </p:cBhvr>
+                              </p:animEffect>
+                            </p:childTnLst>
+                          </p:cTn>
+                        </p:par>
+                        <p:par>
+                          <p:cTn id="7" presetID="10" presetClass="entr" presetSubtype="0" fill="hold" nodeType="withEffect">
+                            <p:stCondLst>
+                              <p:cond delay="200"/>
+                            </p:stCondLst>
+                            <p:childTnLst>
+                              <p:animEffect transition="in" filter="fade">
+                                <p:cBhvr>
+                                  <p:cTn id="8" dur="450"/>
+                                  <p:tgtEl>
+                                    <p:spTgt spid="4"/>
+                                  </p:tgtEl>
+                                </p:cBhvr>
+                              </p:animEffect>
+                            </p:childTnLst>
+                          </p:cTn>
+                        </p:par>
+                      </p:childTnLst>
+                    </p:cTn>
+                  </p:par>
+                </p:childTnLst>
+              </p:cTn>
+              <p:prevCondLst>
+                <p:cond evt="onPrev" delay="0">
+                  <p:tgtEl>
+                    <p:sldTgt/>
+                  </p:tgtEl>
+                </p:cond>
+              </p:prevCondLst>
+              <p:nextCondLst>
+                <p:cond evt="onNext" delay="0">
+                  <p:tgtEl>
+                    <p:sldTgt/>
+                  </p:tgtEl>
+                </p:cond>
+              </p:nextCondLst>
+            </p:seq>
+          </p:childTnLst>
+        </p:cTn>
+      </p:par>
+    </p:tnLst>
+  </p:timing>
 </p:sld>
 </file>
 
@@ -4095,6 +4275,96 @@
   <p:clrMapOvr>
     <a:masterClrMapping/>
   </p:clrMapOvr>
+  <p:timing>
+    <p:tnLst>
+      <p:par>
+        <p:cTn id="1" dur="indefinite" restart="never" nodeType="tmRoot">
+          <p:childTnLst>
+            <p:seq concurrent="true" nextAc="seek">
+              <p:cTn id="2" dur="indefinite" nodeType="mainSeq">
+                <p:childTnLst>
+                  <p:par>
+                    <p:cTn id="9" fill="hold">
+                      <p:stCondLst>
+                        <p:cond delay="0"/>
+                      </p:stCondLst>
+                      <p:childTnLst>
+                        <p:par>
+                          <p:cTn id="3" presetID="10" presetClass="entr" presetSubtype="0" fill="hold" nodeType="withEffect">
+                            <p:stCondLst>
+                              <p:cond delay="0"/>
+                            </p:stCondLst>
+                            <p:childTnLst>
+                              <p:animEffect transition="in" filter="fade">
+                                <p:cBhvr>
+                                  <p:cTn id="4" dur="450"/>
+                                  <p:tgtEl>
+                                    <p:spTgt spid="2"/>
+                                  </p:tgtEl>
+                                </p:cBhvr>
+                              </p:animEffect>
+                            </p:childTnLst>
+                          </p:cTn>
+                        </p:par>
+                        <p:par>
+                          <p:cTn id="5" presetID="10" presetClass="entr" presetSubtype="0" fill="hold" nodeType="withEffect">
+                            <p:stCondLst>
+                              <p:cond delay="200"/>
+                            </p:stCondLst>
+                            <p:childTnLst>
+                              <p:animEffect transition="in" filter="fade">
+                                <p:cBhvr>
+                                  <p:cTn id="6" dur="450"/>
+                                  <p:tgtEl>
+                                    <p:spTgt spid="3"/>
+                                  </p:tgtEl>
+                                </p:cBhvr>
+                              </p:animEffect>
+                            </p:childTnLst>
+                          </p:cTn>
+                        </p:par>
+                        <p:par>
+                          <p:cTn id="7" presetID="10" presetClass="entr" presetSubtype="0" fill="hold" nodeType="withEffect">
+                            <p:stCondLst>
+                              <p:cond delay="200"/>
+                            </p:stCondLst>
+                            <p:childTnLst>
+                              <p:animEffect transition="in" filter="fade">
+                                <p:cBhvr>
+                                  <p:cTn id="8" dur="450"/>
+                                  <p:tgtEl>
+                                    <p:spTgt spid="4"/>
+                                  </p:tgtEl>
+                                </p:cBhvr>
+                              </p:animEffect>
+                            </p:childTnLst>
+                          </p:cTn>
+                        </p:par>
+                      </p:childTnLst>
+                    </p:cTn>
+                  </p:par>
+                </p:childTnLst>
+              </p:cTn>
+              <p:prevCondLst>
+                <p:cond evt="onPrev" delay="0">
+                  <p:tgtEl>
+                    <p:sldTgt/>
+                  </p:tgtEl>
+                </p:cond>
+              </p:prevCondLst>
+              <p:nextCondLst>
+                <p:cond evt="onNext" delay="0">
+                  <p:tgtEl>
+                    <p:sldTgt/>
+                  </p:tgtEl>
+                </p:cond>
+              </p:nextCondLst>
+            </p:seq>
+          </p:childTnLst>
+        </p:cTn>
+      </p:par>
+    </p:tnLst>
+  </p:timing>
 </p:sld>
 </file>
 
@@ -4512,6 +4782,96 @@
   <p:clrMapOvr>
     <a:masterClrMapping/>
   </p:clrMapOvr>
+  <p:timing>
+    <p:tnLst>
+      <p:par>
+        <p:cTn id="1" dur="indefinite" restart="never" nodeType="tmRoot">
+          <p:childTnLst>
+            <p:seq concurrent="true" nextAc="seek">
+              <p:cTn id="2" dur="indefinite" nodeType="mainSeq">
+                <p:childTnLst>
+                  <p:par>
+                    <p:cTn id="9" fill="hold">
+                      <p:stCondLst>
+                        <p:cond delay="0"/>
+                      </p:stCondLst>
+                      <p:childTnLst>
+                        <p:par>
+                          <p:cTn id="3" presetID="10" presetClass="entr" presetSubtype="0" fill="hold" nodeType="withEffect">
+                            <p:stCondLst>
+                              <p:cond delay="0"/>
+                            </p:stCondLst>
+                            <p:childTnLst>
+                              <p:animEffect transition="in" filter="fade">
+                                <p:cBhvr>
+                                  <p:cTn id="4" dur="450"/>
+                                  <p:tgtEl>
+                                    <p:spTgt spid="2"/>
+                                  </p:tgtEl>
+                                </p:cBhvr>
+                              </p:animEffect>
+                            </p:childTnLst>
+                          </p:cTn>
+                        </p:par>
+                        <p:par>
+                          <p:cTn id="5" presetID="10" presetClass="entr" presetSubtype="0" fill="hold" nodeType="withEffect">
+                            <p:stCondLst>
+                              <p:cond delay="200"/>
+                            </p:stCondLst>
+                            <p:childTnLst>
+                              <p:animEffect transition="in" filter="fade">
+                                <p:cBhvr>
+                                  <p:cTn id="6" dur="450"/>
+                                  <p:tgtEl>
+                                    <p:spTgt spid="3"/>
+                                  </p:tgtEl>
+                                </p:cBhvr>
+                              </p:animEffect>
+                            </p:childTnLst>
+                          </p:cTn>
+                        </p:par>
+                        <p:par>
+                          <p:cTn id="7" presetID="10" presetClass="entr" presetSubtype="0" fill="hold" nodeType="withEffect">
+                            <p:stCondLst>
+                              <p:cond delay="200"/>
+                            </p:stCondLst>
+                            <p:childTnLst>
+                              <p:animEffect transition="in" filter="fade">
+                                <p:cBhvr>
+                                  <p:cTn id="8" dur="450"/>
+                                  <p:tgtEl>
+                                    <p:spTgt spid="4"/>
+                                  </p:tgtEl>
+                                </p:cBhvr>
+                              </p:animEffect>
+                            </p:childTnLst>
+                          </p:cTn>
+                        </p:par>
+                      </p:childTnLst>
+                    </p:cTn>
+                  </p:par>
+                </p:childTnLst>
+              </p:cTn>
+              <p:prevCondLst>
+                <p:cond evt="onPrev" delay="0">
+                  <p:tgtEl>
+                    <p:sldTgt/>
+                  </p:tgtEl>
+                </p:cond>
+              </p:prevCondLst>
+              <p:nextCondLst>
+                <p:cond evt="onNext" delay="0">
+                  <p:tgtEl>
+                    <p:sldTgt/>
+                  </p:tgtEl>
+                </p:cond>
+              </p:nextCondLst>
+            </p:seq>
+          </p:childTnLst>
+        </p:cTn>
+      </p:par>
+    </p:tnLst>
+  </p:timing>
 </p:sld>
 </file>
 
@@ -4863,6 +5223,96 @@
   <p:clrMapOvr>
     <a:masterClrMapping/>
   </p:clrMapOvr>
+  <p:timing>
+    <p:tnLst>
+      <p:par>
+        <p:cTn id="1" dur="indefinite" restart="never" nodeType="tmRoot">
+          <p:childTnLst>
+            <p:seq concurrent="true" nextAc="seek">
+              <p:cTn id="2" dur="indefinite" nodeType="mainSeq">
+                <p:childTnLst>
+                  <p:par>
+                    <p:cTn id="9" fill="hold">
+                      <p:stCondLst>
+                        <p:cond delay="0"/>
+                      </p:stCondLst>
+                      <p:childTnLst>
+                        <p:par>
+                          <p:cTn id="3" presetID="10" presetClass="entr" presetSubtype="0" fill="hold" nodeType="withEffect">
+                            <p:stCondLst>
+                              <p:cond delay="0"/>
+                            </p:stCondLst>
+                            <p:childTnLst>
+                              <p:animEffect transition="in" filter="fade">
+                                <p:cBhvr>
+                                  <p:cTn id="4" dur="450"/>
+                                  <p:tgtEl>
+                                    <p:spTgt spid="2"/>
+                                  </p:tgtEl>
+                                </p:cBhvr>
+                              </p:animEffect>
+                            </p:childTnLst>
+                          </p:cTn>
+                        </p:par>
+                        <p:par>
+                          <p:cTn id="5" presetID="10" presetClass="entr" presetSubtype="0" fill="hold" nodeType="withEffect">
+                            <p:stCondLst>
+                              <p:cond delay="200"/>
+                            </p:stCondLst>
+                            <p:childTnLst>
+                              <p:animEffect transition="in" filter="fade">
+                                <p:cBhvr>
+                                  <p:cTn id="6" dur="450"/>
+                                  <p:tgtEl>
+                                    <p:spTgt spid="3"/>
+                                  </p:tgtEl>
+                                </p:cBhvr>
+                              </p:animEffect>
+                            </p:childTnLst>
+                          </p:cTn>
+                        </p:par>
+                        <p:par>
+                          <p:cTn id="7" presetID="10" presetClass="entr" presetSubtype="0" fill="hold" nodeType="withEffect">
+                            <p:stCondLst>
+                              <p:cond delay="200"/>
+                            </p:stCondLst>
+                            <p:childTnLst>
+                              <p:animEffect transition="in" filter="fade">
+                                <p:cBhvr>
+                                  <p:cTn id="8" dur="450"/>
+                                  <p:tgtEl>
+                                    <p:spTgt spid="4"/>
+                                  </p:tgtEl>
+                                </p:cBhvr>
+                              </p:animEffect>
+                            </p:childTnLst>
+                          </p:cTn>
+                        </p:par>
+                      </p:childTnLst>
+                    </p:cTn>
+                  </p:par>
+                </p:childTnLst>
+              </p:cTn>
+              <p:prevCondLst>
+                <p:cond evt="onPrev" delay="0">
+                  <p:tgtEl>
+                    <p:sldTgt/>
+                  </p:tgtEl>
+                </p:cond>
+              </p:prevCondLst>
+              <p:nextCondLst>
+                <p:cond evt="onNext" delay="0">
+                  <p:tgtEl>
+                    <p:sldTgt/>
+                  </p:tgtEl>
+                </p:cond>
+              </p:nextCondLst>
+            </p:seq>
+          </p:childTnLst>
+        </p:cTn>
+      </p:par>
+    </p:tnLst>
+  </p:timing>
 </p:sld>
 </file>
 
@@ -5280,6 +5730,96 @@
   <p:clrMapOvr>
     <a:masterClrMapping/>
   </p:clrMapOvr>
+  <p:timing>
+    <p:tnLst>
+      <p:par>
+        <p:cTn id="1" dur="indefinite" restart="never" nodeType="tmRoot">
+          <p:childTnLst>
+            <p:seq concurrent="true" nextAc="seek">
+              <p:cTn id="2" dur="indefinite" nodeType="mainSeq">
+                <p:childTnLst>
+                  <p:par>
+                    <p:cTn id="9" fill="hold">
+                      <p:stCondLst>
+                        <p:cond delay="0"/>
+                      </p:stCondLst>
+                      <p:childTnLst>
+                        <p:par>
+                          <p:cTn id="3" presetID="10" presetClass="entr" presetSubtype="0" fill="hold" nodeType="withEffect">
+                            <p:stCondLst>
+                              <p:cond delay="0"/>
+                            </p:stCondLst>
+                            <p:childTnLst>
+                              <p:animEffect transition="in" filter="fade">
+                                <p:cBhvr>
+                                  <p:cTn id="4" dur="450"/>
+                                  <p:tgtEl>
+                                    <p:spTgt spid="2"/>
+                                  </p:tgtEl>
+                                </p:cBhvr>
+                              </p:animEffect>
+                            </p:childTnLst>
+                          </p:cTn>
+                        </p:par>
+                        <p:par>
+                          <p:cTn id="5" presetID="10" presetClass="entr" presetSubtype="0" fill="hold" nodeType="withEffect">
+                            <p:stCondLst>
+                              <p:cond delay="200"/>
+                            </p:stCondLst>
+                            <p:childTnLst>
+                              <p:animEffect transition="in" filter="fade">
+                                <p:cBhvr>
+                                  <p:cTn id="6" dur="450"/>
+                                  <p:tgtEl>
+                                    <p:spTgt spid="3"/>
+                                  </p:tgtEl>
+                                </p:cBhvr>
+                              </p:animEffect>
+                            </p:childTnLst>
+                          </p:cTn>
+                        </p:par>
+                        <p:par>
+                          <p:cTn id="7" presetID="10" presetClass="entr" presetSubtype="0" fill="hold" nodeType="withEffect">
+                            <p:stCondLst>
+                              <p:cond delay="200"/>
+                            </p:stCondLst>
+                            <p:childTnLst>
+                              <p:animEffect transition="in" filter="fade">
+                                <p:cBhvr>
+                                  <p:cTn id="8" dur="450"/>
+                                  <p:tgtEl>
+                                    <p:spTgt spid="4"/>
+                                  </p:tgtEl>
+                                </p:cBhvr>
+                              </p:animEffect>
+                            </p:childTnLst>
+                          </p:cTn>
+                        </p:par>
+                      </p:childTnLst>
+                    </p:cTn>
+                  </p:par>
+                </p:childTnLst>
+              </p:cTn>
+              <p:prevCondLst>
+                <p:cond evt="onPrev" delay="0">
+                  <p:tgtEl>
+                    <p:sldTgt/>
+                  </p:tgtEl>
+                </p:cond>
+              </p:prevCondLst>
+              <p:nextCondLst>
+                <p:cond evt="onNext" delay="0">
+                  <p:tgtEl>
+                    <p:sldTgt/>
+                  </p:tgtEl>
+                </p:cond>
+              </p:nextCondLst>
+            </p:seq>
+          </p:childTnLst>
+        </p:cTn>
+      </p:par>
+    </p:tnLst>
+  </p:timing>
 </p:sld>
 </file>
 
@@ -5631,6 +6171,96 @@
   <p:clrMapOvr>
     <a:masterClrMapping/>
   </p:clrMapOvr>
+  <p:timing>
+    <p:tnLst>
+      <p:par>
+        <p:cTn id="1" dur="indefinite" restart="never" nodeType="tmRoot">
+          <p:childTnLst>
+            <p:seq concurrent="true" nextAc="seek">
+              <p:cTn id="2" dur="indefinite" nodeType="mainSeq">
+                <p:childTnLst>
+                  <p:par>
+                    <p:cTn id="9" fill="hold">
+                      <p:stCondLst>
+                        <p:cond delay="0"/>
+                      </p:stCondLst>
+                      <p:childTnLst>
+                        <p:par>
+                          <p:cTn id="3" presetID="10" presetClass="entr" presetSubtype="0" fill="hold" nodeType="withEffect">
+                            <p:stCondLst>
+                              <p:cond delay="0"/>
+                            </p:stCondLst>
+                            <p:childTnLst>
+                              <p:animEffect transition="in" filter="fade">
+                                <p:cBhvr>
+                                  <p:cTn id="4" dur="450"/>
+                                  <p:tgtEl>
+                                    <p:spTgt spid="2"/>
+                                  </p:tgtEl>
+                                </p:cBhvr>
+                              </p:animEffect>
+                            </p:childTnLst>
+                          </p:cTn>
+                        </p:par>
+                        <p:par>
+                          <p:cTn id="5" presetID="10" presetClass="entr" presetSubtype="0" fill="hold" nodeType="withEffect">
+                            <p:stCondLst>
+                              <p:cond delay="200"/>
+                            </p:stCondLst>
+                            <p:childTnLst>
+                              <p:animEffect transition="in" filter="fade">
+                                <p:cBhvr>
+                                  <p:cTn id="6" dur="450"/>
+                                  <p:tgtEl>
+                                    <p:spTgt spid="3"/>
+                                  </p:tgtEl>
+                                </p:cBhvr>
+                              </p:animEffect>
+                            </p:childTnLst>
+                          </p:cTn>
+                        </p:par>
+                        <p:par>
+                          <p:cTn id="7" presetID="10" presetClass="entr" presetSubtype="0" fill="hold" nodeType="withEffect">
+                            <p:stCondLst>
+                              <p:cond delay="200"/>
+                            </p:stCondLst>
+                            <p:childTnLst>
+                              <p:animEffect transition="in" filter="fade">
+                                <p:cBhvr>
+                                  <p:cTn id="8" dur="450"/>
+                                  <p:tgtEl>
+                                    <p:spTgt spid="4"/>
+                                  </p:tgtEl>
+                                </p:cBhvr>
+                              </p:animEffect>
+                            </p:childTnLst>
+                          </p:cTn>
+                        </p:par>
+                      </p:childTnLst>
+                    </p:cTn>
+                  </p:par>
+                </p:childTnLst>
+              </p:cTn>
+              <p:prevCondLst>
+                <p:cond evt="onPrev" delay="0">
+                  <p:tgtEl>
+                    <p:sldTgt/>
+                  </p:tgtEl>
+                </p:cond>
+              </p:prevCondLst>
+              <p:nextCondLst>
+                <p:cond evt="onNext" delay="0">
+                  <p:tgtEl>
+                    <p:sldTgt/>
+                  </p:tgtEl>
+                </p:cond>
+              </p:nextCondLst>
+            </p:seq>
+          </p:childTnLst>
+        </p:cTn>
+      </p:par>
+    </p:tnLst>
+  </p:timing>
 </p:sld>
 </file>
 
@@ -5980,6 +6610,96 @@
   <p:clrMapOvr>
     <a:masterClrMapping/>
   </p:clrMapOvr>
+  <p:timing>
+    <p:tnLst>
+      <p:par>
+        <p:cTn id="1" dur="indefinite" restart="never" nodeType="tmRoot">
+          <p:childTnLst>
+            <p:seq concurrent="true" nextAc="seek">
+              <p:cTn id="2" dur="indefinite" nodeType="mainSeq">
+                <p:childTnLst>
+                  <p:par>
+                    <p:cTn id="9" fill="hold">
+                      <p:stCondLst>
+                        <p:cond delay="0"/>
+                      </p:stCondLst>
+                      <p:childTnLst>
+                        <p:par>
+                          <p:cTn id="3" presetID="10" presetClass="entr" presetSubtype="0" fill="hold" nodeType="withEffect">
+                            <p:stCondLst>
+                              <p:cond delay="0"/>
+                            </p:stCondLst>
+                            <p:childTnLst>
+                              <p:animEffect transition="in" filter="fade">
+                                <p:cBhvr>
+                                  <p:cTn id="4" dur="450"/>
+                                  <p:tgtEl>
+                                    <p:spTgt spid="2"/>
+                                  </p:tgtEl>
+                                </p:cBhvr>
+                              </p:animEffect>
+                            </p:childTnLst>
+                          </p:cTn>
+                        </p:par>
+                        <p:par>
+                          <p:cTn id="5" presetID="10" presetClass="entr" presetSubtype="0" fill="hold" nodeType="withEffect">
+                            <p:stCondLst>
+                              <p:cond delay="200"/>
+                            </p:stCondLst>
+                            <p:childTnLst>
+                              <p:animEffect transition="in" filter="fade">
+                                <p:cBhvr>
+                                  <p:cTn id="6" dur="450"/>
+                                  <p:tgtEl>
+                                    <p:spTgt spid="3"/>
+                                  </p:tgtEl>
+                                </p:cBhvr>
+                              </p:animEffect>
+                            </p:childTnLst>
+                          </p:cTn>
+                        </p:par>
+                        <p:par>
+                          <p:cTn id="7" presetID="10" presetClass="entr" presetSubtype="0" fill="hold" nodeType="withEffect">
+                            <p:stCondLst>
+                              <p:cond delay="200"/>
+                            </p:stCondLst>
+                            <p:childTnLst>
+                              <p:animEffect transition="in" filter="fade">
+                                <p:cBhvr>
+                                  <p:cTn id="8" dur="450"/>
+                                  <p:tgtEl>
+                                    <p:spTgt spid="4"/>
+                                  </p:tgtEl>
+                                </p:cBhvr>
+                              </p:animEffect>
+                            </p:childTnLst>
+                          </p:cTn>
+                        </p:par>
+                      </p:childTnLst>
+                    </p:cTn>
+                  </p:par>
+                </p:childTnLst>
+              </p:cTn>
+              <p:prevCondLst>
+                <p:cond evt="onPrev" delay="0">
+                  <p:tgtEl>
+                    <p:sldTgt/>
+                  </p:tgtEl>
+                </p:cond>
+              </p:prevCondLst>
+              <p:nextCondLst>
+                <p:cond evt="onNext" delay="0">
+                  <p:tgtEl>
+                    <p:sldTgt/>
+                  </p:tgtEl>
+                </p:cond>
+              </p:nextCondLst>
+            </p:seq>
+          </p:childTnLst>
+        </p:cTn>
+      </p:par>
+    </p:tnLst>
+  </p:timing>
 </p:sld>
 </file>
 
@@ -6308,6 +7028,96 @@
   <p:clrMapOvr>
     <a:masterClrMapping/>
   </p:clrMapOvr>
+  <p:timing>
+    <p:tnLst>
+      <p:par>
+        <p:cTn id="1" dur="indefinite" restart="never" nodeType="tmRoot">
+          <p:childTnLst>
+            <p:seq concurrent="true" nextAc="seek">
+              <p:cTn id="2" dur="indefinite" nodeType="mainSeq">
+                <p:childTnLst>
+                  <p:par>
+                    <p:cTn id="9" fill="hold">
+                      <p:stCondLst>
+                        <p:cond delay="0"/>
+                      </p:stCondLst>
+                      <p:childTnLst>
+                        <p:par>
+                          <p:cTn id="3" presetID="10" presetClass="entr" presetSubtype="0" fill="hold" nodeType="withEffect">
+                            <p:stCondLst>
+                              <p:cond delay="0"/>
+                            </p:stCondLst>
+                            <p:childTnLst>
+                              <p:animEffect transition="in" filter="fade">
+                                <p:cBhvr>
+                                  <p:cTn id="4" dur="450"/>
+                                  <p:tgtEl>
+                                    <p:spTgt spid="2"/>
+                                  </p:tgtEl>
+                                </p:cBhvr>
+                              </p:animEffect>
+                            </p:childTnLst>
+                          </p:cTn>
+                        </p:par>
+                        <p:par>
+                          <p:cTn id="5" presetID="10" presetClass="entr" presetSubtype="0" fill="hold" nodeType="withEffect">
+                            <p:stCondLst>
+                              <p:cond delay="200"/>
+                            </p:stCondLst>
+                            <p:childTnLst>
+                              <p:animEffect transition="in" filter="fade">
+                                <p:cBhvr>
+                                  <p:cTn id="6" dur="450"/>
+                                  <p:tgtEl>
+                                    <p:spTgt spid="3"/>
+                                  </p:tgtEl>
+                                </p:cBhvr>
+                              </p:animEffect>
+                            </p:childTnLst>
+                          </p:cTn>
+                        </p:par>
+                        <p:par>
+                          <p:cTn id="7" presetID="10" presetClass="entr" presetSubtype="0" fill="hold" nodeType="withEffect">
+                            <p:stCondLst>
+                              <p:cond delay="200"/>
+                            </p:stCondLst>
+                            <p:childTnLst>
+                              <p:animEffect transition="in" filter="fade">
+                                <p:cBhvr>
+                                  <p:cTn id="8" dur="450"/>
+                                  <p:tgtEl>
+                                    <p:spTgt spid="4"/>
+                                  </p:tgtEl>
+                                </p:cBhvr>
+                              </p:animEffect>
+                            </p:childTnLst>
+                          </p:cTn>
+                        </p:par>
+                      </p:childTnLst>
+                    </p:cTn>
+                  </p:par>
+                </p:childTnLst>
+              </p:cTn>
+              <p:prevCondLst>
+                <p:cond evt="onPrev" delay="0">
+                  <p:tgtEl>
+                    <p:sldTgt/>
+                  </p:tgtEl>
+                </p:cond>
+              </p:prevCondLst>
+              <p:nextCondLst>
+                <p:cond evt="onNext" delay="0">
+                  <p:tgtEl>
+                    <p:sldTgt/>
+                  </p:tgtEl>
+                </p:cond>
+              </p:nextCondLst>
+            </p:seq>
+          </p:childTnLst>
+        </p:cTn>
+      </p:par>
+    </p:tnLst>
+  </p:timing>
 </p:sld>
 </file>
 
